--- a/decks/speaking-up-lesson-v2.pptx
+++ b/decks/speaking-up-lesson-v2.pptx
@@ -17,6 +17,7 @@
     <p:sldId id="265" r:id="rId17"/>
     <p:sldId id="266" r:id="rId18"/>
     <p:sldId id="267" r:id="rId19"/>
+    <p:sldId id="268" r:id="rId20"/>
   </p:sldIdLst>
   <p:sldSz cx="12192000" cy="6858000" type="screen4x3"/>
   <p:notesSz cx="6858000" cy="9144000"/>
@@ -513,7 +514,77 @@
           <a:lstStyle/>
           <a:p>
             <a:r>
-              <a:t>This page and the next three are hidden. They stay in the deck for you and are skipped when you present.</a:t>
+              <a:t>This page is hidden and skipped when you present. The full plan, care notes and research are on the hidden pages at the end of the deck, if you want them.</a:t>
+            </a:r>
+          </a:p>
+        </p:txBody>
+      </p:sp>
+      <p:sp>
+        <p:nvSpPr>
+          <p:cNvPr id="4" name="Slide Number Placeholder 3"/>
+          <p:cNvSpPr>
+            <a:spLocks noGrp="1"/>
+          </p:cNvSpPr>
+          <p:nvPr>
+            <p:ph type="sldNum" idx="5" sz="quarter"/>
+          </p:nvPr>
+        </p:nvSpPr>
+        <p:spPr/>
+      </p:sp>
+    </p:spTree>
+  </p:cSld>
+  <p:clrMapOvr>
+    <a:masterClrMapping/>
+  </p:clrMapOvr>
+</p:notes>
+</file>
+
+<file path=ppt/notesSlides/notesSlide10.xml><?xml version="1.0" encoding="utf-8"?>
+<p:notes xmlns:a="http://schemas.openxmlformats.org/drawingml/2006/main" xmlns:p="http://schemas.openxmlformats.org/presentationml/2006/main" xmlns:r="http://schemas.openxmlformats.org/officeDocument/2006/relationships">
+  <p:cSld>
+    <p:spTree>
+      <p:nvGrpSpPr>
+        <p:cNvPr id="1" name=""/>
+        <p:cNvGrpSpPr/>
+        <p:nvPr/>
+      </p:nvGrpSpPr>
+      <p:grpSpPr>
+        <a:xfrm>
+          <a:off x="0" y="0"/>
+          <a:ext cx="0" cy="0"/>
+          <a:chOff x="0" y="0"/>
+          <a:chExt cx="0" cy="0"/>
+        </a:xfrm>
+      </p:grpSpPr>
+      <p:sp>
+        <p:nvSpPr>
+          <p:cNvPr id="2" name="Slide Image Placeholder 1"/>
+          <p:cNvSpPr>
+            <a:spLocks noGrp="1"/>
+          </p:cNvSpPr>
+          <p:nvPr>
+            <p:ph type="sldImg" idx="2"/>
+          </p:nvPr>
+        </p:nvSpPr>
+        <p:spPr/>
+      </p:sp>
+      <p:sp>
+        <p:nvSpPr>
+          <p:cNvPr id="3" name="Notes Placeholder 2"/>
+          <p:cNvSpPr>
+            <a:spLocks noGrp="1"/>
+          </p:cNvSpPr>
+          <p:nvPr>
+            <p:ph type="body" idx="3" sz="quarter"/>
+          </p:nvPr>
+        </p:nvSpPr>
+        <p:spPr/>
+        <p:txBody>
+          <a:bodyPr/>
+          <a:lstStyle/>
+          <a:p>
+            <a:r>
+              <a:t>If you want more: this page and the next three are hidden and skipped when you present.</a:t>
             </a:r>
           </a:p>
         </p:txBody>
@@ -4165,7 +4236,7 @@
                 </a:solidFill>
                 <a:latin typeface="Inter Tight"/>
               </a:rPr>
-              <a:t>TEACHER PAGE  ·  skipped when you present  ·  Lesson plan</a:t>
+              <a:t>TEACHER PAGE  ·  skipped when you present  ·  Before you start</a:t>
             </a:r>
           </a:p>
         </p:txBody>
@@ -4256,8 +4327,8 @@
         </p:nvSpPr>
         <p:spPr>
           <a:xfrm>
-            <a:off x="548640" y="1828800"/>
-            <a:ext cx="5120640" cy="4389120"/>
+            <a:off x="548640" y="2011680"/>
+            <a:ext cx="11064240" cy="4206240"/>
           </a:xfrm>
           <a:prstGeom prst="rect">
             <a:avLst/>
@@ -4272,43 +4343,43 @@
           <a:p>
             <a:pPr algn="l">
               <a:spcAft>
-                <a:spcPts val="675"/>
-              </a:spcAft>
-            </a:pPr>
-            <a:r>
-              <a:rPr sz="1100" b="1" i="0">
+                <a:spcPts val="900"/>
+              </a:spcAft>
+            </a:pPr>
+            <a:r>
+              <a:rPr sz="1200" b="1" i="0">
                 <a:solidFill>
                   <a:srgbClr val="0B2D5B"/>
                 </a:solidFill>
                 <a:latin typeface="Inter Tight"/>
               </a:rPr>
-              <a:t>GOAL</a:t>
-            </a:r>
-          </a:p>
-          <a:p>
-            <a:pPr algn="l">
-              <a:spcAft>
-                <a:spcPts val="675"/>
-              </a:spcAft>
-            </a:pPr>
-            <a:r>
-              <a:rPr sz="1500" b="0" i="0">
+              <a:t>BEFORE YOU START</a:t>
+            </a:r>
+          </a:p>
+          <a:p>
+            <a:pPr algn="l">
+              <a:spcAft>
+                <a:spcPts val="900"/>
+              </a:spcAft>
+            </a:pPr>
+            <a:r>
+              <a:rPr sz="2000" b="0" i="0">
                 <a:solidFill>
                   <a:srgbClr val="1C1B19"/>
                 </a:solidFill>
                 <a:latin typeface="Source Serif 4"/>
               </a:rPr>
-              <a:t>Students can name the five gates between seeing something and doing something, explain why freezing is common, and pick one of four moves (distract, delegate, direct, delay) that is safe for them, with a line ready before they need it. Nobody shares a real incident or a real name.</a:t>
-            </a:r>
-          </a:p>
-          <a:p>
-            <a:pPr algn="l">
-              <a:spcAft>
-                <a:spcPts val="675"/>
-              </a:spcAft>
-            </a:pPr>
-            <a:r>
-              <a:rPr sz="1500" b="0" i="0">
+              <a:t>Students learn why people freeze, and pick one of four moves (distract, delegate, direct, delay) that's safe for them, with a line ready ahead of time. Bring index cards, use only the moments on the slides, and take anything real to a counselor or dean that day.</a:t>
+            </a:r>
+          </a:p>
+          <a:p>
+            <a:pPr algn="l">
+              <a:spcAft>
+                <a:spcPts val="900"/>
+              </a:spcAft>
+            </a:pPr>
+            <a:r>
+              <a:rPr sz="2000" b="0" i="0">
                 <a:solidFill>
                   <a:srgbClr val="1C1B19"/>
                 </a:solidFill>
@@ -4320,327 +4391,33 @@
           <a:p>
             <a:pPr algn="l">
               <a:spcAft>
-                <a:spcPts val="675"/>
-              </a:spcAft>
-            </a:pPr>
-            <a:r>
-              <a:rPr sz="1100" b="1" i="0">
+                <a:spcPts val="900"/>
+              </a:spcAft>
+            </a:pPr>
+            <a:r>
+              <a:rPr sz="1200" b="1" i="0">
                 <a:solidFill>
                   <a:srgbClr val="0B2D5B"/>
                 </a:solidFill>
                 <a:latin typeface="Inter Tight"/>
               </a:rPr>
-              <a:t>MATERIALS</a:t>
-            </a:r>
-          </a:p>
-          <a:p>
-            <a:pPr algn="l">
-              <a:spcAft>
-                <a:spcPts val="675"/>
-              </a:spcAft>
-            </a:pPr>
-            <a:r>
-              <a:rPr sz="1500" b="0" i="0">
+              <a:t>EVERY STUDENT IN THE ROOM</a:t>
+            </a:r>
+          </a:p>
+          <a:p>
+            <a:pPr algn="l">
+              <a:spcAft>
+                <a:spcPts val="900"/>
+              </a:spcAft>
+            </a:pPr>
+            <a:r>
+              <a:rPr sz="2000" b="0" i="0">
                 <a:solidFill>
                   <a:srgbClr val="1C1B19"/>
                 </a:solidFill>
                 <a:latin typeface="Source Serif 4"/>
               </a:rPr>
-              <a:t>Index cards: one per student, for the anonymous yes/no and the private line</a:t>
-            </a:r>
-          </a:p>
-          <a:p>
-            <a:pPr algn="l">
-              <a:spcAft>
-                <a:spcPts val="675"/>
-              </a:spcAft>
-            </a:pPr>
-            <a:r>
-              <a:rPr sz="1500" b="0" i="0">
-                <a:solidFill>
-                  <a:srgbClr val="1C1B19"/>
-                </a:solidFill>
-                <a:latin typeface="Source Serif 4"/>
-              </a:rPr>
-              <a:t>A board or sheet of paper for the tally</a:t>
-            </a:r>
-          </a:p>
-          <a:p>
-            <a:pPr algn="l">
-              <a:spcAft>
-                <a:spcPts val="675"/>
-              </a:spcAft>
-            </a:pPr>
-            <a:r>
-              <a:rPr sz="1500" b="0" i="0">
-                <a:solidFill>
-                  <a:srgbClr val="1C1B19"/>
-                </a:solidFill>
-                <a:latin typeface="Source Serif 4"/>
-              </a:rPr>
-              <a:t>The student page link (last slide) to share after advisory</a:t>
-            </a:r>
-          </a:p>
-        </p:txBody>
-      </p:sp>
-      <p:sp>
-        <p:nvSpPr>
-          <p:cNvPr id="7" name="TextBox 6"/>
-          <p:cNvSpPr txBox="1"/>
-          <p:nvPr/>
-        </p:nvSpPr>
-        <p:spPr>
-          <a:xfrm>
-            <a:off x="6126480" y="1828800"/>
-            <a:ext cx="5486400" cy="4389120"/>
-          </a:xfrm>
-          <a:prstGeom prst="rect">
-            <a:avLst/>
-          </a:prstGeom>
-          <a:noFill/>
-        </p:spPr>
-        <p:txBody>
-          <a:bodyPr wrap="square" anchor="t" lIns="0" rIns="0" tIns="0" bIns="0">
-            <a:spAutoFit/>
-          </a:bodyPr>
-          <a:lstStyle/>
-          <a:p>
-            <a:pPr algn="l">
-              <a:spcAft>
-                <a:spcPts val="630"/>
-              </a:spcAft>
-            </a:pPr>
-            <a:r>
-              <a:rPr sz="1100" b="1" i="0">
-                <a:solidFill>
-                  <a:srgbClr val="0B2D5B"/>
-                </a:solidFill>
-                <a:latin typeface="Inter Tight"/>
-              </a:rPr>
-              <a:t>FLOW</a:t>
-            </a:r>
-          </a:p>
-          <a:p>
-            <a:pPr algn="l">
-              <a:spcAft>
-                <a:spcPts val="630"/>
-              </a:spcAft>
-            </a:pPr>
-            <a:r>
-              <a:rPr sz="1300" b="1" i="0">
-                <a:solidFill>
-                  <a:srgbClr val="F47B20"/>
-                </a:solidFill>
-                <a:latin typeface="Inter Tight"/>
-              </a:rPr>
-              <a:t>3 min   </a:t>
-            </a:r>
-            <a:r>
-              <a:rPr sz="1400" b="0" i="0">
-                <a:solidFill>
-                  <a:srgbClr val="1C1B19"/>
-                </a:solidFill>
-                <a:latin typeface="Source Serif 4"/>
-              </a:rPr>
-              <a:t>Have you ever frozen? (anonymous cards)</a:t>
-            </a:r>
-          </a:p>
-          <a:p>
-            <a:pPr algn="l">
-              <a:spcAft>
-                <a:spcPts val="630"/>
-              </a:spcAft>
-            </a:pPr>
-            <a:r>
-              <a:rPr sz="1300" b="1" i="0">
-                <a:solidFill>
-                  <a:srgbClr val="F47B20"/>
-                </a:solidFill>
-                <a:latin typeface="Inter Tight"/>
-              </a:rPr>
-              <a:t>4 min   </a:t>
-            </a:r>
-            <a:r>
-              <a:rPr sz="1400" b="0" i="0">
-                <a:solidFill>
-                  <a:srgbClr val="1C1B19"/>
-                </a:solidFill>
-                <a:latin typeface="Source Serif 4"/>
-              </a:rPr>
-              <a:t>Five gates (pair-share: where do you get stuck?)</a:t>
-            </a:r>
-          </a:p>
-          <a:p>
-            <a:pPr algn="l">
-              <a:spcAft>
-                <a:spcPts val="630"/>
-              </a:spcAft>
-            </a:pPr>
-            <a:r>
-              <a:rPr sz="1300" b="1" i="0">
-                <a:solidFill>
-                  <a:srgbClr val="F47B20"/>
-                </a:solidFill>
-                <a:latin typeface="Inter Tight"/>
-              </a:rPr>
-              <a:t>3 min   </a:t>
-            </a:r>
-            <a:r>
-              <a:rPr sz="1400" b="0" i="0">
-                <a:solidFill>
-                  <a:srgbClr val="1C1B19"/>
-                </a:solidFill>
-                <a:latin typeface="Source Serif 4"/>
-              </a:rPr>
-              <a:t>Someone usually steps in, and it works</a:t>
-            </a:r>
-          </a:p>
-          <a:p>
-            <a:pPr algn="l">
-              <a:spcAft>
-                <a:spcPts val="630"/>
-              </a:spcAft>
-            </a:pPr>
-            <a:r>
-              <a:rPr sz="1300" b="1" i="0">
-                <a:solidFill>
-                  <a:srgbClr val="F47B20"/>
-                </a:solidFill>
-                <a:latin typeface="Inter Tight"/>
-              </a:rPr>
-              <a:t>2 min   </a:t>
-            </a:r>
-            <a:r>
-              <a:rPr sz="1400" b="0" i="0">
-                <a:solidFill>
-                  <a:srgbClr val="1C1B19"/>
-                </a:solidFill>
-                <a:latin typeface="Source Serif 4"/>
-              </a:rPr>
-              <a:t>Four ways to step in</a:t>
-            </a:r>
-          </a:p>
-          <a:p>
-            <a:pPr algn="l">
-              <a:spcAft>
-                <a:spcPts val="630"/>
-              </a:spcAft>
-            </a:pPr>
-            <a:r>
-              <a:rPr sz="1300" b="1" i="0">
-                <a:solidFill>
-                  <a:srgbClr val="F47B20"/>
-                </a:solidFill>
-                <a:latin typeface="Inter Tight"/>
-              </a:rPr>
-              <a:t>5 min   </a:t>
-            </a:r>
-            <a:r>
-              <a:rPr sz="1400" b="0" i="0">
-                <a:solidFill>
-                  <a:srgbClr val="1C1B19"/>
-                </a:solidFill>
-                <a:latin typeface="Source Serif 4"/>
-              </a:rPr>
-              <a:t>Three moments (scenario talk)</a:t>
-            </a:r>
-          </a:p>
-          <a:p>
-            <a:pPr algn="l">
-              <a:spcAft>
-                <a:spcPts val="630"/>
-              </a:spcAft>
-            </a:pPr>
-            <a:r>
-              <a:rPr sz="1300" b="1" i="0">
-                <a:solidFill>
-                  <a:srgbClr val="F47B20"/>
-                </a:solidFill>
-                <a:latin typeface="Inter Tight"/>
-              </a:rPr>
-              <a:t>2 min   </a:t>
-            </a:r>
-            <a:r>
-              <a:rPr sz="1400" b="0" i="0">
-                <a:solidFill>
-                  <a:srgbClr val="1C1B19"/>
-                </a:solidFill>
-                <a:latin typeface="Source Serif 4"/>
-              </a:rPr>
-              <a:t>Your line (private card)</a:t>
-            </a:r>
-          </a:p>
-          <a:p>
-            <a:pPr algn="l">
-              <a:spcAft>
-                <a:spcPts val="630"/>
-              </a:spcAft>
-            </a:pPr>
-            <a:r>
-              <a:rPr sz="1300" b="1" i="0">
-                <a:solidFill>
-                  <a:srgbClr val="F47B20"/>
-                </a:solidFill>
-                <a:latin typeface="Inter Tight"/>
-              </a:rPr>
-              <a:t>1 min   </a:t>
-            </a:r>
-            <a:r>
-              <a:rPr sz="1400" b="0" i="0">
-                <a:solidFill>
-                  <a:srgbClr val="1C1B19"/>
-                </a:solidFill>
-                <a:latin typeface="Source Serif 4"/>
-              </a:rPr>
-              <a:t>One move, and the student page link</a:t>
-            </a:r>
-          </a:p>
-          <a:p>
-            <a:pPr algn="l">
-              <a:spcAft>
-                <a:spcPts val="630"/>
-              </a:spcAft>
-            </a:pPr>
-            <a:r>
-              <a:rPr sz="1400" b="0" i="0">
-                <a:solidFill>
-                  <a:srgbClr val="1C1B19"/>
-                </a:solidFill>
-                <a:latin typeface="Source Serif 4"/>
-              </a:rPr>
-              <a:t/>
-            </a:r>
-          </a:p>
-          <a:p>
-            <a:pPr algn="l">
-              <a:spcAft>
-                <a:spcPts val="630"/>
-              </a:spcAft>
-            </a:pPr>
-            <a:r>
-              <a:rPr sz="1100" b="1" i="0">
-                <a:solidFill>
-                  <a:srgbClr val="0B2D5B"/>
-                </a:solidFill>
-                <a:latin typeface="Inter Tight"/>
-              </a:rPr>
-              <a:t>SHORT ON TIME (10-MINUTE CHECK-IN)</a:t>
-            </a:r>
-          </a:p>
-          <a:p>
-            <a:pPr algn="l">
-              <a:spcAft>
-                <a:spcPts val="630"/>
-              </a:spcAft>
-            </a:pPr>
-            <a:r>
-              <a:rPr sz="1400" b="0" i="0">
-                <a:solidFill>
-                  <a:srgbClr val="1C1B19"/>
-                </a:solidFill>
-                <a:latin typeface="Source Serif 4"/>
-              </a:rPr>
-              <a:t>Anonymous cards and the tally (3), the five gates with a quick pair-share (3), one scenario with the four moves (3), close and the link (1).</a:t>
+              <a:t>Speaking up costs some students more than others, so present all four moves as equal, and keep bodies out of the locker room discussion.</a:t>
             </a:r>
           </a:p>
         </p:txBody>
@@ -4654,6 +4431,2244 @@
 </file>
 
 <file path=ppt/slides/slide10.xml><?xml version="1.0" encoding="utf-8"?>
+<p:sld xmlns:a="http://schemas.openxmlformats.org/drawingml/2006/main" xmlns:p="http://schemas.openxmlformats.org/presentationml/2006/main" xmlns:r="http://schemas.openxmlformats.org/officeDocument/2006/relationships" show="0">
+  <p:cSld>
+    <p:bg>
+      <p:bgPr>
+        <a:solidFill>
+          <a:srgbClr val="EEEBE4"/>
+        </a:solidFill>
+        <a:effectLst/>
+      </p:bgPr>
+    </p:bg>
+    <p:spTree>
+      <p:nvGrpSpPr>
+        <p:cNvPr id="1" name=""/>
+        <p:cNvGrpSpPr/>
+        <p:nvPr/>
+      </p:nvGrpSpPr>
+      <p:grpSpPr/>
+      <p:sp>
+        <p:nvSpPr>
+          <p:cNvPr id="2" name="Rectangle 1"/>
+          <p:cNvSpPr/>
+          <p:nvPr/>
+        </p:nvSpPr>
+        <p:spPr>
+          <a:xfrm>
+            <a:off x="0" y="0"/>
+            <a:ext cx="12191695" cy="384048"/>
+          </a:xfrm>
+          <a:prstGeom prst="rect">
+            <a:avLst/>
+          </a:prstGeom>
+          <a:solidFill>
+            <a:srgbClr val="0B2D5B"/>
+          </a:solidFill>
+          <a:ln>
+            <a:noFill/>
+          </a:ln>
+          <a:effectLst/>
+        </p:spPr>
+        <p:style>
+          <a:lnRef idx="1">
+            <a:schemeClr val="accent1"/>
+          </a:lnRef>
+          <a:fillRef idx="3">
+            <a:schemeClr val="accent1"/>
+          </a:fillRef>
+          <a:effectRef idx="2">
+            <a:schemeClr val="accent1"/>
+          </a:effectRef>
+          <a:fontRef idx="minor">
+            <a:schemeClr val="lt1"/>
+          </a:fontRef>
+        </p:style>
+        <p:txBody>
+          <a:bodyPr rtlCol="0" anchor="ctr"/>
+          <a:lstStyle/>
+          <a:p>
+            <a:pPr algn="ctr"/>
+          </a:p>
+        </p:txBody>
+      </p:sp>
+      <p:sp>
+        <p:nvSpPr>
+          <p:cNvPr id="3" name="TextBox 2"/>
+          <p:cNvSpPr txBox="1"/>
+          <p:nvPr/>
+        </p:nvSpPr>
+        <p:spPr>
+          <a:xfrm>
+            <a:off x="548640" y="100584"/>
+            <a:ext cx="10972800" cy="274320"/>
+          </a:xfrm>
+          <a:prstGeom prst="rect">
+            <a:avLst/>
+          </a:prstGeom>
+          <a:noFill/>
+        </p:spPr>
+        <p:txBody>
+          <a:bodyPr wrap="square" anchor="t" lIns="0" rIns="0" tIns="0" bIns="0">
+            <a:spAutoFit/>
+          </a:bodyPr>
+          <a:lstStyle/>
+          <a:p>
+            <a:pPr algn="l">
+              <a:spcAft>
+                <a:spcPts val="495"/>
+              </a:spcAft>
+            </a:pPr>
+            <a:r>
+              <a:rPr sz="1100" b="1" i="0">
+                <a:solidFill>
+                  <a:srgbClr val="FFFFFF"/>
+                </a:solidFill>
+                <a:latin typeface="Inter Tight"/>
+              </a:rPr>
+              <a:t>TEACHER PAGE  ·  skipped when you present  ·  Lesson plan</a:t>
+            </a:r>
+          </a:p>
+        </p:txBody>
+      </p:sp>
+      <p:sp>
+        <p:nvSpPr>
+          <p:cNvPr id="4" name="TextBox 3"/>
+          <p:cNvSpPr txBox="1"/>
+          <p:nvPr/>
+        </p:nvSpPr>
+        <p:spPr>
+          <a:xfrm>
+            <a:off x="548640" y="685800"/>
+            <a:ext cx="10972800" cy="731520"/>
+          </a:xfrm>
+          <a:prstGeom prst="rect">
+            <a:avLst/>
+          </a:prstGeom>
+          <a:noFill/>
+        </p:spPr>
+        <p:txBody>
+          <a:bodyPr wrap="square" anchor="t" lIns="0" rIns="0" tIns="0" bIns="0">
+            <a:spAutoFit/>
+          </a:bodyPr>
+          <a:lstStyle/>
+          <a:p>
+            <a:pPr algn="l">
+              <a:spcAft>
+                <a:spcPts val="1530"/>
+              </a:spcAft>
+            </a:pPr>
+            <a:r>
+              <a:rPr sz="3400" b="1" i="0">
+                <a:solidFill>
+                  <a:srgbClr val="1C1B19"/>
+                </a:solidFill>
+                <a:latin typeface="Source Serif 4"/>
+              </a:rPr>
+              <a:t>Speaking Up</a:t>
+            </a:r>
+          </a:p>
+        </p:txBody>
+      </p:sp>
+      <p:sp>
+        <p:nvSpPr>
+          <p:cNvPr id="5" name="TextBox 4"/>
+          <p:cNvSpPr txBox="1"/>
+          <p:nvPr/>
+        </p:nvSpPr>
+        <p:spPr>
+          <a:xfrm>
+            <a:off x="548640" y="1325880"/>
+            <a:ext cx="10972800" cy="365760"/>
+          </a:xfrm>
+          <a:prstGeom prst="rect">
+            <a:avLst/>
+          </a:prstGeom>
+          <a:noFill/>
+        </p:spPr>
+        <p:txBody>
+          <a:bodyPr wrap="square" anchor="t" lIns="0" rIns="0" tIns="0" bIns="0">
+            <a:spAutoFit/>
+          </a:bodyPr>
+          <a:lstStyle/>
+          <a:p>
+            <a:pPr algn="l">
+              <a:spcAft>
+                <a:spcPts val="630"/>
+              </a:spcAft>
+            </a:pPr>
+            <a:r>
+              <a:rPr sz="1400" b="0" i="0">
+                <a:solidFill>
+                  <a:srgbClr val="5D5A54"/>
+                </a:solidFill>
+                <a:latin typeface="Inter Tight"/>
+              </a:rPr>
+              <a:t>Upper School  ·  20 minutes (fits a 30-minute advisory, with time for your opening check-in; 10-minute version below)  ·  Any grade</a:t>
+            </a:r>
+          </a:p>
+        </p:txBody>
+      </p:sp>
+      <p:sp>
+        <p:nvSpPr>
+          <p:cNvPr id="6" name="TextBox 5"/>
+          <p:cNvSpPr txBox="1"/>
+          <p:nvPr/>
+        </p:nvSpPr>
+        <p:spPr>
+          <a:xfrm>
+            <a:off x="548640" y="1828800"/>
+            <a:ext cx="5120640" cy="4389120"/>
+          </a:xfrm>
+          <a:prstGeom prst="rect">
+            <a:avLst/>
+          </a:prstGeom>
+          <a:noFill/>
+        </p:spPr>
+        <p:txBody>
+          <a:bodyPr wrap="square" anchor="t" lIns="0" rIns="0" tIns="0" bIns="0">
+            <a:spAutoFit/>
+          </a:bodyPr>
+          <a:lstStyle/>
+          <a:p>
+            <a:pPr algn="l">
+              <a:spcAft>
+                <a:spcPts val="675"/>
+              </a:spcAft>
+            </a:pPr>
+            <a:r>
+              <a:rPr sz="1100" b="1" i="0">
+                <a:solidFill>
+                  <a:srgbClr val="0B2D5B"/>
+                </a:solidFill>
+                <a:latin typeface="Inter Tight"/>
+              </a:rPr>
+              <a:t>GOAL</a:t>
+            </a:r>
+          </a:p>
+          <a:p>
+            <a:pPr algn="l">
+              <a:spcAft>
+                <a:spcPts val="675"/>
+              </a:spcAft>
+            </a:pPr>
+            <a:r>
+              <a:rPr sz="1500" b="0" i="0">
+                <a:solidFill>
+                  <a:srgbClr val="1C1B19"/>
+                </a:solidFill>
+                <a:latin typeface="Source Serif 4"/>
+              </a:rPr>
+              <a:t>Students can name the five gates between seeing something and doing something, explain why freezing is common, and pick one of four moves (distract, delegate, direct, delay) that is safe for them, with a line ready before they need it. Nobody shares a real incident or a real name.</a:t>
+            </a:r>
+          </a:p>
+          <a:p>
+            <a:pPr algn="l">
+              <a:spcAft>
+                <a:spcPts val="675"/>
+              </a:spcAft>
+            </a:pPr>
+            <a:r>
+              <a:rPr sz="1500" b="0" i="0">
+                <a:solidFill>
+                  <a:srgbClr val="1C1B19"/>
+                </a:solidFill>
+                <a:latin typeface="Source Serif 4"/>
+              </a:rPr>
+              <a:t/>
+            </a:r>
+          </a:p>
+          <a:p>
+            <a:pPr algn="l">
+              <a:spcAft>
+                <a:spcPts val="675"/>
+              </a:spcAft>
+            </a:pPr>
+            <a:r>
+              <a:rPr sz="1100" b="1" i="0">
+                <a:solidFill>
+                  <a:srgbClr val="0B2D5B"/>
+                </a:solidFill>
+                <a:latin typeface="Inter Tight"/>
+              </a:rPr>
+              <a:t>MATERIALS</a:t>
+            </a:r>
+          </a:p>
+          <a:p>
+            <a:pPr algn="l">
+              <a:spcAft>
+                <a:spcPts val="675"/>
+              </a:spcAft>
+            </a:pPr>
+            <a:r>
+              <a:rPr sz="1500" b="0" i="0">
+                <a:solidFill>
+                  <a:srgbClr val="1C1B19"/>
+                </a:solidFill>
+                <a:latin typeface="Source Serif 4"/>
+              </a:rPr>
+              <a:t>Index cards: one per student, for the anonymous yes/no and the private line</a:t>
+            </a:r>
+          </a:p>
+          <a:p>
+            <a:pPr algn="l">
+              <a:spcAft>
+                <a:spcPts val="675"/>
+              </a:spcAft>
+            </a:pPr>
+            <a:r>
+              <a:rPr sz="1500" b="0" i="0">
+                <a:solidFill>
+                  <a:srgbClr val="1C1B19"/>
+                </a:solidFill>
+                <a:latin typeface="Source Serif 4"/>
+              </a:rPr>
+              <a:t>A board or sheet of paper for the tally</a:t>
+            </a:r>
+          </a:p>
+          <a:p>
+            <a:pPr algn="l">
+              <a:spcAft>
+                <a:spcPts val="675"/>
+              </a:spcAft>
+            </a:pPr>
+            <a:r>
+              <a:rPr sz="1500" b="0" i="0">
+                <a:solidFill>
+                  <a:srgbClr val="1C1B19"/>
+                </a:solidFill>
+                <a:latin typeface="Source Serif 4"/>
+              </a:rPr>
+              <a:t>The student page link (last slide) to share after advisory</a:t>
+            </a:r>
+          </a:p>
+        </p:txBody>
+      </p:sp>
+      <p:sp>
+        <p:nvSpPr>
+          <p:cNvPr id="7" name="TextBox 6"/>
+          <p:cNvSpPr txBox="1"/>
+          <p:nvPr/>
+        </p:nvSpPr>
+        <p:spPr>
+          <a:xfrm>
+            <a:off x="6126480" y="1828800"/>
+            <a:ext cx="5486400" cy="4389120"/>
+          </a:xfrm>
+          <a:prstGeom prst="rect">
+            <a:avLst/>
+          </a:prstGeom>
+          <a:noFill/>
+        </p:spPr>
+        <p:txBody>
+          <a:bodyPr wrap="square" anchor="t" lIns="0" rIns="0" tIns="0" bIns="0">
+            <a:spAutoFit/>
+          </a:bodyPr>
+          <a:lstStyle/>
+          <a:p>
+            <a:pPr algn="l">
+              <a:spcAft>
+                <a:spcPts val="630"/>
+              </a:spcAft>
+            </a:pPr>
+            <a:r>
+              <a:rPr sz="1100" b="1" i="0">
+                <a:solidFill>
+                  <a:srgbClr val="0B2D5B"/>
+                </a:solidFill>
+                <a:latin typeface="Inter Tight"/>
+              </a:rPr>
+              <a:t>FLOW</a:t>
+            </a:r>
+          </a:p>
+          <a:p>
+            <a:pPr algn="l">
+              <a:spcAft>
+                <a:spcPts val="630"/>
+              </a:spcAft>
+            </a:pPr>
+            <a:r>
+              <a:rPr sz="1300" b="1" i="0">
+                <a:solidFill>
+                  <a:srgbClr val="F47B20"/>
+                </a:solidFill>
+                <a:latin typeface="Inter Tight"/>
+              </a:rPr>
+              <a:t>3 min   </a:t>
+            </a:r>
+            <a:r>
+              <a:rPr sz="1400" b="0" i="0">
+                <a:solidFill>
+                  <a:srgbClr val="1C1B19"/>
+                </a:solidFill>
+                <a:latin typeface="Source Serif 4"/>
+              </a:rPr>
+              <a:t>Have you ever frozen? (anonymous cards)</a:t>
+            </a:r>
+          </a:p>
+          <a:p>
+            <a:pPr algn="l">
+              <a:spcAft>
+                <a:spcPts val="630"/>
+              </a:spcAft>
+            </a:pPr>
+            <a:r>
+              <a:rPr sz="1300" b="1" i="0">
+                <a:solidFill>
+                  <a:srgbClr val="F47B20"/>
+                </a:solidFill>
+                <a:latin typeface="Inter Tight"/>
+              </a:rPr>
+              <a:t>4 min   </a:t>
+            </a:r>
+            <a:r>
+              <a:rPr sz="1400" b="0" i="0">
+                <a:solidFill>
+                  <a:srgbClr val="1C1B19"/>
+                </a:solidFill>
+                <a:latin typeface="Source Serif 4"/>
+              </a:rPr>
+              <a:t>Five gates (pair-share: where do you get stuck?)</a:t>
+            </a:r>
+          </a:p>
+          <a:p>
+            <a:pPr algn="l">
+              <a:spcAft>
+                <a:spcPts val="630"/>
+              </a:spcAft>
+            </a:pPr>
+            <a:r>
+              <a:rPr sz="1300" b="1" i="0">
+                <a:solidFill>
+                  <a:srgbClr val="F47B20"/>
+                </a:solidFill>
+                <a:latin typeface="Inter Tight"/>
+              </a:rPr>
+              <a:t>3 min   </a:t>
+            </a:r>
+            <a:r>
+              <a:rPr sz="1400" b="0" i="0">
+                <a:solidFill>
+                  <a:srgbClr val="1C1B19"/>
+                </a:solidFill>
+                <a:latin typeface="Source Serif 4"/>
+              </a:rPr>
+              <a:t>Someone usually steps in, and it works</a:t>
+            </a:r>
+          </a:p>
+          <a:p>
+            <a:pPr algn="l">
+              <a:spcAft>
+                <a:spcPts val="630"/>
+              </a:spcAft>
+            </a:pPr>
+            <a:r>
+              <a:rPr sz="1300" b="1" i="0">
+                <a:solidFill>
+                  <a:srgbClr val="F47B20"/>
+                </a:solidFill>
+                <a:latin typeface="Inter Tight"/>
+              </a:rPr>
+              <a:t>2 min   </a:t>
+            </a:r>
+            <a:r>
+              <a:rPr sz="1400" b="0" i="0">
+                <a:solidFill>
+                  <a:srgbClr val="1C1B19"/>
+                </a:solidFill>
+                <a:latin typeface="Source Serif 4"/>
+              </a:rPr>
+              <a:t>Four ways to step in</a:t>
+            </a:r>
+          </a:p>
+          <a:p>
+            <a:pPr algn="l">
+              <a:spcAft>
+                <a:spcPts val="630"/>
+              </a:spcAft>
+            </a:pPr>
+            <a:r>
+              <a:rPr sz="1300" b="1" i="0">
+                <a:solidFill>
+                  <a:srgbClr val="F47B20"/>
+                </a:solidFill>
+                <a:latin typeface="Inter Tight"/>
+              </a:rPr>
+              <a:t>5 min   </a:t>
+            </a:r>
+            <a:r>
+              <a:rPr sz="1400" b="0" i="0">
+                <a:solidFill>
+                  <a:srgbClr val="1C1B19"/>
+                </a:solidFill>
+                <a:latin typeface="Source Serif 4"/>
+              </a:rPr>
+              <a:t>Three moments (scenario talk)</a:t>
+            </a:r>
+          </a:p>
+          <a:p>
+            <a:pPr algn="l">
+              <a:spcAft>
+                <a:spcPts val="630"/>
+              </a:spcAft>
+            </a:pPr>
+            <a:r>
+              <a:rPr sz="1300" b="1" i="0">
+                <a:solidFill>
+                  <a:srgbClr val="F47B20"/>
+                </a:solidFill>
+                <a:latin typeface="Inter Tight"/>
+              </a:rPr>
+              <a:t>2 min   </a:t>
+            </a:r>
+            <a:r>
+              <a:rPr sz="1400" b="0" i="0">
+                <a:solidFill>
+                  <a:srgbClr val="1C1B19"/>
+                </a:solidFill>
+                <a:latin typeface="Source Serif 4"/>
+              </a:rPr>
+              <a:t>Your line (private card)</a:t>
+            </a:r>
+          </a:p>
+          <a:p>
+            <a:pPr algn="l">
+              <a:spcAft>
+                <a:spcPts val="630"/>
+              </a:spcAft>
+            </a:pPr>
+            <a:r>
+              <a:rPr sz="1300" b="1" i="0">
+                <a:solidFill>
+                  <a:srgbClr val="F47B20"/>
+                </a:solidFill>
+                <a:latin typeface="Inter Tight"/>
+              </a:rPr>
+              <a:t>1 min   </a:t>
+            </a:r>
+            <a:r>
+              <a:rPr sz="1400" b="0" i="0">
+                <a:solidFill>
+                  <a:srgbClr val="1C1B19"/>
+                </a:solidFill>
+                <a:latin typeface="Source Serif 4"/>
+              </a:rPr>
+              <a:t>One move, and the student page link</a:t>
+            </a:r>
+          </a:p>
+          <a:p>
+            <a:pPr algn="l">
+              <a:spcAft>
+                <a:spcPts val="630"/>
+              </a:spcAft>
+            </a:pPr>
+            <a:r>
+              <a:rPr sz="1400" b="0" i="0">
+                <a:solidFill>
+                  <a:srgbClr val="1C1B19"/>
+                </a:solidFill>
+                <a:latin typeface="Source Serif 4"/>
+              </a:rPr>
+              <a:t/>
+            </a:r>
+          </a:p>
+          <a:p>
+            <a:pPr algn="l">
+              <a:spcAft>
+                <a:spcPts val="630"/>
+              </a:spcAft>
+            </a:pPr>
+            <a:r>
+              <a:rPr sz="1100" b="1" i="0">
+                <a:solidFill>
+                  <a:srgbClr val="0B2D5B"/>
+                </a:solidFill>
+                <a:latin typeface="Inter Tight"/>
+              </a:rPr>
+              <a:t>SHORT ON TIME (10-MINUTE CHECK-IN)</a:t>
+            </a:r>
+          </a:p>
+          <a:p>
+            <a:pPr algn="l">
+              <a:spcAft>
+                <a:spcPts val="630"/>
+              </a:spcAft>
+            </a:pPr>
+            <a:r>
+              <a:rPr sz="1400" b="0" i="0">
+                <a:solidFill>
+                  <a:srgbClr val="1C1B19"/>
+                </a:solidFill>
+                <a:latin typeface="Source Serif 4"/>
+              </a:rPr>
+              <a:t>Anonymous cards and the tally (3), the five gates with a quick pair-share (3), one scenario with the four moves (3), close and the link (1).</a:t>
+            </a:r>
+          </a:p>
+        </p:txBody>
+      </p:sp>
+    </p:spTree>
+  </p:cSld>
+  <p:clrMapOvr>
+    <a:masterClrMapping/>
+  </p:clrMapOvr>
+</p:sld>
+</file>
+
+<file path=ppt/slides/slide11.xml><?xml version="1.0" encoding="utf-8"?>
+<p:sld xmlns:a="http://schemas.openxmlformats.org/drawingml/2006/main" xmlns:p="http://schemas.openxmlformats.org/presentationml/2006/main" xmlns:r="http://schemas.openxmlformats.org/officeDocument/2006/relationships" show="0">
+  <p:cSld>
+    <p:bg>
+      <p:bgPr>
+        <a:solidFill>
+          <a:srgbClr val="EEEBE4"/>
+        </a:solidFill>
+        <a:effectLst/>
+      </p:bgPr>
+    </p:bg>
+    <p:spTree>
+      <p:nvGrpSpPr>
+        <p:cNvPr id="1" name=""/>
+        <p:cNvGrpSpPr/>
+        <p:nvPr/>
+      </p:nvGrpSpPr>
+      <p:grpSpPr/>
+      <p:sp>
+        <p:nvSpPr>
+          <p:cNvPr id="2" name="Rectangle 1"/>
+          <p:cNvSpPr/>
+          <p:nvPr/>
+        </p:nvSpPr>
+        <p:spPr>
+          <a:xfrm>
+            <a:off x="0" y="0"/>
+            <a:ext cx="12191695" cy="384048"/>
+          </a:xfrm>
+          <a:prstGeom prst="rect">
+            <a:avLst/>
+          </a:prstGeom>
+          <a:solidFill>
+            <a:srgbClr val="0B2D5B"/>
+          </a:solidFill>
+          <a:ln>
+            <a:noFill/>
+          </a:ln>
+          <a:effectLst/>
+        </p:spPr>
+        <p:style>
+          <a:lnRef idx="1">
+            <a:schemeClr val="accent1"/>
+          </a:lnRef>
+          <a:fillRef idx="3">
+            <a:schemeClr val="accent1"/>
+          </a:fillRef>
+          <a:effectRef idx="2">
+            <a:schemeClr val="accent1"/>
+          </a:effectRef>
+          <a:fontRef idx="minor">
+            <a:schemeClr val="lt1"/>
+          </a:fontRef>
+        </p:style>
+        <p:txBody>
+          <a:bodyPr rtlCol="0" anchor="ctr"/>
+          <a:lstStyle/>
+          <a:p>
+            <a:pPr algn="ctr"/>
+          </a:p>
+        </p:txBody>
+      </p:sp>
+      <p:sp>
+        <p:nvSpPr>
+          <p:cNvPr id="3" name="TextBox 2"/>
+          <p:cNvSpPr txBox="1"/>
+          <p:nvPr/>
+        </p:nvSpPr>
+        <p:spPr>
+          <a:xfrm>
+            <a:off x="548640" y="100584"/>
+            <a:ext cx="10972800" cy="274320"/>
+          </a:xfrm>
+          <a:prstGeom prst="rect">
+            <a:avLst/>
+          </a:prstGeom>
+          <a:noFill/>
+        </p:spPr>
+        <p:txBody>
+          <a:bodyPr wrap="square" anchor="t" lIns="0" rIns="0" tIns="0" bIns="0">
+            <a:spAutoFit/>
+          </a:bodyPr>
+          <a:lstStyle/>
+          <a:p>
+            <a:pPr algn="l">
+              <a:spcAft>
+                <a:spcPts val="495"/>
+              </a:spcAft>
+            </a:pPr>
+            <a:r>
+              <a:rPr sz="1100" b="1" i="0">
+                <a:solidFill>
+                  <a:srgbClr val="FFFFFF"/>
+                </a:solidFill>
+                <a:latin typeface="Inter Tight"/>
+              </a:rPr>
+              <a:t>TEACHER PAGE  ·  skipped when you present  ·  Before you teach</a:t>
+            </a:r>
+          </a:p>
+        </p:txBody>
+      </p:sp>
+      <p:sp>
+        <p:nvSpPr>
+          <p:cNvPr id="4" name="TextBox 3"/>
+          <p:cNvSpPr txBox="1"/>
+          <p:nvPr/>
+        </p:nvSpPr>
+        <p:spPr>
+          <a:xfrm>
+            <a:off x="548640" y="685800"/>
+            <a:ext cx="10972800" cy="640080"/>
+          </a:xfrm>
+          <a:prstGeom prst="rect">
+            <a:avLst/>
+          </a:prstGeom>
+          <a:noFill/>
+        </p:spPr>
+        <p:txBody>
+          <a:bodyPr wrap="square" anchor="t" lIns="0" rIns="0" tIns="0" bIns="0">
+            <a:spAutoFit/>
+          </a:bodyPr>
+          <a:lstStyle/>
+          <a:p>
+            <a:pPr algn="l">
+              <a:spcAft>
+                <a:spcPts val="1350"/>
+              </a:spcAft>
+            </a:pPr>
+            <a:r>
+              <a:rPr sz="3000" b="1" i="0">
+                <a:solidFill>
+                  <a:srgbClr val="1C1B19"/>
+                </a:solidFill>
+                <a:latin typeface="Source Serif 4"/>
+              </a:rPr>
+              <a:t>Before you teach</a:t>
+            </a:r>
+          </a:p>
+        </p:txBody>
+      </p:sp>
+      <p:sp>
+        <p:nvSpPr>
+          <p:cNvPr id="5" name="TextBox 4"/>
+          <p:cNvSpPr txBox="1"/>
+          <p:nvPr/>
+        </p:nvSpPr>
+        <p:spPr>
+          <a:xfrm>
+            <a:off x="548640" y="1463040"/>
+            <a:ext cx="5394960" cy="4937760"/>
+          </a:xfrm>
+          <a:prstGeom prst="rect">
+            <a:avLst/>
+          </a:prstGeom>
+          <a:noFill/>
+        </p:spPr>
+        <p:txBody>
+          <a:bodyPr wrap="square" anchor="t" lIns="0" rIns="0" tIns="0" bIns="0">
+            <a:spAutoFit/>
+          </a:bodyPr>
+          <a:lstStyle/>
+          <a:p>
+            <a:pPr algn="l">
+              <a:spcAft>
+                <a:spcPts val="585"/>
+              </a:spcAft>
+            </a:pPr>
+            <a:r>
+              <a:rPr sz="1500" b="1" i="0">
+                <a:solidFill>
+                  <a:srgbClr val="1C1B19"/>
+                </a:solidFill>
+                <a:latin typeface="Source Serif 4"/>
+              </a:rPr>
+              <a:t>No real incidents, no real names.</a:t>
+            </a:r>
+          </a:p>
+          <a:p>
+            <a:pPr algn="l">
+              <a:spcAft>
+                <a:spcPts val="585"/>
+              </a:spcAft>
+            </a:pPr>
+            <a:r>
+              <a:rPr sz="1300" b="0" i="0">
+                <a:solidFill>
+                  <a:srgbClr val="1C1B19"/>
+                </a:solidFill>
+                <a:latin typeface="Source Serif 4"/>
+              </a:rPr>
+              <a:t>Use only the moments on the slides. Don't ask students to describe something they saw or did. Someone in your circle may be the target of something right now, and someone may have been part of it.</a:t>
+            </a:r>
+          </a:p>
+          <a:p>
+            <a:pPr algn="l">
+              <a:spcAft>
+                <a:spcPts val="585"/>
+              </a:spcAft>
+            </a:pPr>
+            <a:r>
+              <a:rPr sz="1300" b="0" i="0">
+                <a:solidFill>
+                  <a:srgbClr val="1C1B19"/>
+                </a:solidFill>
+                <a:latin typeface="Source Serif 4"/>
+              </a:rPr>
+              <a:t/>
+            </a:r>
+          </a:p>
+          <a:p>
+            <a:pPr algn="l">
+              <a:spcAft>
+                <a:spcPts val="585"/>
+              </a:spcAft>
+            </a:pPr>
+            <a:r>
+              <a:rPr sz="1500" b="1" i="0">
+                <a:solidFill>
+                  <a:srgbClr val="1C1B19"/>
+                </a:solidFill>
+                <a:latin typeface="Source Serif 4"/>
+              </a:rPr>
+              <a:t>If a real situation comes up, take it out of the circle.</a:t>
+            </a:r>
+          </a:p>
+          <a:p>
+            <a:pPr algn="l">
+              <a:spcAft>
+                <a:spcPts val="585"/>
+              </a:spcAft>
+            </a:pPr>
+            <a:r>
+              <a:rPr sz="1300" b="0" i="0">
+                <a:solidFill>
+                  <a:srgbClr val="1C1B19"/>
+                </a:solidFill>
+                <a:latin typeface="Source Serif 4"/>
+              </a:rPr>
+              <a:t>If a student names something ongoing, thank them, say you want to help with it privately, and move on. Follow up that day with a counselor or dean.</a:t>
+            </a:r>
+          </a:p>
+          <a:p>
+            <a:pPr algn="l">
+              <a:spcAft>
+                <a:spcPts val="585"/>
+              </a:spcAft>
+            </a:pPr>
+            <a:r>
+              <a:rPr sz="1300" b="0" i="0">
+                <a:solidFill>
+                  <a:srgbClr val="1C1B19"/>
+                </a:solidFill>
+                <a:latin typeface="Source Serif 4"/>
+              </a:rPr>
+              <a:t/>
+            </a:r>
+          </a:p>
+          <a:p>
+            <a:pPr algn="l">
+              <a:spcAft>
+                <a:spcPts val="585"/>
+              </a:spcAft>
+            </a:pPr>
+            <a:r>
+              <a:rPr sz="1500" b="1" i="0">
+                <a:solidFill>
+                  <a:srgbClr val="1C1B19"/>
+                </a:solidFill>
+                <a:latin typeface="Source Serif 4"/>
+              </a:rPr>
+              <a:t>Know what needs an adult right away.</a:t>
+            </a:r>
+          </a:p>
+          <a:p>
+            <a:pPr algn="l">
+              <a:spcAft>
+                <a:spcPts val="585"/>
+              </a:spcAft>
+            </a:pPr>
+            <a:r>
+              <a:rPr sz="1300" b="0" i="0">
+                <a:solidFill>
+                  <a:srgbClr val="1C1B19"/>
+                </a:solidFill>
+                <a:latin typeface="Source Serif 4"/>
+              </a:rPr>
+              <a:t>Someone being physically hurt or threatened, private or sexual images being shared (real or AI-made), or someone saying they want to hurt themselves or others. Don't ask about these in advisory. Any disclosure goes to a counselor the same day.</a:t>
+            </a:r>
+          </a:p>
+          <a:p>
+            <a:pPr algn="l">
+              <a:spcAft>
+                <a:spcPts val="585"/>
+              </a:spcAft>
+            </a:pPr>
+            <a:r>
+              <a:rPr sz="1300" b="0" i="0">
+                <a:solidFill>
+                  <a:srgbClr val="1C1B19"/>
+                </a:solidFill>
+                <a:latin typeface="Source Serif 4"/>
+              </a:rPr>
+              <a:t/>
+            </a:r>
+          </a:p>
+        </p:txBody>
+      </p:sp>
+      <p:sp>
+        <p:nvSpPr>
+          <p:cNvPr id="6" name="TextBox 5"/>
+          <p:cNvSpPr txBox="1"/>
+          <p:nvPr/>
+        </p:nvSpPr>
+        <p:spPr>
+          <a:xfrm>
+            <a:off x="6217920" y="1463040"/>
+            <a:ext cx="5394960" cy="4937760"/>
+          </a:xfrm>
+          <a:prstGeom prst="rect">
+            <a:avLst/>
+          </a:prstGeom>
+          <a:noFill/>
+        </p:spPr>
+        <p:txBody>
+          <a:bodyPr wrap="square" anchor="t" lIns="0" rIns="0" tIns="0" bIns="0">
+            <a:spAutoFit/>
+          </a:bodyPr>
+          <a:lstStyle/>
+          <a:p>
+            <a:pPr algn="l">
+              <a:spcAft>
+                <a:spcPts val="585"/>
+              </a:spcAft>
+            </a:pPr>
+            <a:r>
+              <a:rPr sz="1500" b="1" i="0">
+                <a:solidFill>
+                  <a:srgbClr val="1C1B19"/>
+                </a:solidFill>
+                <a:latin typeface="Source Serif 4"/>
+              </a:rPr>
+              <a:t>Telling an adult will feel like snitching to some students.</a:t>
+            </a:r>
+          </a:p>
+          <a:p>
+            <a:pPr algn="l">
+              <a:spcAft>
+                <a:spcPts val="585"/>
+              </a:spcAft>
+            </a:pPr>
+            <a:r>
+              <a:rPr sz="1300" b="0" i="0">
+                <a:solidFill>
+                  <a:srgbClr val="1C1B19"/>
+                </a:solidFill>
+                <a:latin typeface="Source Serif 4"/>
+              </a:rPr>
+              <a:t>Name that worry out loud. Delegating means bringing in someone with more power, and it counts as stepping in. Say plainly what happens at Beaver when a student reports something, so it feels less like a leap.</a:t>
+            </a:r>
+          </a:p>
+          <a:p>
+            <a:pPr algn="l">
+              <a:spcAft>
+                <a:spcPts val="585"/>
+              </a:spcAft>
+            </a:pPr>
+            <a:r>
+              <a:rPr sz="1300" b="0" i="0">
+                <a:solidFill>
+                  <a:srgbClr val="1C1B19"/>
+                </a:solidFill>
+                <a:latin typeface="Source Serif 4"/>
+              </a:rPr>
+              <a:t/>
+            </a:r>
+          </a:p>
+          <a:p>
+            <a:pPr algn="l">
+              <a:spcAft>
+                <a:spcPts val="585"/>
+              </a:spcAft>
+            </a:pPr>
+            <a:r>
+              <a:rPr sz="1500" b="1" i="0">
+                <a:solidFill>
+                  <a:srgbClr val="1C1B19"/>
+                </a:solidFill>
+                <a:latin typeface="Source Serif 4"/>
+              </a:rPr>
+              <a:t>Leave room for past silence.</a:t>
+            </a:r>
+          </a:p>
+          <a:p>
+            <a:pPr algn="l">
+              <a:spcAft>
+                <a:spcPts val="585"/>
+              </a:spcAft>
+            </a:pPr>
+            <a:r>
+              <a:rPr sz="1300" b="0" i="0">
+                <a:solidFill>
+                  <a:srgbClr val="1C1B19"/>
+                </a:solidFill>
+                <a:latin typeface="Source Serif 4"/>
+              </a:rPr>
+              <a:t>Most students have frozen at least once, and some have laughed along. Keep shame out of it. A late check-in still counts, and what matters is the next time.</a:t>
+            </a:r>
+          </a:p>
+          <a:p>
+            <a:pPr algn="l">
+              <a:spcAft>
+                <a:spcPts val="585"/>
+              </a:spcAft>
+            </a:pPr>
+            <a:r>
+              <a:rPr sz="1300" b="0" i="0">
+                <a:solidFill>
+                  <a:srgbClr val="1C1B19"/>
+                </a:solidFill>
+                <a:latin typeface="Source Serif 4"/>
+              </a:rPr>
+              <a:t/>
+            </a:r>
+          </a:p>
+          <a:p>
+            <a:pPr algn="l">
+              <a:spcAft>
+                <a:spcPts val="585"/>
+              </a:spcAft>
+            </a:pPr>
+            <a:r>
+              <a:rPr sz="1500" b="1" i="0">
+                <a:solidFill>
+                  <a:srgbClr val="1C1B19"/>
+                </a:solidFill>
+                <a:latin typeface="Source Serif 4"/>
+              </a:rPr>
+              <a:t>Don't rank the moves.</a:t>
+            </a:r>
+          </a:p>
+          <a:p>
+            <a:pPr algn="l">
+              <a:spcAft>
+                <a:spcPts val="585"/>
+              </a:spcAft>
+            </a:pPr>
+            <a:r>
+              <a:rPr sz="1300" b="0" i="0">
+                <a:solidFill>
+                  <a:srgbClr val="1C1B19"/>
+                </a:solidFill>
+                <a:latin typeface="Source Serif 4"/>
+              </a:rPr>
+              <a:t>Direct can look like the brave one. It isn't always safe, and getting physical is never the move. Every one of the four counts, and so does including someone who keeps ending up on the edge.</a:t>
+            </a:r>
+          </a:p>
+          <a:p>
+            <a:pPr algn="l">
+              <a:spcAft>
+                <a:spcPts val="585"/>
+              </a:spcAft>
+            </a:pPr>
+            <a:r>
+              <a:rPr sz="1300" b="0" i="0">
+                <a:solidFill>
+                  <a:srgbClr val="1C1B19"/>
+                </a:solidFill>
+                <a:latin typeface="Source Serif 4"/>
+              </a:rPr>
+              <a:t/>
+            </a:r>
+          </a:p>
+        </p:txBody>
+      </p:sp>
+    </p:spTree>
+  </p:cSld>
+  <p:clrMapOvr>
+    <a:masterClrMapping/>
+  </p:clrMapOvr>
+</p:sld>
+</file>
+
+<file path=ppt/slides/slide12.xml><?xml version="1.0" encoding="utf-8"?>
+<p:sld xmlns:a="http://schemas.openxmlformats.org/drawingml/2006/main" xmlns:p="http://schemas.openxmlformats.org/presentationml/2006/main" xmlns:r="http://schemas.openxmlformats.org/officeDocument/2006/relationships" show="0">
+  <p:cSld>
+    <p:bg>
+      <p:bgPr>
+        <a:solidFill>
+          <a:srgbClr val="EEEBE4"/>
+        </a:solidFill>
+        <a:effectLst/>
+      </p:bgPr>
+    </p:bg>
+    <p:spTree>
+      <p:nvGrpSpPr>
+        <p:cNvPr id="1" name=""/>
+        <p:cNvGrpSpPr/>
+        <p:nvPr/>
+      </p:nvGrpSpPr>
+      <p:grpSpPr/>
+      <p:sp>
+        <p:nvSpPr>
+          <p:cNvPr id="2" name="Rectangle 1"/>
+          <p:cNvSpPr/>
+          <p:nvPr/>
+        </p:nvSpPr>
+        <p:spPr>
+          <a:xfrm>
+            <a:off x="0" y="0"/>
+            <a:ext cx="12191695" cy="384048"/>
+          </a:xfrm>
+          <a:prstGeom prst="rect">
+            <a:avLst/>
+          </a:prstGeom>
+          <a:solidFill>
+            <a:srgbClr val="0B2D5B"/>
+          </a:solidFill>
+          <a:ln>
+            <a:noFill/>
+          </a:ln>
+          <a:effectLst/>
+        </p:spPr>
+        <p:style>
+          <a:lnRef idx="1">
+            <a:schemeClr val="accent1"/>
+          </a:lnRef>
+          <a:fillRef idx="3">
+            <a:schemeClr val="accent1"/>
+          </a:fillRef>
+          <a:effectRef idx="2">
+            <a:schemeClr val="accent1"/>
+          </a:effectRef>
+          <a:fontRef idx="minor">
+            <a:schemeClr val="lt1"/>
+          </a:fontRef>
+        </p:style>
+        <p:txBody>
+          <a:bodyPr rtlCol="0" anchor="ctr"/>
+          <a:lstStyle/>
+          <a:p>
+            <a:pPr algn="ctr"/>
+          </a:p>
+        </p:txBody>
+      </p:sp>
+      <p:sp>
+        <p:nvSpPr>
+          <p:cNvPr id="3" name="TextBox 2"/>
+          <p:cNvSpPr txBox="1"/>
+          <p:nvPr/>
+        </p:nvSpPr>
+        <p:spPr>
+          <a:xfrm>
+            <a:off x="548640" y="100584"/>
+            <a:ext cx="10972800" cy="274320"/>
+          </a:xfrm>
+          <a:prstGeom prst="rect">
+            <a:avLst/>
+          </a:prstGeom>
+          <a:noFill/>
+        </p:spPr>
+        <p:txBody>
+          <a:bodyPr wrap="square" anchor="t" lIns="0" rIns="0" tIns="0" bIns="0">
+            <a:spAutoFit/>
+          </a:bodyPr>
+          <a:lstStyle/>
+          <a:p>
+            <a:pPr algn="l">
+              <a:spcAft>
+                <a:spcPts val="495"/>
+              </a:spcAft>
+            </a:pPr>
+            <a:r>
+              <a:rPr sz="1100" b="1" i="0">
+                <a:solidFill>
+                  <a:srgbClr val="FFFFFF"/>
+                </a:solidFill>
+                <a:latin typeface="Inter Tight"/>
+              </a:rPr>
+              <a:t>TEACHER PAGE  ·  skipped when you present  ·  Every student in the room</a:t>
+            </a:r>
+          </a:p>
+        </p:txBody>
+      </p:sp>
+      <p:sp>
+        <p:nvSpPr>
+          <p:cNvPr id="4" name="TextBox 3"/>
+          <p:cNvSpPr txBox="1"/>
+          <p:nvPr/>
+        </p:nvSpPr>
+        <p:spPr>
+          <a:xfrm>
+            <a:off x="548640" y="685800"/>
+            <a:ext cx="10972800" cy="640080"/>
+          </a:xfrm>
+          <a:prstGeom prst="rect">
+            <a:avLst/>
+          </a:prstGeom>
+          <a:noFill/>
+        </p:spPr>
+        <p:txBody>
+          <a:bodyPr wrap="square" anchor="t" lIns="0" rIns="0" tIns="0" bIns="0">
+            <a:spAutoFit/>
+          </a:bodyPr>
+          <a:lstStyle/>
+          <a:p>
+            <a:pPr algn="l">
+              <a:spcAft>
+                <a:spcPts val="1350"/>
+              </a:spcAft>
+            </a:pPr>
+            <a:r>
+              <a:rPr sz="3000" b="1" i="0">
+                <a:solidFill>
+                  <a:srgbClr val="1C1B19"/>
+                </a:solidFill>
+                <a:latin typeface="Source Serif 4"/>
+              </a:rPr>
+              <a:t>Every student in the room</a:t>
+            </a:r>
+          </a:p>
+        </p:txBody>
+      </p:sp>
+      <p:sp>
+        <p:nvSpPr>
+          <p:cNvPr id="5" name="TextBox 4"/>
+          <p:cNvSpPr txBox="1"/>
+          <p:nvPr/>
+        </p:nvSpPr>
+        <p:spPr>
+          <a:xfrm>
+            <a:off x="548640" y="1325880"/>
+            <a:ext cx="10972800" cy="365760"/>
+          </a:xfrm>
+          <a:prstGeom prst="rect">
+            <a:avLst/>
+          </a:prstGeom>
+          <a:noFill/>
+        </p:spPr>
+        <p:txBody>
+          <a:bodyPr wrap="square" anchor="t" lIns="0" rIns="0" tIns="0" bIns="0">
+            <a:spAutoFit/>
+          </a:bodyPr>
+          <a:lstStyle/>
+          <a:p>
+            <a:pPr algn="l">
+              <a:spcAft>
+                <a:spcPts val="630"/>
+              </a:spcAft>
+            </a:pPr>
+            <a:r>
+              <a:rPr sz="1400" b="0" i="0">
+                <a:solidFill>
+                  <a:srgbClr val="5D5A54"/>
+                </a:solidFill>
+                <a:latin typeface="Inter Tight"/>
+              </a:rPr>
+              <a:t>Culture, family, identity, ability and money: what to keep in mind for this topic.</a:t>
+            </a:r>
+          </a:p>
+        </p:txBody>
+      </p:sp>
+      <p:sp>
+        <p:nvSpPr>
+          <p:cNvPr id="6" name="TextBox 5"/>
+          <p:cNvSpPr txBox="1"/>
+          <p:nvPr/>
+        </p:nvSpPr>
+        <p:spPr>
+          <a:xfrm>
+            <a:off x="548640" y="1828800"/>
+            <a:ext cx="5394960" cy="4572000"/>
+          </a:xfrm>
+          <a:prstGeom prst="rect">
+            <a:avLst/>
+          </a:prstGeom>
+          <a:noFill/>
+        </p:spPr>
+        <p:txBody>
+          <a:bodyPr wrap="square" anchor="t" lIns="0" rIns="0" tIns="0" bIns="0">
+            <a:spAutoFit/>
+          </a:bodyPr>
+          <a:lstStyle/>
+          <a:p>
+            <a:pPr algn="l">
+              <a:spcAft>
+                <a:spcPts val="585"/>
+              </a:spcAft>
+            </a:pPr>
+            <a:r>
+              <a:rPr sz="1500" b="1" i="0">
+                <a:solidFill>
+                  <a:srgbClr val="1C1B19"/>
+                </a:solidFill>
+                <a:latin typeface="Source Serif 4"/>
+              </a:rPr>
+              <a:t>Speaking up costs some students more.</a:t>
+            </a:r>
+          </a:p>
+          <a:p>
+            <a:pPr algn="l">
+              <a:spcAft>
+                <a:spcPts val="585"/>
+              </a:spcAft>
+            </a:pPr>
+            <a:r>
+              <a:rPr sz="1300" b="0" i="0">
+                <a:solidFill>
+                  <a:srgbClr val="1C1B19"/>
+                </a:solidFill>
+                <a:latin typeface="Source Serif 4"/>
+              </a:rPr>
+              <a:t>A comment that costs one student nothing might cost another more, because of race, gender, size, being new, or how people already treat them. Say this out loud, and let students choose the move that is safe for them.</a:t>
+            </a:r>
+          </a:p>
+          <a:p>
+            <a:pPr algn="l">
+              <a:spcAft>
+                <a:spcPts val="585"/>
+              </a:spcAft>
+            </a:pPr>
+            <a:r>
+              <a:rPr sz="1300" b="0" i="0">
+                <a:solidFill>
+                  <a:srgbClr val="1C1B19"/>
+                </a:solidFill>
+                <a:latin typeface="Source Serif 4"/>
+              </a:rPr>
+              <a:t/>
+            </a:r>
+          </a:p>
+          <a:p>
+            <a:pPr algn="l">
+              <a:spcAft>
+                <a:spcPts val="585"/>
+              </a:spcAft>
+            </a:pPr>
+            <a:r>
+              <a:rPr sz="1500" b="1" i="0">
+                <a:solidFill>
+                  <a:srgbClr val="1C1B19"/>
+                </a:solidFill>
+                <a:latin typeface="Source Serif 4"/>
+              </a:rPr>
+              <a:t>The accent scenario may be close to home.</a:t>
+            </a:r>
+          </a:p>
+          <a:p>
+            <a:pPr algn="l">
+              <a:spcAft>
+                <a:spcPts val="585"/>
+              </a:spcAft>
+            </a:pPr>
+            <a:r>
+              <a:rPr sz="1300" b="0" i="0">
+                <a:solidFill>
+                  <a:srgbClr val="1C1B19"/>
+                </a:solidFill>
+                <a:latin typeface="Source Serif 4"/>
+              </a:rPr>
+              <a:t>Some students in your circle speak another language at home or have been mocked for an accent. Keep the focus on what a bystander can do. Never ask a student to explain what it feels like or to speak for a group.</a:t>
+            </a:r>
+          </a:p>
+          <a:p>
+            <a:pPr algn="l">
+              <a:spcAft>
+                <a:spcPts val="585"/>
+              </a:spcAft>
+            </a:pPr>
+            <a:r>
+              <a:rPr sz="1300" b="0" i="0">
+                <a:solidFill>
+                  <a:srgbClr val="1C1B19"/>
+                </a:solidFill>
+                <a:latin typeface="Source Serif 4"/>
+              </a:rPr>
+              <a:t/>
+            </a:r>
+          </a:p>
+          <a:p>
+            <a:pPr algn="l">
+              <a:spcAft>
+                <a:spcPts val="585"/>
+              </a:spcAft>
+            </a:pPr>
+            <a:r>
+              <a:rPr sz="1500" b="1" i="0">
+                <a:solidFill>
+                  <a:srgbClr val="1C1B19"/>
+                </a:solidFill>
+                <a:latin typeface="Source Serif 4"/>
+              </a:rPr>
+              <a:t>Gender scripts show up in the locker room and the party.</a:t>
+            </a:r>
+          </a:p>
+          <a:p>
+            <a:pPr algn="l">
+              <a:spcAft>
+                <a:spcPts val="585"/>
+              </a:spcAft>
+            </a:pPr>
+            <a:r>
+              <a:rPr sz="1300" b="0" i="0">
+                <a:solidFill>
+                  <a:srgbClr val="1C1B19"/>
+                </a:solidFill>
+                <a:latin typeface="Source Serif 4"/>
+              </a:rPr>
+              <a:t>Boys can check on a teammate and say "not funny" without it being soft. In the party scenario, keep the talk on the person who looks uncomfortable and on what friends can do together.</a:t>
+            </a:r>
+          </a:p>
+          <a:p>
+            <a:pPr algn="l">
+              <a:spcAft>
+                <a:spcPts val="585"/>
+              </a:spcAft>
+            </a:pPr>
+            <a:r>
+              <a:rPr sz="1300" b="0" i="0">
+                <a:solidFill>
+                  <a:srgbClr val="1C1B19"/>
+                </a:solidFill>
+                <a:latin typeface="Source Serif 4"/>
+              </a:rPr>
+              <a:t/>
+            </a:r>
+          </a:p>
+        </p:txBody>
+      </p:sp>
+      <p:sp>
+        <p:nvSpPr>
+          <p:cNvPr id="7" name="TextBox 6"/>
+          <p:cNvSpPr txBox="1"/>
+          <p:nvPr/>
+        </p:nvSpPr>
+        <p:spPr>
+          <a:xfrm>
+            <a:off x="6217920" y="1828800"/>
+            <a:ext cx="5394960" cy="4572000"/>
+          </a:xfrm>
+          <a:prstGeom prst="rect">
+            <a:avLst/>
+          </a:prstGeom>
+          <a:noFill/>
+        </p:spPr>
+        <p:txBody>
+          <a:bodyPr wrap="square" anchor="t" lIns="0" rIns="0" tIns="0" bIns="0">
+            <a:spAutoFit/>
+          </a:bodyPr>
+          <a:lstStyle/>
+          <a:p>
+            <a:pPr algn="l">
+              <a:spcAft>
+                <a:spcPts val="585"/>
+              </a:spcAft>
+            </a:pPr>
+            <a:r>
+              <a:rPr sz="1500" b="1" i="0">
+                <a:solidFill>
+                  <a:srgbClr val="1C1B19"/>
+                </a:solidFill>
+                <a:latin typeface="Source Serif 4"/>
+              </a:rPr>
+              <a:t>Targeting about identity is a same-day conversation.</a:t>
+            </a:r>
+          </a:p>
+          <a:p>
+            <a:pPr algn="l">
+              <a:spcAft>
+                <a:spcPts val="585"/>
+              </a:spcAft>
+            </a:pPr>
+            <a:r>
+              <a:rPr sz="1300" b="0" i="0">
+                <a:solidFill>
+                  <a:srgbClr val="1C1B19"/>
+                </a:solidFill>
+                <a:latin typeface="Source Serif 4"/>
+              </a:rPr>
+              <a:t>If a student is being harassed about their sexuality, gender identity, race, or religion, or someone is outing them, that goes to a counselor that day. The Trevor Project (call 1-866-488-7386 or text START to 678-678) is there for LGBTQ+ young people any time.</a:t>
+            </a:r>
+          </a:p>
+          <a:p>
+            <a:pPr algn="l">
+              <a:spcAft>
+                <a:spcPts val="585"/>
+              </a:spcAft>
+            </a:pPr>
+            <a:r>
+              <a:rPr sz="1300" b="0" i="0">
+                <a:solidFill>
+                  <a:srgbClr val="1C1B19"/>
+                </a:solidFill>
+                <a:latin typeface="Source Serif 4"/>
+              </a:rPr>
+              <a:t/>
+            </a:r>
+          </a:p>
+          <a:p>
+            <a:pPr algn="l">
+              <a:spcAft>
+                <a:spcPts val="585"/>
+              </a:spcAft>
+            </a:pPr>
+            <a:r>
+              <a:rPr sz="1500" b="1" i="0">
+                <a:solidFill>
+                  <a:srgbClr val="1C1B19"/>
+                </a:solidFill>
+                <a:latin typeface="Source Serif 4"/>
+              </a:rPr>
+              <a:t>Speaking up isn't the only way to be brave.</a:t>
+            </a:r>
+          </a:p>
+          <a:p>
+            <a:pPr algn="l">
+              <a:spcAft>
+                <a:spcPts val="585"/>
+              </a:spcAft>
+            </a:pPr>
+            <a:r>
+              <a:rPr sz="1300" b="0" i="0">
+                <a:solidFill>
+                  <a:srgbClr val="1C1B19"/>
+                </a:solidFill>
+                <a:latin typeface="Source Serif 4"/>
+              </a:rPr>
+              <a:t>Students with social anxiety, a stutter, or who process slowly in the moment may freeze longer or find Direct hard. Delay, Delegate and Distract count just as much. Don't treat speaking out loud as the measure of a good person.</a:t>
+            </a:r>
+          </a:p>
+          <a:p>
+            <a:pPr algn="l">
+              <a:spcAft>
+                <a:spcPts val="585"/>
+              </a:spcAft>
+            </a:pPr>
+            <a:r>
+              <a:rPr sz="1300" b="0" i="0">
+                <a:solidFill>
+                  <a:srgbClr val="1C1B19"/>
+                </a:solidFill>
+                <a:latin typeface="Source Serif 4"/>
+              </a:rPr>
+              <a:t/>
+            </a:r>
+          </a:p>
+          <a:p>
+            <a:pPr algn="l">
+              <a:spcAft>
+                <a:spcPts val="585"/>
+              </a:spcAft>
+            </a:pPr>
+            <a:r>
+              <a:rPr sz="1500" b="1" i="0">
+                <a:solidFill>
+                  <a:srgbClr val="1C1B19"/>
+                </a:solidFill>
+                <a:latin typeface="Source Serif 4"/>
+              </a:rPr>
+              <a:t>Keep bodies out of the locker room discussion.</a:t>
+            </a:r>
+          </a:p>
+          <a:p>
+            <a:pPr algn="l">
+              <a:spcAft>
+                <a:spcPts val="585"/>
+              </a:spcAft>
+            </a:pPr>
+            <a:r>
+              <a:rPr sz="1300" b="0" i="0">
+                <a:solidFill>
+                  <a:srgbClr val="1C1B19"/>
+                </a:solidFill>
+                <a:latin typeface="Source Serif 4"/>
+              </a:rPr>
+              <a:t>The first scenario is about a comment on someone's body. Talk about the move, not the body or the comment. Students of every size are in the circle.</a:t>
+            </a:r>
+          </a:p>
+          <a:p>
+            <a:pPr algn="l">
+              <a:spcAft>
+                <a:spcPts val="585"/>
+              </a:spcAft>
+            </a:pPr>
+            <a:r>
+              <a:rPr sz="1300" b="0" i="0">
+                <a:solidFill>
+                  <a:srgbClr val="1C1B19"/>
+                </a:solidFill>
+                <a:latin typeface="Source Serif 4"/>
+              </a:rPr>
+              <a:t/>
+            </a:r>
+          </a:p>
+        </p:txBody>
+      </p:sp>
+    </p:spTree>
+  </p:cSld>
+  <p:clrMapOvr>
+    <a:masterClrMapping/>
+  </p:clrMapOvr>
+</p:sld>
+</file>
+
+<file path=ppt/slides/slide13.xml><?xml version="1.0" encoding="utf-8"?>
+<p:sld xmlns:a="http://schemas.openxmlformats.org/drawingml/2006/main" xmlns:p="http://schemas.openxmlformats.org/presentationml/2006/main" xmlns:r="http://schemas.openxmlformats.org/officeDocument/2006/relationships" show="0">
+  <p:cSld>
+    <p:bg>
+      <p:bgPr>
+        <a:solidFill>
+          <a:srgbClr val="EEEBE4"/>
+        </a:solidFill>
+        <a:effectLst/>
+      </p:bgPr>
+    </p:bg>
+    <p:spTree>
+      <p:nvGrpSpPr>
+        <p:cNvPr id="1" name=""/>
+        <p:cNvGrpSpPr/>
+        <p:nvPr/>
+      </p:nvGrpSpPr>
+      <p:grpSpPr/>
+      <p:sp>
+        <p:nvSpPr>
+          <p:cNvPr id="2" name="Rectangle 1"/>
+          <p:cNvSpPr/>
+          <p:nvPr/>
+        </p:nvSpPr>
+        <p:spPr>
+          <a:xfrm>
+            <a:off x="0" y="0"/>
+            <a:ext cx="12191695" cy="384048"/>
+          </a:xfrm>
+          <a:prstGeom prst="rect">
+            <a:avLst/>
+          </a:prstGeom>
+          <a:solidFill>
+            <a:srgbClr val="0B2D5B"/>
+          </a:solidFill>
+          <a:ln>
+            <a:noFill/>
+          </a:ln>
+          <a:effectLst/>
+        </p:spPr>
+        <p:style>
+          <a:lnRef idx="1">
+            <a:schemeClr val="accent1"/>
+          </a:lnRef>
+          <a:fillRef idx="3">
+            <a:schemeClr val="accent1"/>
+          </a:fillRef>
+          <a:effectRef idx="2">
+            <a:schemeClr val="accent1"/>
+          </a:effectRef>
+          <a:fontRef idx="minor">
+            <a:schemeClr val="lt1"/>
+          </a:fontRef>
+        </p:style>
+        <p:txBody>
+          <a:bodyPr rtlCol="0" anchor="ctr"/>
+          <a:lstStyle/>
+          <a:p>
+            <a:pPr algn="ctr"/>
+          </a:p>
+        </p:txBody>
+      </p:sp>
+      <p:sp>
+        <p:nvSpPr>
+          <p:cNvPr id="3" name="TextBox 2"/>
+          <p:cNvSpPr txBox="1"/>
+          <p:nvPr/>
+        </p:nvSpPr>
+        <p:spPr>
+          <a:xfrm>
+            <a:off x="548640" y="100584"/>
+            <a:ext cx="10972800" cy="274320"/>
+          </a:xfrm>
+          <a:prstGeom prst="rect">
+            <a:avLst/>
+          </a:prstGeom>
+          <a:noFill/>
+        </p:spPr>
+        <p:txBody>
+          <a:bodyPr wrap="square" anchor="t" lIns="0" rIns="0" tIns="0" bIns="0">
+            <a:spAutoFit/>
+          </a:bodyPr>
+          <a:lstStyle/>
+          <a:p>
+            <a:pPr algn="l">
+              <a:spcAft>
+                <a:spcPts val="495"/>
+              </a:spcAft>
+            </a:pPr>
+            <a:r>
+              <a:rPr sz="1100" b="1" i="0">
+                <a:solidFill>
+                  <a:srgbClr val="FFFFFF"/>
+                </a:solidFill>
+                <a:latin typeface="Inter Tight"/>
+              </a:rPr>
+              <a:t>TEACHER PAGE  ·  skipped when you present  ·  Background</a:t>
+            </a:r>
+          </a:p>
+        </p:txBody>
+      </p:sp>
+      <p:sp>
+        <p:nvSpPr>
+          <p:cNvPr id="4" name="TextBox 3"/>
+          <p:cNvSpPr txBox="1"/>
+          <p:nvPr/>
+        </p:nvSpPr>
+        <p:spPr>
+          <a:xfrm>
+            <a:off x="548640" y="685800"/>
+            <a:ext cx="10972800" cy="640080"/>
+          </a:xfrm>
+          <a:prstGeom prst="rect">
+            <a:avLst/>
+          </a:prstGeom>
+          <a:noFill/>
+        </p:spPr>
+        <p:txBody>
+          <a:bodyPr wrap="square" anchor="t" lIns="0" rIns="0" tIns="0" bIns="0">
+            <a:spAutoFit/>
+          </a:bodyPr>
+          <a:lstStyle/>
+          <a:p>
+            <a:pPr algn="l">
+              <a:spcAft>
+                <a:spcPts val="1350"/>
+              </a:spcAft>
+            </a:pPr>
+            <a:r>
+              <a:rPr sz="3000" b="1" i="0">
+                <a:solidFill>
+                  <a:srgbClr val="1C1B19"/>
+                </a:solidFill>
+                <a:latin typeface="Source Serif 4"/>
+              </a:rPr>
+              <a:t>What the research says</a:t>
+            </a:r>
+          </a:p>
+        </p:txBody>
+      </p:sp>
+      <p:sp>
+        <p:nvSpPr>
+          <p:cNvPr id="5" name="TextBox 4"/>
+          <p:cNvSpPr txBox="1"/>
+          <p:nvPr/>
+        </p:nvSpPr>
+        <p:spPr>
+          <a:xfrm>
+            <a:off x="548640" y="1463040"/>
+            <a:ext cx="5394960" cy="4937760"/>
+          </a:xfrm>
+          <a:prstGeom prst="rect">
+            <a:avLst/>
+          </a:prstGeom>
+          <a:noFill/>
+        </p:spPr>
+        <p:txBody>
+          <a:bodyPr wrap="square" anchor="t" lIns="0" rIns="0" tIns="0" bIns="0">
+            <a:spAutoFit/>
+          </a:bodyPr>
+          <a:lstStyle/>
+          <a:p>
+            <a:pPr algn="l">
+              <a:spcAft>
+                <a:spcPts val="585"/>
+              </a:spcAft>
+            </a:pPr>
+            <a:r>
+              <a:rPr sz="1300" b="0" i="0">
+                <a:solidFill>
+                  <a:srgbClr val="1C1B19"/>
+                </a:solidFill>
+                <a:latin typeface="Source Serif 4"/>
+              </a:rPr>
+              <a:t>Before a bystander helps, they have to get through five steps: notice, decide it's a problem, feel it's theirs to act on, know what to do, and act. Getting stuck at any step looks like freezing.</a:t>
+            </a:r>
+          </a:p>
+          <a:p>
+            <a:pPr algn="l">
+              <a:spcAft>
+                <a:spcPts val="585"/>
+              </a:spcAft>
+            </a:pPr>
+            <a:r>
+              <a:rPr sz="1050" b="0" i="0">
+                <a:solidFill>
+                  <a:srgbClr val="5D5A54"/>
+                </a:solidFill>
+                <a:latin typeface="Inter Tight"/>
+              </a:rPr>
+              <a:t>Latané and Darley, The Unresponsive Bystander, 1970</a:t>
+            </a:r>
+          </a:p>
+          <a:p>
+            <a:pPr algn="l">
+              <a:spcAft>
+                <a:spcPts val="585"/>
+              </a:spcAft>
+            </a:pPr>
+            <a:r>
+              <a:rPr sz="1300" b="0" i="0">
+                <a:solidFill>
+                  <a:srgbClr val="1C1B19"/>
+                </a:solidFill>
+                <a:latin typeface="Source Serif 4"/>
+              </a:rPr>
+              <a:t>Students who heard someone over an intercom seem to have a seizure went for help before the call cut off 85% of the time when they thought they were alone, and 31% of the time when they thought four others could hear.</a:t>
+            </a:r>
+          </a:p>
+          <a:p>
+            <a:pPr algn="l">
+              <a:spcAft>
+                <a:spcPts val="585"/>
+              </a:spcAft>
+            </a:pPr>
+            <a:r>
+              <a:rPr sz="1050" b="0" i="0">
+                <a:solidFill>
+                  <a:srgbClr val="5D5A54"/>
+                </a:solidFill>
+                <a:latin typeface="Inter Tight"/>
+              </a:rPr>
+              <a:t>Darley and Latané, Journal of Personality and Social Psychology, 1968</a:t>
+            </a:r>
+          </a:p>
+          <a:p>
+            <a:pPr algn="l">
+              <a:spcAft>
+                <a:spcPts val="585"/>
+              </a:spcAft>
+            </a:pPr>
+            <a:r>
+              <a:rPr sz="1300" b="0" i="0">
+                <a:solidFill>
+                  <a:srgbClr val="1C1B19"/>
+                </a:solidFill>
+                <a:latin typeface="Source Serif 4"/>
+              </a:rPr>
+              <a:t>A review of studies with more than 7,700 people confirmed the bystander effect, and found it gets weaker when a situation is clearly dangerous and when bystanders know each other.</a:t>
+            </a:r>
+          </a:p>
+          <a:p>
+            <a:pPr algn="l">
+              <a:spcAft>
+                <a:spcPts val="585"/>
+              </a:spcAft>
+            </a:pPr>
+            <a:r>
+              <a:rPr sz="1050" b="0" i="0">
+                <a:solidFill>
+                  <a:srgbClr val="5D5A54"/>
+                </a:solidFill>
+                <a:latin typeface="Inter Tight"/>
+              </a:rPr>
+              <a:t>Fischer et al., Psychological Bulletin, 2011</a:t>
+            </a:r>
+          </a:p>
+        </p:txBody>
+      </p:sp>
+      <p:sp>
+        <p:nvSpPr>
+          <p:cNvPr id="6" name="TextBox 5"/>
+          <p:cNvSpPr txBox="1"/>
+          <p:nvPr/>
+        </p:nvSpPr>
+        <p:spPr>
+          <a:xfrm>
+            <a:off x="6217920" y="1463040"/>
+            <a:ext cx="5394960" cy="4937760"/>
+          </a:xfrm>
+          <a:prstGeom prst="rect">
+            <a:avLst/>
+          </a:prstGeom>
+          <a:noFill/>
+        </p:spPr>
+        <p:txBody>
+          <a:bodyPr wrap="square" anchor="t" lIns="0" rIns="0" tIns="0" bIns="0">
+            <a:spAutoFit/>
+          </a:bodyPr>
+          <a:lstStyle/>
+          <a:p>
+            <a:pPr algn="l">
+              <a:spcAft>
+                <a:spcPts val="585"/>
+              </a:spcAft>
+            </a:pPr>
+            <a:r>
+              <a:rPr sz="1300" b="0" i="0">
+                <a:solidFill>
+                  <a:srgbClr val="1C1B19"/>
+                </a:solidFill>
+                <a:latin typeface="Source Serif 4"/>
+              </a:rPr>
+              <a:t>In security-camera footage of 219 real public fights in the UK, the Netherlands and South Africa, at least one bystander did something to help in 9 of 10. More people around made help more likely.</a:t>
+            </a:r>
+          </a:p>
+          <a:p>
+            <a:pPr algn="l">
+              <a:spcAft>
+                <a:spcPts val="585"/>
+              </a:spcAft>
+            </a:pPr>
+            <a:r>
+              <a:rPr sz="1050" b="0" i="0">
+                <a:solidFill>
+                  <a:srgbClr val="5D5A54"/>
+                </a:solidFill>
+                <a:latin typeface="Inter Tight"/>
+              </a:rPr>
+              <a:t>Philpot et al., American Psychologist, 2020</a:t>
+            </a:r>
+          </a:p>
+          <a:p>
+            <a:pPr algn="l">
+              <a:spcAft>
+                <a:spcPts val="585"/>
+              </a:spcAft>
+            </a:pPr>
+            <a:r>
+              <a:rPr sz="1300" b="0" i="0">
+                <a:solidFill>
+                  <a:srgbClr val="1C1B19"/>
+                </a:solidFill>
+                <a:latin typeface="Source Serif 4"/>
+              </a:rPr>
+              <a:t>On school playgrounds, peers were present for 88% of bullying episodes but stepped in during only 19%. When they did, the bullying stopped most of the time (57%). These were younger children.</a:t>
+            </a:r>
+          </a:p>
+          <a:p>
+            <a:pPr algn="l">
+              <a:spcAft>
+                <a:spcPts val="585"/>
+              </a:spcAft>
+            </a:pPr>
+            <a:r>
+              <a:rPr sz="1050" b="0" i="0">
+                <a:solidFill>
+                  <a:srgbClr val="5D5A54"/>
+                </a:solidFill>
+                <a:latin typeface="Inter Tight"/>
+              </a:rPr>
+              <a:t>Hawkins, Pepler and Craig, Social Development, 2001</a:t>
+            </a:r>
+          </a:p>
+          <a:p>
+            <a:pPr algn="l">
+              <a:spcAft>
+                <a:spcPts val="585"/>
+              </a:spcAft>
+            </a:pPr>
+            <a:r>
+              <a:rPr sz="1300" b="0" i="0">
+                <a:solidFill>
+                  <a:srgbClr val="1C1B19"/>
+                </a:solidFill>
+                <a:latin typeface="Source Serif 4"/>
+              </a:rPr>
+              <a:t>In 56 New Jersey middle schools with more than 24,000 students, small groups of students who took a public stand against conflict cut disciplinary reports of conflict by 25% in a year. The effect was strongest when the group included students others paid attention to.</a:t>
+            </a:r>
+          </a:p>
+          <a:p>
+            <a:pPr algn="l">
+              <a:spcAft>
+                <a:spcPts val="585"/>
+              </a:spcAft>
+            </a:pPr>
+            <a:r>
+              <a:rPr sz="1050" b="0" i="0">
+                <a:solidFill>
+                  <a:srgbClr val="5D5A54"/>
+                </a:solidFill>
+                <a:latin typeface="Inter Tight"/>
+              </a:rPr>
+              <a:t>Paluck, Shepherd and Aronow, PNAS, 2016</a:t>
+            </a:r>
+          </a:p>
+        </p:txBody>
+      </p:sp>
+    </p:spTree>
+  </p:cSld>
+  <p:clrMapOvr>
+    <a:masterClrMapping/>
+  </p:clrMapOvr>
+</p:sld>
+</file>
+
+<file path=ppt/slides/slide2.xml><?xml version="1.0" encoding="utf-8"?>
+<p:sld xmlns:a="http://schemas.openxmlformats.org/drawingml/2006/main" xmlns:p="http://schemas.openxmlformats.org/presentationml/2006/main" xmlns:r="http://schemas.openxmlformats.org/officeDocument/2006/relationships">
+  <p:cSld>
+    <p:bg>
+      <p:bgPr>
+        <a:solidFill>
+          <a:srgbClr val="0B2D5B"/>
+        </a:solidFill>
+        <a:effectLst/>
+      </p:bgPr>
+    </p:bg>
+    <p:spTree>
+      <p:nvGrpSpPr>
+        <p:cNvPr id="1" name=""/>
+        <p:cNvGrpSpPr/>
+        <p:nvPr/>
+      </p:nvGrpSpPr>
+      <p:grpSpPr/>
+      <p:sp>
+        <p:nvSpPr>
+          <p:cNvPr id="2" name="Rectangle 1"/>
+          <p:cNvSpPr/>
+          <p:nvPr/>
+        </p:nvSpPr>
+        <p:spPr>
+          <a:xfrm>
+            <a:off x="548640" y="502920"/>
+            <a:ext cx="457200" cy="54864"/>
+          </a:xfrm>
+          <a:prstGeom prst="rect">
+            <a:avLst/>
+          </a:prstGeom>
+          <a:solidFill>
+            <a:srgbClr val="F47B20"/>
+          </a:solidFill>
+          <a:ln>
+            <a:noFill/>
+          </a:ln>
+          <a:effectLst/>
+        </p:spPr>
+        <p:style>
+          <a:lnRef idx="1">
+            <a:schemeClr val="accent1"/>
+          </a:lnRef>
+          <a:fillRef idx="3">
+            <a:schemeClr val="accent1"/>
+          </a:fillRef>
+          <a:effectRef idx="2">
+            <a:schemeClr val="accent1"/>
+          </a:effectRef>
+          <a:fontRef idx="minor">
+            <a:schemeClr val="lt1"/>
+          </a:fontRef>
+        </p:style>
+        <p:txBody>
+          <a:bodyPr rtlCol="0" anchor="ctr"/>
+          <a:lstStyle/>
+          <a:p>
+            <a:pPr algn="ctr"/>
+          </a:p>
+        </p:txBody>
+      </p:sp>
+      <p:sp>
+        <p:nvSpPr>
+          <p:cNvPr id="3" name="TextBox 2"/>
+          <p:cNvSpPr txBox="1"/>
+          <p:nvPr/>
+        </p:nvSpPr>
+        <p:spPr>
+          <a:xfrm>
+            <a:off x="1143000" y="393192"/>
+            <a:ext cx="8229600" cy="274320"/>
+          </a:xfrm>
+          <a:prstGeom prst="rect">
+            <a:avLst/>
+          </a:prstGeom>
+          <a:noFill/>
+        </p:spPr>
+        <p:txBody>
+          <a:bodyPr wrap="square" anchor="t" lIns="0" rIns="0" tIns="0" bIns="0">
+            <a:spAutoFit/>
+          </a:bodyPr>
+          <a:lstStyle/>
+          <a:p>
+            <a:pPr algn="l">
+              <a:spcAft>
+                <a:spcPts val="540"/>
+              </a:spcAft>
+            </a:pPr>
+            <a:r>
+              <a:rPr sz="1200" b="1" i="0">
+                <a:solidFill>
+                  <a:srgbClr val="5D5A54"/>
+                </a:solidFill>
+                <a:latin typeface="Inter Tight"/>
+              </a:rPr>
+              <a:t>SPEAKING UP</a:t>
+            </a:r>
+          </a:p>
+        </p:txBody>
+      </p:sp>
+      <p:sp>
+        <p:nvSpPr>
+          <p:cNvPr id="4" name="TextBox 3"/>
+          <p:cNvSpPr txBox="1"/>
+          <p:nvPr/>
+        </p:nvSpPr>
+        <p:spPr>
+          <a:xfrm>
+            <a:off x="8229600" y="6400800"/>
+            <a:ext cx="3410712" cy="274320"/>
+          </a:xfrm>
+          <a:prstGeom prst="rect">
+            <a:avLst/>
+          </a:prstGeom>
+          <a:noFill/>
+        </p:spPr>
+        <p:txBody>
+          <a:bodyPr wrap="square" anchor="t" lIns="0" rIns="0" tIns="0" bIns="0">
+            <a:spAutoFit/>
+          </a:bodyPr>
+          <a:lstStyle/>
+          <a:p>
+            <a:pPr algn="r">
+              <a:spcAft>
+                <a:spcPts val="450"/>
+              </a:spcAft>
+            </a:pPr>
+            <a:r>
+              <a:rPr sz="1000" b="0" i="0">
+                <a:solidFill>
+                  <a:srgbClr val="5D5A54"/>
+                </a:solidFill>
+                <a:latin typeface="Inter Tight"/>
+              </a:rPr>
+              <a:t>Beaver Counseling</a:t>
+            </a:r>
+          </a:p>
+        </p:txBody>
+      </p:sp>
+      <p:sp>
+        <p:nvSpPr>
+          <p:cNvPr id="5" name="TextBox 4"/>
+          <p:cNvSpPr txBox="1"/>
+          <p:nvPr/>
+        </p:nvSpPr>
+        <p:spPr>
+          <a:xfrm>
+            <a:off x="822960" y="2011680"/>
+            <a:ext cx="10515600" cy="1463040"/>
+          </a:xfrm>
+          <a:prstGeom prst="rect">
+            <a:avLst/>
+          </a:prstGeom>
+          <a:noFill/>
+        </p:spPr>
+        <p:txBody>
+          <a:bodyPr wrap="square" anchor="b" lIns="0" rIns="0" tIns="0" bIns="0">
+            <a:spAutoFit/>
+          </a:bodyPr>
+          <a:lstStyle/>
+          <a:p>
+            <a:pPr algn="l">
+              <a:spcAft>
+                <a:spcPts val="2700"/>
+              </a:spcAft>
+            </a:pPr>
+            <a:r>
+              <a:rPr sz="6000" b="1" i="0">
+                <a:solidFill>
+                  <a:srgbClr val="FFFFFF"/>
+                </a:solidFill>
+                <a:latin typeface="Source Serif 4"/>
+              </a:rPr>
+              <a:t>Speaking Up</a:t>
+            </a:r>
+          </a:p>
+        </p:txBody>
+      </p:sp>
+      <p:sp>
+        <p:nvSpPr>
+          <p:cNvPr id="6" name="TextBox 5"/>
+          <p:cNvSpPr txBox="1"/>
+          <p:nvPr/>
+        </p:nvSpPr>
+        <p:spPr>
+          <a:xfrm>
+            <a:off x="822960" y="3611880"/>
+            <a:ext cx="10515600" cy="914400"/>
+          </a:xfrm>
+          <a:prstGeom prst="rect">
+            <a:avLst/>
+          </a:prstGeom>
+          <a:noFill/>
+        </p:spPr>
+        <p:txBody>
+          <a:bodyPr wrap="square" anchor="t" lIns="0" rIns="0" tIns="0" bIns="0">
+            <a:spAutoFit/>
+          </a:bodyPr>
+          <a:lstStyle/>
+          <a:p>
+            <a:pPr algn="l">
+              <a:spcAft>
+                <a:spcPts val="1080"/>
+              </a:spcAft>
+            </a:pPr>
+            <a:r>
+              <a:rPr sz="2400" b="0" i="1">
+                <a:solidFill>
+                  <a:srgbClr val="E8E4DA"/>
+                </a:solidFill>
+                <a:latin typeface="Source Serif 4"/>
+              </a:rPr>
+              <a:t>You saw it. You froze. Then you replayed it all night.</a:t>
+            </a:r>
+          </a:p>
+        </p:txBody>
+      </p:sp>
+      <p:sp>
+        <p:nvSpPr>
+          <p:cNvPr id="7" name="TextBox 6"/>
+          <p:cNvSpPr txBox="1"/>
+          <p:nvPr/>
+        </p:nvSpPr>
+        <p:spPr>
+          <a:xfrm>
+            <a:off x="822960" y="6035040"/>
+            <a:ext cx="7315200" cy="365760"/>
+          </a:xfrm>
+          <a:prstGeom prst="rect">
+            <a:avLst/>
+          </a:prstGeom>
+          <a:noFill/>
+        </p:spPr>
+        <p:txBody>
+          <a:bodyPr wrap="square" anchor="t" lIns="0" rIns="0" tIns="0" bIns="0">
+            <a:spAutoFit/>
+          </a:bodyPr>
+          <a:lstStyle/>
+          <a:p>
+            <a:pPr algn="l">
+              <a:spcAft>
+                <a:spcPts val="585"/>
+              </a:spcAft>
+            </a:pPr>
+            <a:r>
+              <a:rPr sz="1300" b="0" i="0">
+                <a:solidFill>
+                  <a:srgbClr val="E8E4DA"/>
+                </a:solidFill>
+                <a:latin typeface="Inter Tight"/>
+              </a:rPr>
+              <a:t>Beaver Upper School · Counseling</a:t>
+            </a:r>
+          </a:p>
+        </p:txBody>
+      </p:sp>
+    </p:spTree>
+  </p:cSld>
+  <p:clrMapOvr>
+    <a:masterClrMapping/>
+  </p:clrMapOvr>
+</p:sld>
+</file>
+
+<file path=ppt/slides/slide3.xml><?xml version="1.0" encoding="utf-8"?>
 <p:sld xmlns:a="http://schemas.openxmlformats.org/drawingml/2006/main" xmlns:p="http://schemas.openxmlformats.org/presentationml/2006/main" xmlns:r="http://schemas.openxmlformats.org/officeDocument/2006/relationships">
   <p:cSld>
     <p:bg>
@@ -4749,7 +6764,7 @@
                 </a:solidFill>
                 <a:latin typeface="Inter Tight"/>
               </a:rPr>
-              <a:t>THREE MOMENTS</a:t>
+              <a:t>ANONYMOUS CARDS</a:t>
             </a:r>
           </a:p>
         </p:txBody>
@@ -4795,64 +6810,23 @@
       </p:sp>
       <p:sp>
         <p:nvSpPr>
-          <p:cNvPr id="5" name="TextBox 4"/>
-          <p:cNvSpPr txBox="1"/>
-          <p:nvPr/>
-        </p:nvSpPr>
-        <p:spPr>
-          <a:xfrm>
-            <a:off x="822960" y="1005840"/>
-            <a:ext cx="10515600" cy="914400"/>
-          </a:xfrm>
-          <a:prstGeom prst="rect">
-            <a:avLst/>
-          </a:prstGeom>
-          <a:noFill/>
-        </p:spPr>
-        <p:txBody>
-          <a:bodyPr wrap="square" anchor="t" lIns="0" rIns="0" tIns="0" bIns="0">
-            <a:spAutoFit/>
-          </a:bodyPr>
-          <a:lstStyle/>
-          <a:p>
-            <a:pPr algn="l">
-              <a:spcAft>
-                <a:spcPts val="1530"/>
-              </a:spcAft>
-            </a:pPr>
-            <a:r>
-              <a:rPr sz="3400" b="1" i="0">
-                <a:solidFill>
-                  <a:srgbClr val="1C1B19"/>
-                </a:solidFill>
-                <a:latin typeface="Source Serif 4"/>
-              </a:rPr>
-              <a:t>Which move would you actually make?</a:t>
-            </a:r>
-          </a:p>
-        </p:txBody>
-      </p:sp>
-      <p:sp>
-        <p:nvSpPr>
-          <p:cNvPr id="6" name="Rectangle 5"/>
+          <p:cNvPr id="5" name="Rectangle 4"/>
           <p:cNvSpPr/>
           <p:nvPr/>
         </p:nvSpPr>
         <p:spPr>
           <a:xfrm>
-            <a:off x="822960" y="2103120"/>
-            <a:ext cx="3322320" cy="3840480"/>
+            <a:off x="822960" y="1371600"/>
+            <a:ext cx="73152" cy="3566160"/>
           </a:xfrm>
           <a:prstGeom prst="rect">
             <a:avLst/>
           </a:prstGeom>
           <a:solidFill>
-            <a:srgbClr val="FFFFFF"/>
+            <a:srgbClr val="F47B20"/>
           </a:solidFill>
-          <a:ln w="15875">
-            <a:solidFill>
-              <a:srgbClr val="D8D2C6"/>
-            </a:solidFill>
+          <a:ln>
+            <a:noFill/>
           </a:ln>
           <a:effectLst/>
         </p:spPr>
@@ -4880,14 +6854,53 @@
       </p:sp>
       <p:sp>
         <p:nvSpPr>
+          <p:cNvPr id="6" name="TextBox 5"/>
+          <p:cNvSpPr txBox="1"/>
+          <p:nvPr/>
+        </p:nvSpPr>
+        <p:spPr>
+          <a:xfrm>
+            <a:off x="1188720" y="1371600"/>
+            <a:ext cx="10058400" cy="3566160"/>
+          </a:xfrm>
+          <a:prstGeom prst="rect">
+            <a:avLst/>
+          </a:prstGeom>
+          <a:noFill/>
+        </p:spPr>
+        <p:txBody>
+          <a:bodyPr wrap="square" anchor="ctr" lIns="0" rIns="0" tIns="0" bIns="0">
+            <a:spAutoFit/>
+          </a:bodyPr>
+          <a:lstStyle/>
+          <a:p>
+            <a:pPr algn="l">
+              <a:spcAft>
+                <a:spcPts val="1800"/>
+              </a:spcAft>
+            </a:pPr>
+            <a:r>
+              <a:rPr sz="4000" b="0" i="1">
+                <a:solidFill>
+                  <a:srgbClr val="1C1B19"/>
+                </a:solidFill>
+                <a:latin typeface="Source Serif 4"/>
+              </a:rPr>
+              <a:t>Have you ever seen someone get picked on and said nothing?</a:t>
+            </a:r>
+          </a:p>
+        </p:txBody>
+      </p:sp>
+      <p:sp>
+        <p:nvSpPr>
           <p:cNvPr id="7" name="TextBox 6"/>
           <p:cNvSpPr txBox="1"/>
           <p:nvPr/>
         </p:nvSpPr>
         <p:spPr>
           <a:xfrm>
-            <a:off x="1051560" y="2286000"/>
-            <a:ext cx="2865120" cy="365760"/>
+            <a:off x="1188720" y="5120640"/>
+            <a:ext cx="10058400" cy="914400"/>
           </a:xfrm>
           <a:prstGeom prst="rect">
             <a:avLst/>
@@ -4902,304 +6915,17 @@
           <a:p>
             <a:pPr algn="l">
               <a:spcAft>
-                <a:spcPts val="585"/>
-              </a:spcAft>
-            </a:pPr>
-            <a:r>
-              <a:rPr sz="1300" b="1" i="0">
-                <a:solidFill>
-                  <a:srgbClr val="0B2D5B"/>
+                <a:spcPts val="810"/>
+              </a:spcAft>
+            </a:pPr>
+            <a:r>
+              <a:rPr sz="1800" b="0" i="0">
+                <a:solidFill>
+                  <a:srgbClr val="5D5A54"/>
                 </a:solidFill>
                 <a:latin typeface="Inter Tight"/>
               </a:rPr>
-              <a:t>LOCKER ROOM</a:t>
-            </a:r>
-          </a:p>
-        </p:txBody>
-      </p:sp>
-      <p:sp>
-        <p:nvSpPr>
-          <p:cNvPr id="8" name="TextBox 7"/>
-          <p:cNvSpPr txBox="1"/>
-          <p:nvPr/>
-        </p:nvSpPr>
-        <p:spPr>
-          <a:xfrm>
-            <a:off x="1051560" y="2743200"/>
-            <a:ext cx="2865120" cy="3017520"/>
-          </a:xfrm>
-          <a:prstGeom prst="rect">
-            <a:avLst/>
-          </a:prstGeom>
-          <a:noFill/>
-        </p:spPr>
-        <p:txBody>
-          <a:bodyPr wrap="square" anchor="t" lIns="0" rIns="0" tIns="0" bIns="0">
-            <a:spAutoFit/>
-          </a:bodyPr>
-          <a:lstStyle/>
-          <a:p>
-            <a:pPr algn="l">
-              <a:spcAft>
-                <a:spcPts val="810"/>
-              </a:spcAft>
-            </a:pPr>
-            <a:r>
-              <a:rPr sz="1800" b="0" i="0">
-                <a:solidFill>
-                  <a:srgbClr val="1C1B19"/>
-                </a:solidFill>
-                <a:latin typeface="Source Serif 4"/>
-              </a:rPr>
-              <a:t>A teammate makes a comment about another player's body. A few guys laugh. The player goes quiet.</a:t>
-            </a:r>
-          </a:p>
-        </p:txBody>
-      </p:sp>
-      <p:sp>
-        <p:nvSpPr>
-          <p:cNvPr id="9" name="Rectangle 8"/>
-          <p:cNvSpPr/>
-          <p:nvPr/>
-        </p:nvSpPr>
-        <p:spPr>
-          <a:xfrm>
-            <a:off x="4419600" y="2103120"/>
-            <a:ext cx="3322320" cy="3840480"/>
-          </a:xfrm>
-          <a:prstGeom prst="rect">
-            <a:avLst/>
-          </a:prstGeom>
-          <a:solidFill>
-            <a:srgbClr val="FFFFFF"/>
-          </a:solidFill>
-          <a:ln w="15875">
-            <a:solidFill>
-              <a:srgbClr val="D8D2C6"/>
-            </a:solidFill>
-          </a:ln>
-          <a:effectLst/>
-        </p:spPr>
-        <p:style>
-          <a:lnRef idx="1">
-            <a:schemeClr val="accent1"/>
-          </a:lnRef>
-          <a:fillRef idx="3">
-            <a:schemeClr val="accent1"/>
-          </a:fillRef>
-          <a:effectRef idx="2">
-            <a:schemeClr val="accent1"/>
-          </a:effectRef>
-          <a:fontRef idx="minor">
-            <a:schemeClr val="lt1"/>
-          </a:fontRef>
-        </p:style>
-        <p:txBody>
-          <a:bodyPr rtlCol="0" anchor="ctr"/>
-          <a:lstStyle/>
-          <a:p>
-            <a:pPr algn="ctr"/>
-          </a:p>
-        </p:txBody>
-      </p:sp>
-      <p:sp>
-        <p:nvSpPr>
-          <p:cNvPr id="10" name="TextBox 9"/>
-          <p:cNvSpPr txBox="1"/>
-          <p:nvPr/>
-        </p:nvSpPr>
-        <p:spPr>
-          <a:xfrm>
-            <a:off x="4648200" y="2286000"/>
-            <a:ext cx="2865120" cy="365760"/>
-          </a:xfrm>
-          <a:prstGeom prst="rect">
-            <a:avLst/>
-          </a:prstGeom>
-          <a:noFill/>
-        </p:spPr>
-        <p:txBody>
-          <a:bodyPr wrap="square" anchor="t" lIns="0" rIns="0" tIns="0" bIns="0">
-            <a:spAutoFit/>
-          </a:bodyPr>
-          <a:lstStyle/>
-          <a:p>
-            <a:pPr algn="l">
-              <a:spcAft>
-                <a:spcPts val="585"/>
-              </a:spcAft>
-            </a:pPr>
-            <a:r>
-              <a:rPr sz="1300" b="1" i="0">
-                <a:solidFill>
-                  <a:srgbClr val="0B2D5B"/>
-                </a:solidFill>
-                <a:latin typeface="Inter Tight"/>
-              </a:rPr>
-              <a:t>AT A PARTY</a:t>
-            </a:r>
-          </a:p>
-        </p:txBody>
-      </p:sp>
-      <p:sp>
-        <p:nvSpPr>
-          <p:cNvPr id="11" name="TextBox 10"/>
-          <p:cNvSpPr txBox="1"/>
-          <p:nvPr/>
-        </p:nvSpPr>
-        <p:spPr>
-          <a:xfrm>
-            <a:off x="4648200" y="2743200"/>
-            <a:ext cx="2865120" cy="3017520"/>
-          </a:xfrm>
-          <a:prstGeom prst="rect">
-            <a:avLst/>
-          </a:prstGeom>
-          <a:noFill/>
-        </p:spPr>
-        <p:txBody>
-          <a:bodyPr wrap="square" anchor="t" lIns="0" rIns="0" tIns="0" bIns="0">
-            <a:spAutoFit/>
-          </a:bodyPr>
-          <a:lstStyle/>
-          <a:p>
-            <a:pPr algn="l">
-              <a:spcAft>
-                <a:spcPts val="810"/>
-              </a:spcAft>
-            </a:pPr>
-            <a:r>
-              <a:rPr sz="1800" b="0" i="0">
-                <a:solidFill>
-                  <a:srgbClr val="1C1B19"/>
-                </a:solidFill>
-                <a:latin typeface="Source Serif 4"/>
-              </a:rPr>
-              <a:t>Someone keeps following Ana from your chem class. She looks uncomfortable and keeps scanning the room.</a:t>
-            </a:r>
-          </a:p>
-        </p:txBody>
-      </p:sp>
-      <p:sp>
-        <p:nvSpPr>
-          <p:cNvPr id="12" name="Rectangle 11"/>
-          <p:cNvSpPr/>
-          <p:nvPr/>
-        </p:nvSpPr>
-        <p:spPr>
-          <a:xfrm>
-            <a:off x="8016239" y="2103120"/>
-            <a:ext cx="3322320" cy="3840480"/>
-          </a:xfrm>
-          <a:prstGeom prst="rect">
-            <a:avLst/>
-          </a:prstGeom>
-          <a:solidFill>
-            <a:srgbClr val="FFFFFF"/>
-          </a:solidFill>
-          <a:ln w="15875">
-            <a:solidFill>
-              <a:srgbClr val="D8D2C6"/>
-            </a:solidFill>
-          </a:ln>
-          <a:effectLst/>
-        </p:spPr>
-        <p:style>
-          <a:lnRef idx="1">
-            <a:schemeClr val="accent1"/>
-          </a:lnRef>
-          <a:fillRef idx="3">
-            <a:schemeClr val="accent1"/>
-          </a:fillRef>
-          <a:effectRef idx="2">
-            <a:schemeClr val="accent1"/>
-          </a:effectRef>
-          <a:fontRef idx="minor">
-            <a:schemeClr val="lt1"/>
-          </a:fontRef>
-        </p:style>
-        <p:txBody>
-          <a:bodyPr rtlCol="0" anchor="ctr"/>
-          <a:lstStyle/>
-          <a:p>
-            <a:pPr algn="ctr"/>
-          </a:p>
-        </p:txBody>
-      </p:sp>
-      <p:sp>
-        <p:nvSpPr>
-          <p:cNvPr id="13" name="TextBox 12"/>
-          <p:cNvSpPr txBox="1"/>
-          <p:nvPr/>
-        </p:nvSpPr>
-        <p:spPr>
-          <a:xfrm>
-            <a:off x="8244839" y="2286000"/>
-            <a:ext cx="2865120" cy="365760"/>
-          </a:xfrm>
-          <a:prstGeom prst="rect">
-            <a:avLst/>
-          </a:prstGeom>
-          <a:noFill/>
-        </p:spPr>
-        <p:txBody>
-          <a:bodyPr wrap="square" anchor="t" lIns="0" rIns="0" tIns="0" bIns="0">
-            <a:spAutoFit/>
-          </a:bodyPr>
-          <a:lstStyle/>
-          <a:p>
-            <a:pPr algn="l">
-              <a:spcAft>
-                <a:spcPts val="585"/>
-              </a:spcAft>
-            </a:pPr>
-            <a:r>
-              <a:rPr sz="1300" b="1" i="0">
-                <a:solidFill>
-                  <a:srgbClr val="0B2D5B"/>
-                </a:solidFill>
-                <a:latin typeface="Inter Tight"/>
-              </a:rPr>
-              <a:t>THE CLASS CHAT</a:t>
-            </a:r>
-          </a:p>
-        </p:txBody>
-      </p:sp>
-      <p:sp>
-        <p:nvSpPr>
-          <p:cNvPr id="14" name="TextBox 13"/>
-          <p:cNvSpPr txBox="1"/>
-          <p:nvPr/>
-        </p:nvSpPr>
-        <p:spPr>
-          <a:xfrm>
-            <a:off x="8244839" y="2743200"/>
-            <a:ext cx="2865120" cy="3017520"/>
-          </a:xfrm>
-          <a:prstGeom prst="rect">
-            <a:avLst/>
-          </a:prstGeom>
-          <a:noFill/>
-        </p:spPr>
-        <p:txBody>
-          <a:bodyPr wrap="square" anchor="t" lIns="0" rIns="0" tIns="0" bIns="0">
-            <a:spAutoFit/>
-          </a:bodyPr>
-          <a:lstStyle/>
-          <a:p>
-            <a:pPr algn="l">
-              <a:spcAft>
-                <a:spcPts val="810"/>
-              </a:spcAft>
-            </a:pPr>
-            <a:r>
-              <a:rPr sz="1800" b="0" i="0">
-                <a:solidFill>
-                  <a:srgbClr val="1C1B19"/>
-                </a:solidFill>
-                <a:latin typeface="Source Serif 4"/>
-              </a:rPr>
-              <a:t>Someone posts a voice clip mocking Wei's accent. In a 30-person chat, reactions start rolling in.</a:t>
+              <a:t>Write yes or no on a card. Fold it. No names.</a:t>
             </a:r>
           </a:p>
         </p:txBody>
@@ -5212,7 +6938,7 @@
 </p:sld>
 </file>
 
-<file path=ppt/slides/slide11.xml><?xml version="1.0" encoding="utf-8"?>
+<file path=ppt/slides/slide4.xml><?xml version="1.0" encoding="utf-8"?>
 <p:sld xmlns:a="http://schemas.openxmlformats.org/drawingml/2006/main" xmlns:p="http://schemas.openxmlformats.org/presentationml/2006/main" xmlns:r="http://schemas.openxmlformats.org/officeDocument/2006/relationships">
   <p:cSld>
     <p:bg>
@@ -5308,7 +7034,7 @@
                 </a:solidFill>
                 <a:latin typeface="Inter Tight"/>
               </a:rPr>
-              <a:t>PRIVATE</a:t>
+              <a:t>FIVE GATES</a:t>
             </a:r>
           </a:p>
         </p:txBody>
@@ -5354,23 +7080,64 @@
       </p:sp>
       <p:sp>
         <p:nvSpPr>
-          <p:cNvPr id="5" name="Rectangle 4"/>
+          <p:cNvPr id="5" name="TextBox 4"/>
+          <p:cNvSpPr txBox="1"/>
+          <p:nvPr/>
+        </p:nvSpPr>
+        <p:spPr>
+          <a:xfrm>
+            <a:off x="822960" y="1005840"/>
+            <a:ext cx="10515600" cy="914400"/>
+          </a:xfrm>
+          <a:prstGeom prst="rect">
+            <a:avLst/>
+          </a:prstGeom>
+          <a:noFill/>
+        </p:spPr>
+        <p:txBody>
+          <a:bodyPr wrap="square" anchor="t" lIns="0" rIns="0" tIns="0" bIns="0">
+            <a:spAutoFit/>
+          </a:bodyPr>
+          <a:lstStyle/>
+          <a:p>
+            <a:pPr algn="l">
+              <a:spcAft>
+                <a:spcPts val="1530"/>
+              </a:spcAft>
+            </a:pPr>
+            <a:r>
+              <a:rPr sz="3400" b="1" i="0">
+                <a:solidFill>
+                  <a:srgbClr val="1C1B19"/>
+                </a:solidFill>
+                <a:latin typeface="Source Serif 4"/>
+              </a:rPr>
+              <a:t>Between seeing it and doing something</a:t>
+            </a:r>
+          </a:p>
+        </p:txBody>
+      </p:sp>
+      <p:sp>
+        <p:nvSpPr>
+          <p:cNvPr id="6" name="Rectangle 5"/>
           <p:cNvSpPr/>
           <p:nvPr/>
         </p:nvSpPr>
         <p:spPr>
           <a:xfrm>
-            <a:off x="822960" y="1371600"/>
-            <a:ext cx="73152" cy="3566160"/>
+            <a:off x="822960" y="2743200"/>
+            <a:ext cx="1874519" cy="1005840"/>
           </a:xfrm>
           <a:prstGeom prst="rect">
             <a:avLst/>
           </a:prstGeom>
           <a:solidFill>
-            <a:srgbClr val="F47B20"/>
+            <a:srgbClr val="FFFFFF"/>
           </a:solidFill>
-          <a:ln>
-            <a:noFill/>
+          <a:ln w="15875">
+            <a:solidFill>
+              <a:srgbClr val="0B2D5B"/>
+            </a:solidFill>
           </a:ln>
           <a:effectLst/>
         </p:spPr>
@@ -5398,14 +7165,14 @@
       </p:sp>
       <p:sp>
         <p:nvSpPr>
-          <p:cNvPr id="6" name="TextBox 5"/>
+          <p:cNvPr id="7" name="TextBox 6"/>
           <p:cNvSpPr txBox="1"/>
           <p:nvPr/>
         </p:nvSpPr>
         <p:spPr>
           <a:xfrm>
-            <a:off x="1188720" y="1371600"/>
-            <a:ext cx="10058400" cy="3566160"/>
+            <a:off x="822960" y="2743200"/>
+            <a:ext cx="1874519" cy="1005840"/>
           </a:xfrm>
           <a:prstGeom prst="rect">
             <a:avLst/>
@@ -5418,33 +7185,517 @@
           </a:bodyPr>
           <a:lstStyle/>
           <a:p>
-            <a:pPr algn="l">
-              <a:spcAft>
-                <a:spcPts val="1800"/>
-              </a:spcAft>
-            </a:pPr>
-            <a:r>
-              <a:rPr sz="4000" b="0" i="1">
+            <a:pPr algn="ctr">
+              <a:spcAft>
+                <a:spcPts val="900"/>
+              </a:spcAft>
+            </a:pPr>
+            <a:r>
+              <a:rPr sz="2000" b="1" i="0">
                 <a:solidFill>
                   <a:srgbClr val="1C1B19"/>
                 </a:solidFill>
                 <a:latin typeface="Source Serif 4"/>
               </a:rPr>
-              <a:t>What's one line you'd actually say?</a:t>
-            </a:r>
-          </a:p>
-        </p:txBody>
-      </p:sp>
-      <p:sp>
-        <p:nvSpPr>
-          <p:cNvPr id="7" name="TextBox 6"/>
+              <a:t>Notice</a:t>
+            </a:r>
+          </a:p>
+        </p:txBody>
+      </p:sp>
+      <p:cxnSp>
+        <p:nvCxnSpPr>
+          <p:cNvPr id="8" name="Connector 7"/>
+          <p:cNvCxnSpPr/>
+          <p:nvPr/>
+        </p:nvCxnSpPr>
+        <p:spPr>
+          <a:xfrm>
+            <a:off x="2752344" y="3246120"/>
+            <a:ext cx="176021" cy="0"/>
+          </a:xfrm>
+          <a:prstGeom prst="line">
+            <a:avLst/>
+          </a:prstGeom>
+          <a:ln w="31750">
+            <a:solidFill>
+              <a:srgbClr val="F47B20"/>
+            </a:solidFill>
+            <a:tailEnd type="triangle"/>
+          </a:ln>
+        </p:spPr>
+        <p:style>
+          <a:lnRef idx="2">
+            <a:schemeClr val="accent1"/>
+          </a:lnRef>
+          <a:fillRef idx="0">
+            <a:schemeClr val="accent1"/>
+          </a:fillRef>
+          <a:effectRef idx="1">
+            <a:schemeClr val="accent1"/>
+          </a:effectRef>
+          <a:fontRef idx="minor">
+            <a:schemeClr val="tx1"/>
+          </a:fontRef>
+        </p:style>
+      </p:cxnSp>
+      <p:sp>
+        <p:nvSpPr>
+          <p:cNvPr id="9" name="Rectangle 8"/>
+          <p:cNvSpPr/>
+          <p:nvPr/>
+        </p:nvSpPr>
+        <p:spPr>
+          <a:xfrm>
+            <a:off x="2983229" y="2743200"/>
+            <a:ext cx="1874519" cy="1005840"/>
+          </a:xfrm>
+          <a:prstGeom prst="rect">
+            <a:avLst/>
+          </a:prstGeom>
+          <a:solidFill>
+            <a:srgbClr val="FFFFFF"/>
+          </a:solidFill>
+          <a:ln w="15875">
+            <a:solidFill>
+              <a:srgbClr val="0B2D5B"/>
+            </a:solidFill>
+          </a:ln>
+          <a:effectLst/>
+        </p:spPr>
+        <p:style>
+          <a:lnRef idx="1">
+            <a:schemeClr val="accent1"/>
+          </a:lnRef>
+          <a:fillRef idx="3">
+            <a:schemeClr val="accent1"/>
+          </a:fillRef>
+          <a:effectRef idx="2">
+            <a:schemeClr val="accent1"/>
+          </a:effectRef>
+          <a:fontRef idx="minor">
+            <a:schemeClr val="lt1"/>
+          </a:fontRef>
+        </p:style>
+        <p:txBody>
+          <a:bodyPr rtlCol="0" anchor="ctr"/>
+          <a:lstStyle/>
+          <a:p>
+            <a:pPr algn="ctr"/>
+          </a:p>
+        </p:txBody>
+      </p:sp>
+      <p:sp>
+        <p:nvSpPr>
+          <p:cNvPr id="10" name="TextBox 9"/>
           <p:cNvSpPr txBox="1"/>
           <p:nvPr/>
         </p:nvSpPr>
         <p:spPr>
           <a:xfrm>
-            <a:off x="1188720" y="5120640"/>
-            <a:ext cx="10058400" cy="914400"/>
+            <a:off x="2983229" y="2743200"/>
+            <a:ext cx="1874519" cy="1005840"/>
+          </a:xfrm>
+          <a:prstGeom prst="rect">
+            <a:avLst/>
+          </a:prstGeom>
+          <a:noFill/>
+        </p:spPr>
+        <p:txBody>
+          <a:bodyPr wrap="square" anchor="ctr" lIns="0" rIns="0" tIns="0" bIns="0">
+            <a:spAutoFit/>
+          </a:bodyPr>
+          <a:lstStyle/>
+          <a:p>
+            <a:pPr algn="ctr">
+              <a:spcAft>
+                <a:spcPts val="900"/>
+              </a:spcAft>
+            </a:pPr>
+            <a:r>
+              <a:rPr sz="2000" b="1" i="0">
+                <a:solidFill>
+                  <a:srgbClr val="1C1B19"/>
+                </a:solidFill>
+                <a:latin typeface="Source Serif 4"/>
+              </a:rPr>
+              <a:t>Call it a problem</a:t>
+            </a:r>
+          </a:p>
+        </p:txBody>
+      </p:sp>
+      <p:cxnSp>
+        <p:nvCxnSpPr>
+          <p:cNvPr id="11" name="Connector 10"/>
+          <p:cNvCxnSpPr/>
+          <p:nvPr/>
+        </p:nvCxnSpPr>
+        <p:spPr>
+          <a:xfrm>
+            <a:off x="4912614" y="3246120"/>
+            <a:ext cx="176022" cy="0"/>
+          </a:xfrm>
+          <a:prstGeom prst="line">
+            <a:avLst/>
+          </a:prstGeom>
+          <a:ln w="31750">
+            <a:solidFill>
+              <a:srgbClr val="F47B20"/>
+            </a:solidFill>
+            <a:tailEnd type="triangle"/>
+          </a:ln>
+        </p:spPr>
+        <p:style>
+          <a:lnRef idx="2">
+            <a:schemeClr val="accent1"/>
+          </a:lnRef>
+          <a:fillRef idx="0">
+            <a:schemeClr val="accent1"/>
+          </a:fillRef>
+          <a:effectRef idx="1">
+            <a:schemeClr val="accent1"/>
+          </a:effectRef>
+          <a:fontRef idx="minor">
+            <a:schemeClr val="tx1"/>
+          </a:fontRef>
+        </p:style>
+      </p:cxnSp>
+      <p:sp>
+        <p:nvSpPr>
+          <p:cNvPr id="12" name="Rectangle 11"/>
+          <p:cNvSpPr/>
+          <p:nvPr/>
+        </p:nvSpPr>
+        <p:spPr>
+          <a:xfrm>
+            <a:off x="5143500" y="2743200"/>
+            <a:ext cx="1874519" cy="1005840"/>
+          </a:xfrm>
+          <a:prstGeom prst="rect">
+            <a:avLst/>
+          </a:prstGeom>
+          <a:solidFill>
+            <a:srgbClr val="FFFFFF"/>
+          </a:solidFill>
+          <a:ln w="15875">
+            <a:solidFill>
+              <a:srgbClr val="0B2D5B"/>
+            </a:solidFill>
+          </a:ln>
+          <a:effectLst/>
+        </p:spPr>
+        <p:style>
+          <a:lnRef idx="1">
+            <a:schemeClr val="accent1"/>
+          </a:lnRef>
+          <a:fillRef idx="3">
+            <a:schemeClr val="accent1"/>
+          </a:fillRef>
+          <a:effectRef idx="2">
+            <a:schemeClr val="accent1"/>
+          </a:effectRef>
+          <a:fontRef idx="minor">
+            <a:schemeClr val="lt1"/>
+          </a:fontRef>
+        </p:style>
+        <p:txBody>
+          <a:bodyPr rtlCol="0" anchor="ctr"/>
+          <a:lstStyle/>
+          <a:p>
+            <a:pPr algn="ctr"/>
+          </a:p>
+        </p:txBody>
+      </p:sp>
+      <p:sp>
+        <p:nvSpPr>
+          <p:cNvPr id="13" name="TextBox 12"/>
+          <p:cNvSpPr txBox="1"/>
+          <p:nvPr/>
+        </p:nvSpPr>
+        <p:spPr>
+          <a:xfrm>
+            <a:off x="5143500" y="2743200"/>
+            <a:ext cx="1874519" cy="1005840"/>
+          </a:xfrm>
+          <a:prstGeom prst="rect">
+            <a:avLst/>
+          </a:prstGeom>
+          <a:noFill/>
+        </p:spPr>
+        <p:txBody>
+          <a:bodyPr wrap="square" anchor="ctr" lIns="0" rIns="0" tIns="0" bIns="0">
+            <a:spAutoFit/>
+          </a:bodyPr>
+          <a:lstStyle/>
+          <a:p>
+            <a:pPr algn="ctr">
+              <a:spcAft>
+                <a:spcPts val="900"/>
+              </a:spcAft>
+            </a:pPr>
+            <a:r>
+              <a:rPr sz="2000" b="1" i="0">
+                <a:solidFill>
+                  <a:srgbClr val="1C1B19"/>
+                </a:solidFill>
+                <a:latin typeface="Source Serif 4"/>
+              </a:rPr>
+              <a:t>Feel it's yours</a:t>
+            </a:r>
+          </a:p>
+        </p:txBody>
+      </p:sp>
+      <p:cxnSp>
+        <p:nvCxnSpPr>
+          <p:cNvPr id="14" name="Connector 13"/>
+          <p:cNvCxnSpPr/>
+          <p:nvPr/>
+        </p:nvCxnSpPr>
+        <p:spPr>
+          <a:xfrm>
+            <a:off x="7072883" y="3246120"/>
+            <a:ext cx="176023" cy="0"/>
+          </a:xfrm>
+          <a:prstGeom prst="line">
+            <a:avLst/>
+          </a:prstGeom>
+          <a:ln w="31750">
+            <a:solidFill>
+              <a:srgbClr val="F47B20"/>
+            </a:solidFill>
+            <a:tailEnd type="triangle"/>
+          </a:ln>
+        </p:spPr>
+        <p:style>
+          <a:lnRef idx="2">
+            <a:schemeClr val="accent1"/>
+          </a:lnRef>
+          <a:fillRef idx="0">
+            <a:schemeClr val="accent1"/>
+          </a:fillRef>
+          <a:effectRef idx="1">
+            <a:schemeClr val="accent1"/>
+          </a:effectRef>
+          <a:fontRef idx="minor">
+            <a:schemeClr val="tx1"/>
+          </a:fontRef>
+        </p:style>
+      </p:cxnSp>
+      <p:sp>
+        <p:nvSpPr>
+          <p:cNvPr id="15" name="Rectangle 14"/>
+          <p:cNvSpPr/>
+          <p:nvPr/>
+        </p:nvSpPr>
+        <p:spPr>
+          <a:xfrm>
+            <a:off x="7303770" y="2743200"/>
+            <a:ext cx="1874519" cy="1005840"/>
+          </a:xfrm>
+          <a:prstGeom prst="rect">
+            <a:avLst/>
+          </a:prstGeom>
+          <a:solidFill>
+            <a:srgbClr val="FFFFFF"/>
+          </a:solidFill>
+          <a:ln w="15875">
+            <a:solidFill>
+              <a:srgbClr val="0B2D5B"/>
+            </a:solidFill>
+          </a:ln>
+          <a:effectLst/>
+        </p:spPr>
+        <p:style>
+          <a:lnRef idx="1">
+            <a:schemeClr val="accent1"/>
+          </a:lnRef>
+          <a:fillRef idx="3">
+            <a:schemeClr val="accent1"/>
+          </a:fillRef>
+          <a:effectRef idx="2">
+            <a:schemeClr val="accent1"/>
+          </a:effectRef>
+          <a:fontRef idx="minor">
+            <a:schemeClr val="lt1"/>
+          </a:fontRef>
+        </p:style>
+        <p:txBody>
+          <a:bodyPr rtlCol="0" anchor="ctr"/>
+          <a:lstStyle/>
+          <a:p>
+            <a:pPr algn="ctr"/>
+          </a:p>
+        </p:txBody>
+      </p:sp>
+      <p:sp>
+        <p:nvSpPr>
+          <p:cNvPr id="16" name="TextBox 15"/>
+          <p:cNvSpPr txBox="1"/>
+          <p:nvPr/>
+        </p:nvSpPr>
+        <p:spPr>
+          <a:xfrm>
+            <a:off x="7303770" y="2743200"/>
+            <a:ext cx="1874519" cy="1005840"/>
+          </a:xfrm>
+          <a:prstGeom prst="rect">
+            <a:avLst/>
+          </a:prstGeom>
+          <a:noFill/>
+        </p:spPr>
+        <p:txBody>
+          <a:bodyPr wrap="square" anchor="ctr" lIns="0" rIns="0" tIns="0" bIns="0">
+            <a:spAutoFit/>
+          </a:bodyPr>
+          <a:lstStyle/>
+          <a:p>
+            <a:pPr algn="ctr">
+              <a:spcAft>
+                <a:spcPts val="900"/>
+              </a:spcAft>
+            </a:pPr>
+            <a:r>
+              <a:rPr sz="2000" b="1" i="0">
+                <a:solidFill>
+                  <a:srgbClr val="1C1B19"/>
+                </a:solidFill>
+                <a:latin typeface="Source Serif 4"/>
+              </a:rPr>
+              <a:t>Know a move</a:t>
+            </a:r>
+          </a:p>
+        </p:txBody>
+      </p:sp>
+      <p:cxnSp>
+        <p:nvCxnSpPr>
+          <p:cNvPr id="17" name="Connector 16"/>
+          <p:cNvCxnSpPr/>
+          <p:nvPr/>
+        </p:nvCxnSpPr>
+        <p:spPr>
+          <a:xfrm>
+            <a:off x="9233154" y="3246120"/>
+            <a:ext cx="176022" cy="0"/>
+          </a:xfrm>
+          <a:prstGeom prst="line">
+            <a:avLst/>
+          </a:prstGeom>
+          <a:ln w="31750">
+            <a:solidFill>
+              <a:srgbClr val="F47B20"/>
+            </a:solidFill>
+            <a:tailEnd type="triangle"/>
+          </a:ln>
+        </p:spPr>
+        <p:style>
+          <a:lnRef idx="2">
+            <a:schemeClr val="accent1"/>
+          </a:lnRef>
+          <a:fillRef idx="0">
+            <a:schemeClr val="accent1"/>
+          </a:fillRef>
+          <a:effectRef idx="1">
+            <a:schemeClr val="accent1"/>
+          </a:effectRef>
+          <a:fontRef idx="minor">
+            <a:schemeClr val="tx1"/>
+          </a:fontRef>
+        </p:style>
+      </p:cxnSp>
+      <p:sp>
+        <p:nvSpPr>
+          <p:cNvPr id="18" name="Rectangle 17"/>
+          <p:cNvSpPr/>
+          <p:nvPr/>
+        </p:nvSpPr>
+        <p:spPr>
+          <a:xfrm>
+            <a:off x="9464040" y="2743200"/>
+            <a:ext cx="1874519" cy="1005840"/>
+          </a:xfrm>
+          <a:prstGeom prst="rect">
+            <a:avLst/>
+          </a:prstGeom>
+          <a:solidFill>
+            <a:srgbClr val="FFFFFF"/>
+          </a:solidFill>
+          <a:ln w="15875">
+            <a:solidFill>
+              <a:srgbClr val="0B2D5B"/>
+            </a:solidFill>
+          </a:ln>
+          <a:effectLst/>
+        </p:spPr>
+        <p:style>
+          <a:lnRef idx="1">
+            <a:schemeClr val="accent1"/>
+          </a:lnRef>
+          <a:fillRef idx="3">
+            <a:schemeClr val="accent1"/>
+          </a:fillRef>
+          <a:effectRef idx="2">
+            <a:schemeClr val="accent1"/>
+          </a:effectRef>
+          <a:fontRef idx="minor">
+            <a:schemeClr val="lt1"/>
+          </a:fontRef>
+        </p:style>
+        <p:txBody>
+          <a:bodyPr rtlCol="0" anchor="ctr"/>
+          <a:lstStyle/>
+          <a:p>
+            <a:pPr algn="ctr"/>
+          </a:p>
+        </p:txBody>
+      </p:sp>
+      <p:sp>
+        <p:nvSpPr>
+          <p:cNvPr id="19" name="TextBox 18"/>
+          <p:cNvSpPr txBox="1"/>
+          <p:nvPr/>
+        </p:nvSpPr>
+        <p:spPr>
+          <a:xfrm>
+            <a:off x="9464040" y="2743200"/>
+            <a:ext cx="1874519" cy="1005840"/>
+          </a:xfrm>
+          <a:prstGeom prst="rect">
+            <a:avLst/>
+          </a:prstGeom>
+          <a:noFill/>
+        </p:spPr>
+        <p:txBody>
+          <a:bodyPr wrap="square" anchor="ctr" lIns="0" rIns="0" tIns="0" bIns="0">
+            <a:spAutoFit/>
+          </a:bodyPr>
+          <a:lstStyle/>
+          <a:p>
+            <a:pPr algn="ctr">
+              <a:spcAft>
+                <a:spcPts val="900"/>
+              </a:spcAft>
+            </a:pPr>
+            <a:r>
+              <a:rPr sz="2000" b="1" i="0">
+                <a:solidFill>
+                  <a:srgbClr val="1C1B19"/>
+                </a:solidFill>
+                <a:latin typeface="Source Serif 4"/>
+              </a:rPr>
+              <a:t>Act</a:t>
+            </a:r>
+          </a:p>
+        </p:txBody>
+      </p:sp>
+      <p:sp>
+        <p:nvSpPr>
+          <p:cNvPr id="20" name="TextBox 19"/>
+          <p:cNvSpPr txBox="1"/>
+          <p:nvPr/>
+        </p:nvSpPr>
+        <p:spPr>
+          <a:xfrm>
+            <a:off x="822960" y="4160520"/>
+            <a:ext cx="10515600" cy="457200"/>
           </a:xfrm>
           <a:prstGeom prst="rect">
             <a:avLst/>
@@ -5457,19 +7708,58 @@
           </a:bodyPr>
           <a:lstStyle/>
           <a:p>
-            <a:pPr algn="l">
+            <a:pPr algn="ctr">
               <a:spcAft>
                 <a:spcPts val="810"/>
               </a:spcAft>
             </a:pPr>
             <a:r>
-              <a:rPr sz="1800" b="0" i="0">
+              <a:rPr sz="1800" b="1" i="0">
+                <a:solidFill>
+                  <a:srgbClr val="F47B20"/>
+                </a:solidFill>
+                <a:latin typeface="Inter Tight"/>
+              </a:rPr>
+              <a:t>↺  and around again</a:t>
+            </a:r>
+          </a:p>
+        </p:txBody>
+      </p:sp>
+      <p:sp>
+        <p:nvSpPr>
+          <p:cNvPr id="21" name="TextBox 20"/>
+          <p:cNvSpPr txBox="1"/>
+          <p:nvPr/>
+        </p:nvSpPr>
+        <p:spPr>
+          <a:xfrm>
+            <a:off x="822960" y="4846320"/>
+            <a:ext cx="10515600" cy="1188720"/>
+          </a:xfrm>
+          <a:prstGeom prst="rect">
+            <a:avLst/>
+          </a:prstGeom>
+          <a:noFill/>
+        </p:spPr>
+        <p:txBody>
+          <a:bodyPr wrap="square" anchor="t" lIns="0" rIns="0" tIns="0" bIns="0">
+            <a:spAutoFit/>
+          </a:bodyPr>
+          <a:lstStyle/>
+          <a:p>
+            <a:pPr algn="ctr">
+              <a:spcAft>
+                <a:spcPts val="900"/>
+              </a:spcAft>
+            </a:pPr>
+            <a:r>
+              <a:rPr sz="2000" b="0" i="1">
                 <a:solidFill>
                   <a:srgbClr val="5D5A54"/>
                 </a:solidFill>
-                <a:latin typeface="Inter Tight"/>
-              </a:rPr>
-              <a:t>Write it on your card. It goes home with you.</a:t>
+                <a:latin typeface="Source Serif 4"/>
+              </a:rPr>
+              <a:t>Most people stall at gate 3 or gate 4.</a:t>
             </a:r>
           </a:p>
         </p:txBody>
@@ -5482,7 +7772,7 @@
 </p:sld>
 </file>
 
-<file path=ppt/slides/slide12.xml><?xml version="1.0" encoding="utf-8"?>
+<file path=ppt/slides/slide5.xml><?xml version="1.0" encoding="utf-8"?>
 <p:sld xmlns:a="http://schemas.openxmlformats.org/drawingml/2006/main" xmlns:p="http://schemas.openxmlformats.org/presentationml/2006/main" xmlns:r="http://schemas.openxmlformats.org/officeDocument/2006/relationships">
   <p:cSld>
     <p:bg>
@@ -5578,7 +7868,7 @@
                 </a:solidFill>
                 <a:latin typeface="Inter Tight"/>
               </a:rPr>
-              <a:t>BEFORE YOU GO</a:t>
+              <a:t>THE COMEBACK</a:t>
             </a:r>
           </a:p>
         </p:txBody>
@@ -5630,8 +7920,47 @@
         </p:nvSpPr>
         <p:spPr>
           <a:xfrm>
-            <a:off x="822960" y="1188720"/>
-            <a:ext cx="10515600" cy="914400"/>
+            <a:off x="822960" y="1463040"/>
+            <a:ext cx="10515600" cy="3291840"/>
+          </a:xfrm>
+          <a:prstGeom prst="rect">
+            <a:avLst/>
+          </a:prstGeom>
+          <a:noFill/>
+        </p:spPr>
+        <p:txBody>
+          <a:bodyPr wrap="square" anchor="ctr" lIns="0" rIns="0" tIns="0" bIns="0">
+            <a:spAutoFit/>
+          </a:bodyPr>
+          <a:lstStyle/>
+          <a:p>
+            <a:pPr algn="l">
+              <a:spcAft>
+                <a:spcPts val="2070"/>
+              </a:spcAft>
+            </a:pPr>
+            <a:r>
+              <a:rPr sz="4600" b="1" i="0">
+                <a:solidFill>
+                  <a:srgbClr val="1C1B19"/>
+                </a:solidFill>
+                <a:latin typeface="Source Serif 4"/>
+              </a:rPr>
+              <a:t>When peers stepped in, bullying usually stopped.</a:t>
+            </a:r>
+          </a:p>
+        </p:txBody>
+      </p:sp>
+      <p:sp>
+        <p:nvSpPr>
+          <p:cNvPr id="6" name="TextBox 5"/>
+          <p:cNvSpPr txBox="1"/>
+          <p:nvPr/>
+        </p:nvSpPr>
+        <p:spPr>
+          <a:xfrm>
+            <a:off x="822960" y="4846320"/>
+            <a:ext cx="10515600" cy="1097280"/>
           </a:xfrm>
           <a:prstGeom prst="rect">
             <a:avLst/>
@@ -5646,1834 +7975,17 @@
           <a:p>
             <a:pPr algn="l">
               <a:spcAft>
-                <a:spcPts val="1620"/>
-              </a:spcAft>
-            </a:pPr>
-            <a:r>
-              <a:rPr sz="3600" b="1" i="0">
-                <a:solidFill>
-                  <a:srgbClr val="1C1B19"/>
+                <a:spcPts val="990"/>
+              </a:spcAft>
+            </a:pPr>
+            <a:r>
+              <a:rPr sz="2200" b="0" i="1">
+                <a:solidFill>
+                  <a:srgbClr val="5D5A54"/>
                 </a:solidFill>
                 <a:latin typeface="Source Serif 4"/>
               </a:rPr>
-              <a:t>You don't need a speech. You need one move.</a:t>
-            </a:r>
-          </a:p>
-        </p:txBody>
-      </p:sp>
-      <p:sp>
-        <p:nvSpPr>
-          <p:cNvPr id="6" name="TextBox 5"/>
-          <p:cNvSpPr txBox="1"/>
-          <p:nvPr/>
-        </p:nvSpPr>
-        <p:spPr>
-          <a:xfrm>
-            <a:off x="822960" y="2286000"/>
-            <a:ext cx="10515600" cy="1463040"/>
-          </a:xfrm>
-          <a:prstGeom prst="rect">
-            <a:avLst/>
-          </a:prstGeom>
-          <a:noFill/>
-        </p:spPr>
-        <p:txBody>
-          <a:bodyPr wrap="square" anchor="t" lIns="0" rIns="0" tIns="0" bIns="0">
-            <a:spAutoFit/>
-          </a:bodyPr>
-          <a:lstStyle/>
-          <a:p>
-            <a:pPr algn="l">
-              <a:spcAft>
-                <a:spcPts val="1080"/>
-              </a:spcAft>
-            </a:pPr>
-            <a:r>
-              <a:rPr sz="2400" b="0" i="0">
-                <a:solidFill>
-                  <a:srgbClr val="1C1B19"/>
-                </a:solidFill>
-                <a:latin typeface="Source Serif 4"/>
-              </a:rPr>
-              <a:t>If someone is hurt, threatened, or private images are being shared, get an adult right away.</a:t>
-            </a:r>
-          </a:p>
-        </p:txBody>
-      </p:sp>
-      <p:sp>
-        <p:nvSpPr>
-          <p:cNvPr id="7" name="Rectangle 6"/>
-          <p:cNvSpPr/>
-          <p:nvPr/>
-        </p:nvSpPr>
-        <p:spPr>
-          <a:xfrm>
-            <a:off x="822960" y="4023360"/>
-            <a:ext cx="10515600" cy="1371600"/>
-          </a:xfrm>
-          <a:prstGeom prst="rect">
-            <a:avLst/>
-          </a:prstGeom>
-          <a:solidFill>
-            <a:srgbClr val="FFFFFF"/>
-          </a:solidFill>
-          <a:ln w="15875">
-            <a:solidFill>
-              <a:srgbClr val="1C1B19"/>
-            </a:solidFill>
-          </a:ln>
-          <a:effectLst/>
-        </p:spPr>
-        <p:style>
-          <a:lnRef idx="1">
-            <a:schemeClr val="accent1"/>
-          </a:lnRef>
-          <a:fillRef idx="3">
-            <a:schemeClr val="accent1"/>
-          </a:fillRef>
-          <a:effectRef idx="2">
-            <a:schemeClr val="accent1"/>
-          </a:effectRef>
-          <a:fontRef idx="minor">
-            <a:schemeClr val="lt1"/>
-          </a:fontRef>
-        </p:style>
-        <p:txBody>
-          <a:bodyPr rtlCol="0" anchor="ctr"/>
-          <a:lstStyle/>
-          <a:p>
-            <a:pPr algn="ctr"/>
-          </a:p>
-        </p:txBody>
-      </p:sp>
-      <p:sp>
-        <p:nvSpPr>
-          <p:cNvPr id="8" name="TextBox 7"/>
-          <p:cNvSpPr txBox="1"/>
-          <p:nvPr/>
-        </p:nvSpPr>
-        <p:spPr>
-          <a:xfrm>
-            <a:off x="1097280" y="4206240"/>
-            <a:ext cx="10058400" cy="365760"/>
-          </a:xfrm>
-          <a:prstGeom prst="rect">
-            <a:avLst/>
-          </a:prstGeom>
-          <a:noFill/>
-        </p:spPr>
-        <p:txBody>
-          <a:bodyPr wrap="square" anchor="t" lIns="0" rIns="0" tIns="0" bIns="0">
-            <a:spAutoFit/>
-          </a:bodyPr>
-          <a:lstStyle/>
-          <a:p>
-            <a:pPr algn="l">
-              <a:spcAft>
-                <a:spcPts val="540"/>
-              </a:spcAft>
-            </a:pPr>
-            <a:r>
-              <a:rPr sz="1200" b="1" i="0">
-                <a:solidFill>
-                  <a:srgbClr val="0B2D5B"/>
-                </a:solidFill>
-                <a:latin typeface="Inter Tight"/>
-              </a:rPr>
-              <a:t>STUDENT PAGE</a:t>
-            </a:r>
-          </a:p>
-        </p:txBody>
-      </p:sp>
-      <p:sp>
-        <p:nvSpPr>
-          <p:cNvPr id="9" name="TextBox 8"/>
-          <p:cNvSpPr txBox="1"/>
-          <p:nvPr/>
-        </p:nvSpPr>
-        <p:spPr>
-          <a:xfrm>
-            <a:off x="1097280" y="4617720"/>
-            <a:ext cx="10058400" cy="640080"/>
-          </a:xfrm>
-          <a:prstGeom prst="rect">
-            <a:avLst/>
-          </a:prstGeom>
-          <a:noFill/>
-        </p:spPr>
-        <p:txBody>
-          <a:bodyPr wrap="square" anchor="t" lIns="0" rIns="0" tIns="0" bIns="0">
-            <a:spAutoFit/>
-          </a:bodyPr>
-          <a:lstStyle/>
-          <a:p>
-            <a:pPr algn="l">
-              <a:spcAft>
-                <a:spcPts val="900"/>
-              </a:spcAft>
-            </a:pPr>
-            <a:r>
-              <a:rPr sz="2000" b="0" i="0">
-                <a:solidFill>
-                  <a:srgbClr val="1C1B19"/>
-                </a:solidFill>
-                <a:latin typeface="Inter Tight"/>
-              </a:rPr>
-              <a:t>https://rmwtoolkit.github.io/bcds-toolkit/speaking-up-high-school.html</a:t>
-            </a:r>
-          </a:p>
-        </p:txBody>
-      </p:sp>
-    </p:spTree>
-  </p:cSld>
-  <p:clrMapOvr>
-    <a:masterClrMapping/>
-  </p:clrMapOvr>
-</p:sld>
-</file>
-
-<file path=ppt/slides/slide2.xml><?xml version="1.0" encoding="utf-8"?>
-<p:sld xmlns:a="http://schemas.openxmlformats.org/drawingml/2006/main" xmlns:p="http://schemas.openxmlformats.org/presentationml/2006/main" xmlns:r="http://schemas.openxmlformats.org/officeDocument/2006/relationships" show="0">
-  <p:cSld>
-    <p:bg>
-      <p:bgPr>
-        <a:solidFill>
-          <a:srgbClr val="EEEBE4"/>
-        </a:solidFill>
-        <a:effectLst/>
-      </p:bgPr>
-    </p:bg>
-    <p:spTree>
-      <p:nvGrpSpPr>
-        <p:cNvPr id="1" name=""/>
-        <p:cNvGrpSpPr/>
-        <p:nvPr/>
-      </p:nvGrpSpPr>
-      <p:grpSpPr/>
-      <p:sp>
-        <p:nvSpPr>
-          <p:cNvPr id="2" name="Rectangle 1"/>
-          <p:cNvSpPr/>
-          <p:nvPr/>
-        </p:nvSpPr>
-        <p:spPr>
-          <a:xfrm>
-            <a:off x="0" y="0"/>
-            <a:ext cx="12191695" cy="384048"/>
-          </a:xfrm>
-          <a:prstGeom prst="rect">
-            <a:avLst/>
-          </a:prstGeom>
-          <a:solidFill>
-            <a:srgbClr val="0B2D5B"/>
-          </a:solidFill>
-          <a:ln>
-            <a:noFill/>
-          </a:ln>
-          <a:effectLst/>
-        </p:spPr>
-        <p:style>
-          <a:lnRef idx="1">
-            <a:schemeClr val="accent1"/>
-          </a:lnRef>
-          <a:fillRef idx="3">
-            <a:schemeClr val="accent1"/>
-          </a:fillRef>
-          <a:effectRef idx="2">
-            <a:schemeClr val="accent1"/>
-          </a:effectRef>
-          <a:fontRef idx="minor">
-            <a:schemeClr val="lt1"/>
-          </a:fontRef>
-        </p:style>
-        <p:txBody>
-          <a:bodyPr rtlCol="0" anchor="ctr"/>
-          <a:lstStyle/>
-          <a:p>
-            <a:pPr algn="ctr"/>
-          </a:p>
-        </p:txBody>
-      </p:sp>
-      <p:sp>
-        <p:nvSpPr>
-          <p:cNvPr id="3" name="TextBox 2"/>
-          <p:cNvSpPr txBox="1"/>
-          <p:nvPr/>
-        </p:nvSpPr>
-        <p:spPr>
-          <a:xfrm>
-            <a:off x="548640" y="100584"/>
-            <a:ext cx="10972800" cy="274320"/>
-          </a:xfrm>
-          <a:prstGeom prst="rect">
-            <a:avLst/>
-          </a:prstGeom>
-          <a:noFill/>
-        </p:spPr>
-        <p:txBody>
-          <a:bodyPr wrap="square" anchor="t" lIns="0" rIns="0" tIns="0" bIns="0">
-            <a:spAutoFit/>
-          </a:bodyPr>
-          <a:lstStyle/>
-          <a:p>
-            <a:pPr algn="l">
-              <a:spcAft>
-                <a:spcPts val="495"/>
-              </a:spcAft>
-            </a:pPr>
-            <a:r>
-              <a:rPr sz="1100" b="1" i="0">
-                <a:solidFill>
-                  <a:srgbClr val="FFFFFF"/>
-                </a:solidFill>
-                <a:latin typeface="Inter Tight"/>
-              </a:rPr>
-              <a:t>TEACHER PAGE  ·  skipped when you present  ·  Before you teach</a:t>
-            </a:r>
-          </a:p>
-        </p:txBody>
-      </p:sp>
-      <p:sp>
-        <p:nvSpPr>
-          <p:cNvPr id="4" name="TextBox 3"/>
-          <p:cNvSpPr txBox="1"/>
-          <p:nvPr/>
-        </p:nvSpPr>
-        <p:spPr>
-          <a:xfrm>
-            <a:off x="548640" y="685800"/>
-            <a:ext cx="10972800" cy="640080"/>
-          </a:xfrm>
-          <a:prstGeom prst="rect">
-            <a:avLst/>
-          </a:prstGeom>
-          <a:noFill/>
-        </p:spPr>
-        <p:txBody>
-          <a:bodyPr wrap="square" anchor="t" lIns="0" rIns="0" tIns="0" bIns="0">
-            <a:spAutoFit/>
-          </a:bodyPr>
-          <a:lstStyle/>
-          <a:p>
-            <a:pPr algn="l">
-              <a:spcAft>
-                <a:spcPts val="1350"/>
-              </a:spcAft>
-            </a:pPr>
-            <a:r>
-              <a:rPr sz="3000" b="1" i="0">
-                <a:solidFill>
-                  <a:srgbClr val="1C1B19"/>
-                </a:solidFill>
-                <a:latin typeface="Source Serif 4"/>
-              </a:rPr>
-              <a:t>Before you teach</a:t>
-            </a:r>
-          </a:p>
-        </p:txBody>
-      </p:sp>
-      <p:sp>
-        <p:nvSpPr>
-          <p:cNvPr id="5" name="TextBox 4"/>
-          <p:cNvSpPr txBox="1"/>
-          <p:nvPr/>
-        </p:nvSpPr>
-        <p:spPr>
-          <a:xfrm>
-            <a:off x="548640" y="1463040"/>
-            <a:ext cx="5394960" cy="4937760"/>
-          </a:xfrm>
-          <a:prstGeom prst="rect">
-            <a:avLst/>
-          </a:prstGeom>
-          <a:noFill/>
-        </p:spPr>
-        <p:txBody>
-          <a:bodyPr wrap="square" anchor="t" lIns="0" rIns="0" tIns="0" bIns="0">
-            <a:spAutoFit/>
-          </a:bodyPr>
-          <a:lstStyle/>
-          <a:p>
-            <a:pPr algn="l">
-              <a:spcAft>
-                <a:spcPts val="585"/>
-              </a:spcAft>
-            </a:pPr>
-            <a:r>
-              <a:rPr sz="1500" b="1" i="0">
-                <a:solidFill>
-                  <a:srgbClr val="1C1B19"/>
-                </a:solidFill>
-                <a:latin typeface="Source Serif 4"/>
-              </a:rPr>
-              <a:t>No real incidents, no real names.</a:t>
-            </a:r>
-          </a:p>
-          <a:p>
-            <a:pPr algn="l">
-              <a:spcAft>
-                <a:spcPts val="585"/>
-              </a:spcAft>
-            </a:pPr>
-            <a:r>
-              <a:rPr sz="1300" b="0" i="0">
-                <a:solidFill>
-                  <a:srgbClr val="1C1B19"/>
-                </a:solidFill>
-                <a:latin typeface="Source Serif 4"/>
-              </a:rPr>
-              <a:t>Use only the moments on the slides. Don't ask students to describe something they saw or did. Someone in your circle may be the target of something right now, and someone may have been part of it.</a:t>
-            </a:r>
-          </a:p>
-          <a:p>
-            <a:pPr algn="l">
-              <a:spcAft>
-                <a:spcPts val="585"/>
-              </a:spcAft>
-            </a:pPr>
-            <a:r>
-              <a:rPr sz="1300" b="0" i="0">
-                <a:solidFill>
-                  <a:srgbClr val="1C1B19"/>
-                </a:solidFill>
-                <a:latin typeface="Source Serif 4"/>
-              </a:rPr>
-              <a:t/>
-            </a:r>
-          </a:p>
-          <a:p>
-            <a:pPr algn="l">
-              <a:spcAft>
-                <a:spcPts val="585"/>
-              </a:spcAft>
-            </a:pPr>
-            <a:r>
-              <a:rPr sz="1500" b="1" i="0">
-                <a:solidFill>
-                  <a:srgbClr val="1C1B19"/>
-                </a:solidFill>
-                <a:latin typeface="Source Serif 4"/>
-              </a:rPr>
-              <a:t>If a real situation comes up, take it out of the circle.</a:t>
-            </a:r>
-          </a:p>
-          <a:p>
-            <a:pPr algn="l">
-              <a:spcAft>
-                <a:spcPts val="585"/>
-              </a:spcAft>
-            </a:pPr>
-            <a:r>
-              <a:rPr sz="1300" b="0" i="0">
-                <a:solidFill>
-                  <a:srgbClr val="1C1B19"/>
-                </a:solidFill>
-                <a:latin typeface="Source Serif 4"/>
-              </a:rPr>
-              <a:t>If a student names something ongoing, thank them, say you want to help with it privately, and move on. Follow up that day with a counselor or dean.</a:t>
-            </a:r>
-          </a:p>
-          <a:p>
-            <a:pPr algn="l">
-              <a:spcAft>
-                <a:spcPts val="585"/>
-              </a:spcAft>
-            </a:pPr>
-            <a:r>
-              <a:rPr sz="1300" b="0" i="0">
-                <a:solidFill>
-                  <a:srgbClr val="1C1B19"/>
-                </a:solidFill>
-                <a:latin typeface="Source Serif 4"/>
-              </a:rPr>
-              <a:t/>
-            </a:r>
-          </a:p>
-          <a:p>
-            <a:pPr algn="l">
-              <a:spcAft>
-                <a:spcPts val="585"/>
-              </a:spcAft>
-            </a:pPr>
-            <a:r>
-              <a:rPr sz="1500" b="1" i="0">
-                <a:solidFill>
-                  <a:srgbClr val="1C1B19"/>
-                </a:solidFill>
-                <a:latin typeface="Source Serif 4"/>
-              </a:rPr>
-              <a:t>Know what needs an adult right away.</a:t>
-            </a:r>
-          </a:p>
-          <a:p>
-            <a:pPr algn="l">
-              <a:spcAft>
-                <a:spcPts val="585"/>
-              </a:spcAft>
-            </a:pPr>
-            <a:r>
-              <a:rPr sz="1300" b="0" i="0">
-                <a:solidFill>
-                  <a:srgbClr val="1C1B19"/>
-                </a:solidFill>
-                <a:latin typeface="Source Serif 4"/>
-              </a:rPr>
-              <a:t>Someone being physically hurt or threatened, private or sexual images being shared (real or AI-made), or someone saying they want to hurt themselves or others. Don't ask about these in advisory. Any disclosure goes to a counselor the same day.</a:t>
-            </a:r>
-          </a:p>
-          <a:p>
-            <a:pPr algn="l">
-              <a:spcAft>
-                <a:spcPts val="585"/>
-              </a:spcAft>
-            </a:pPr>
-            <a:r>
-              <a:rPr sz="1300" b="0" i="0">
-                <a:solidFill>
-                  <a:srgbClr val="1C1B19"/>
-                </a:solidFill>
-                <a:latin typeface="Source Serif 4"/>
-              </a:rPr>
-              <a:t/>
-            </a:r>
-          </a:p>
-        </p:txBody>
-      </p:sp>
-      <p:sp>
-        <p:nvSpPr>
-          <p:cNvPr id="6" name="TextBox 5"/>
-          <p:cNvSpPr txBox="1"/>
-          <p:nvPr/>
-        </p:nvSpPr>
-        <p:spPr>
-          <a:xfrm>
-            <a:off x="6217920" y="1463040"/>
-            <a:ext cx="5394960" cy="4937760"/>
-          </a:xfrm>
-          <a:prstGeom prst="rect">
-            <a:avLst/>
-          </a:prstGeom>
-          <a:noFill/>
-        </p:spPr>
-        <p:txBody>
-          <a:bodyPr wrap="square" anchor="t" lIns="0" rIns="0" tIns="0" bIns="0">
-            <a:spAutoFit/>
-          </a:bodyPr>
-          <a:lstStyle/>
-          <a:p>
-            <a:pPr algn="l">
-              <a:spcAft>
-                <a:spcPts val="585"/>
-              </a:spcAft>
-            </a:pPr>
-            <a:r>
-              <a:rPr sz="1500" b="1" i="0">
-                <a:solidFill>
-                  <a:srgbClr val="1C1B19"/>
-                </a:solidFill>
-                <a:latin typeface="Source Serif 4"/>
-              </a:rPr>
-              <a:t>Telling an adult will feel like snitching to some students.</a:t>
-            </a:r>
-          </a:p>
-          <a:p>
-            <a:pPr algn="l">
-              <a:spcAft>
-                <a:spcPts val="585"/>
-              </a:spcAft>
-            </a:pPr>
-            <a:r>
-              <a:rPr sz="1300" b="0" i="0">
-                <a:solidFill>
-                  <a:srgbClr val="1C1B19"/>
-                </a:solidFill>
-                <a:latin typeface="Source Serif 4"/>
-              </a:rPr>
-              <a:t>Name that worry out loud. Delegating means bringing in someone with more power, and it counts as stepping in. Say plainly what happens at Beaver when a student reports something, so it feels less like a leap.</a:t>
-            </a:r>
-          </a:p>
-          <a:p>
-            <a:pPr algn="l">
-              <a:spcAft>
-                <a:spcPts val="585"/>
-              </a:spcAft>
-            </a:pPr>
-            <a:r>
-              <a:rPr sz="1300" b="0" i="0">
-                <a:solidFill>
-                  <a:srgbClr val="1C1B19"/>
-                </a:solidFill>
-                <a:latin typeface="Source Serif 4"/>
-              </a:rPr>
-              <a:t/>
-            </a:r>
-          </a:p>
-          <a:p>
-            <a:pPr algn="l">
-              <a:spcAft>
-                <a:spcPts val="585"/>
-              </a:spcAft>
-            </a:pPr>
-            <a:r>
-              <a:rPr sz="1500" b="1" i="0">
-                <a:solidFill>
-                  <a:srgbClr val="1C1B19"/>
-                </a:solidFill>
-                <a:latin typeface="Source Serif 4"/>
-              </a:rPr>
-              <a:t>Leave room for past silence.</a:t>
-            </a:r>
-          </a:p>
-          <a:p>
-            <a:pPr algn="l">
-              <a:spcAft>
-                <a:spcPts val="585"/>
-              </a:spcAft>
-            </a:pPr>
-            <a:r>
-              <a:rPr sz="1300" b="0" i="0">
-                <a:solidFill>
-                  <a:srgbClr val="1C1B19"/>
-                </a:solidFill>
-                <a:latin typeface="Source Serif 4"/>
-              </a:rPr>
-              <a:t>Most students have frozen at least once, and some have laughed along. Keep shame out of it. A late check-in still counts, and what matters is the next time.</a:t>
-            </a:r>
-          </a:p>
-          <a:p>
-            <a:pPr algn="l">
-              <a:spcAft>
-                <a:spcPts val="585"/>
-              </a:spcAft>
-            </a:pPr>
-            <a:r>
-              <a:rPr sz="1300" b="0" i="0">
-                <a:solidFill>
-                  <a:srgbClr val="1C1B19"/>
-                </a:solidFill>
-                <a:latin typeface="Source Serif 4"/>
-              </a:rPr>
-              <a:t/>
-            </a:r>
-          </a:p>
-          <a:p>
-            <a:pPr algn="l">
-              <a:spcAft>
-                <a:spcPts val="585"/>
-              </a:spcAft>
-            </a:pPr>
-            <a:r>
-              <a:rPr sz="1500" b="1" i="0">
-                <a:solidFill>
-                  <a:srgbClr val="1C1B19"/>
-                </a:solidFill>
-                <a:latin typeface="Source Serif 4"/>
-              </a:rPr>
-              <a:t>Don't rank the moves.</a:t>
-            </a:r>
-          </a:p>
-          <a:p>
-            <a:pPr algn="l">
-              <a:spcAft>
-                <a:spcPts val="585"/>
-              </a:spcAft>
-            </a:pPr>
-            <a:r>
-              <a:rPr sz="1300" b="0" i="0">
-                <a:solidFill>
-                  <a:srgbClr val="1C1B19"/>
-                </a:solidFill>
-                <a:latin typeface="Source Serif 4"/>
-              </a:rPr>
-              <a:t>Direct can look like the brave one. It isn't always safe, and getting physical is never the move. Every one of the four counts, and so does including someone who keeps ending up on the edge.</a:t>
-            </a:r>
-          </a:p>
-          <a:p>
-            <a:pPr algn="l">
-              <a:spcAft>
-                <a:spcPts val="585"/>
-              </a:spcAft>
-            </a:pPr>
-            <a:r>
-              <a:rPr sz="1300" b="0" i="0">
-                <a:solidFill>
-                  <a:srgbClr val="1C1B19"/>
-                </a:solidFill>
-                <a:latin typeface="Source Serif 4"/>
-              </a:rPr>
-              <a:t/>
-            </a:r>
-          </a:p>
-        </p:txBody>
-      </p:sp>
-    </p:spTree>
-  </p:cSld>
-  <p:clrMapOvr>
-    <a:masterClrMapping/>
-  </p:clrMapOvr>
-</p:sld>
-</file>
-
-<file path=ppt/slides/slide3.xml><?xml version="1.0" encoding="utf-8"?>
-<p:sld xmlns:a="http://schemas.openxmlformats.org/drawingml/2006/main" xmlns:p="http://schemas.openxmlformats.org/presentationml/2006/main" xmlns:r="http://schemas.openxmlformats.org/officeDocument/2006/relationships" show="0">
-  <p:cSld>
-    <p:bg>
-      <p:bgPr>
-        <a:solidFill>
-          <a:srgbClr val="EEEBE4"/>
-        </a:solidFill>
-        <a:effectLst/>
-      </p:bgPr>
-    </p:bg>
-    <p:spTree>
-      <p:nvGrpSpPr>
-        <p:cNvPr id="1" name=""/>
-        <p:cNvGrpSpPr/>
-        <p:nvPr/>
-      </p:nvGrpSpPr>
-      <p:grpSpPr/>
-      <p:sp>
-        <p:nvSpPr>
-          <p:cNvPr id="2" name="Rectangle 1"/>
-          <p:cNvSpPr/>
-          <p:nvPr/>
-        </p:nvSpPr>
-        <p:spPr>
-          <a:xfrm>
-            <a:off x="0" y="0"/>
-            <a:ext cx="12191695" cy="384048"/>
-          </a:xfrm>
-          <a:prstGeom prst="rect">
-            <a:avLst/>
-          </a:prstGeom>
-          <a:solidFill>
-            <a:srgbClr val="0B2D5B"/>
-          </a:solidFill>
-          <a:ln>
-            <a:noFill/>
-          </a:ln>
-          <a:effectLst/>
-        </p:spPr>
-        <p:style>
-          <a:lnRef idx="1">
-            <a:schemeClr val="accent1"/>
-          </a:lnRef>
-          <a:fillRef idx="3">
-            <a:schemeClr val="accent1"/>
-          </a:fillRef>
-          <a:effectRef idx="2">
-            <a:schemeClr val="accent1"/>
-          </a:effectRef>
-          <a:fontRef idx="minor">
-            <a:schemeClr val="lt1"/>
-          </a:fontRef>
-        </p:style>
-        <p:txBody>
-          <a:bodyPr rtlCol="0" anchor="ctr"/>
-          <a:lstStyle/>
-          <a:p>
-            <a:pPr algn="ctr"/>
-          </a:p>
-        </p:txBody>
-      </p:sp>
-      <p:sp>
-        <p:nvSpPr>
-          <p:cNvPr id="3" name="TextBox 2"/>
-          <p:cNvSpPr txBox="1"/>
-          <p:nvPr/>
-        </p:nvSpPr>
-        <p:spPr>
-          <a:xfrm>
-            <a:off x="548640" y="100584"/>
-            <a:ext cx="10972800" cy="274320"/>
-          </a:xfrm>
-          <a:prstGeom prst="rect">
-            <a:avLst/>
-          </a:prstGeom>
-          <a:noFill/>
-        </p:spPr>
-        <p:txBody>
-          <a:bodyPr wrap="square" anchor="t" lIns="0" rIns="0" tIns="0" bIns="0">
-            <a:spAutoFit/>
-          </a:bodyPr>
-          <a:lstStyle/>
-          <a:p>
-            <a:pPr algn="l">
-              <a:spcAft>
-                <a:spcPts val="495"/>
-              </a:spcAft>
-            </a:pPr>
-            <a:r>
-              <a:rPr sz="1100" b="1" i="0">
-                <a:solidFill>
-                  <a:srgbClr val="FFFFFF"/>
-                </a:solidFill>
-                <a:latin typeface="Inter Tight"/>
-              </a:rPr>
-              <a:t>TEACHER PAGE  ·  skipped when you present  ·  Every student in the room</a:t>
-            </a:r>
-          </a:p>
-        </p:txBody>
-      </p:sp>
-      <p:sp>
-        <p:nvSpPr>
-          <p:cNvPr id="4" name="TextBox 3"/>
-          <p:cNvSpPr txBox="1"/>
-          <p:nvPr/>
-        </p:nvSpPr>
-        <p:spPr>
-          <a:xfrm>
-            <a:off x="548640" y="685800"/>
-            <a:ext cx="10972800" cy="640080"/>
-          </a:xfrm>
-          <a:prstGeom prst="rect">
-            <a:avLst/>
-          </a:prstGeom>
-          <a:noFill/>
-        </p:spPr>
-        <p:txBody>
-          <a:bodyPr wrap="square" anchor="t" lIns="0" rIns="0" tIns="0" bIns="0">
-            <a:spAutoFit/>
-          </a:bodyPr>
-          <a:lstStyle/>
-          <a:p>
-            <a:pPr algn="l">
-              <a:spcAft>
-                <a:spcPts val="1350"/>
-              </a:spcAft>
-            </a:pPr>
-            <a:r>
-              <a:rPr sz="3000" b="1" i="0">
-                <a:solidFill>
-                  <a:srgbClr val="1C1B19"/>
-                </a:solidFill>
-                <a:latin typeface="Source Serif 4"/>
-              </a:rPr>
-              <a:t>Every student in the room</a:t>
-            </a:r>
-          </a:p>
-        </p:txBody>
-      </p:sp>
-      <p:sp>
-        <p:nvSpPr>
-          <p:cNvPr id="5" name="TextBox 4"/>
-          <p:cNvSpPr txBox="1"/>
-          <p:nvPr/>
-        </p:nvSpPr>
-        <p:spPr>
-          <a:xfrm>
-            <a:off x="548640" y="1325880"/>
-            <a:ext cx="10972800" cy="365760"/>
-          </a:xfrm>
-          <a:prstGeom prst="rect">
-            <a:avLst/>
-          </a:prstGeom>
-          <a:noFill/>
-        </p:spPr>
-        <p:txBody>
-          <a:bodyPr wrap="square" anchor="t" lIns="0" rIns="0" tIns="0" bIns="0">
-            <a:spAutoFit/>
-          </a:bodyPr>
-          <a:lstStyle/>
-          <a:p>
-            <a:pPr algn="l">
-              <a:spcAft>
-                <a:spcPts val="630"/>
-              </a:spcAft>
-            </a:pPr>
-            <a:r>
-              <a:rPr sz="1400" b="0" i="0">
-                <a:solidFill>
-                  <a:srgbClr val="5D5A54"/>
-                </a:solidFill>
-                <a:latin typeface="Inter Tight"/>
-              </a:rPr>
-              <a:t>Culture, family, identity, ability and money: what to keep in mind for this topic.</a:t>
-            </a:r>
-          </a:p>
-        </p:txBody>
-      </p:sp>
-      <p:sp>
-        <p:nvSpPr>
-          <p:cNvPr id="6" name="TextBox 5"/>
-          <p:cNvSpPr txBox="1"/>
-          <p:nvPr/>
-        </p:nvSpPr>
-        <p:spPr>
-          <a:xfrm>
-            <a:off x="548640" y="1828800"/>
-            <a:ext cx="5394960" cy="4572000"/>
-          </a:xfrm>
-          <a:prstGeom prst="rect">
-            <a:avLst/>
-          </a:prstGeom>
-          <a:noFill/>
-        </p:spPr>
-        <p:txBody>
-          <a:bodyPr wrap="square" anchor="t" lIns="0" rIns="0" tIns="0" bIns="0">
-            <a:spAutoFit/>
-          </a:bodyPr>
-          <a:lstStyle/>
-          <a:p>
-            <a:pPr algn="l">
-              <a:spcAft>
-                <a:spcPts val="585"/>
-              </a:spcAft>
-            </a:pPr>
-            <a:r>
-              <a:rPr sz="1500" b="1" i="0">
-                <a:solidFill>
-                  <a:srgbClr val="1C1B19"/>
-                </a:solidFill>
-                <a:latin typeface="Source Serif 4"/>
-              </a:rPr>
-              <a:t>Speaking up costs some students more.</a:t>
-            </a:r>
-          </a:p>
-          <a:p>
-            <a:pPr algn="l">
-              <a:spcAft>
-                <a:spcPts val="585"/>
-              </a:spcAft>
-            </a:pPr>
-            <a:r>
-              <a:rPr sz="1300" b="0" i="0">
-                <a:solidFill>
-                  <a:srgbClr val="1C1B19"/>
-                </a:solidFill>
-                <a:latin typeface="Source Serif 4"/>
-              </a:rPr>
-              <a:t>A comment that costs one student nothing might cost another more, because of race, gender, size, being new, or how people already treat them. Say this out loud, and let students choose the move that is safe for them.</a:t>
-            </a:r>
-          </a:p>
-          <a:p>
-            <a:pPr algn="l">
-              <a:spcAft>
-                <a:spcPts val="585"/>
-              </a:spcAft>
-            </a:pPr>
-            <a:r>
-              <a:rPr sz="1300" b="0" i="0">
-                <a:solidFill>
-                  <a:srgbClr val="1C1B19"/>
-                </a:solidFill>
-                <a:latin typeface="Source Serif 4"/>
-              </a:rPr>
-              <a:t/>
-            </a:r>
-          </a:p>
-          <a:p>
-            <a:pPr algn="l">
-              <a:spcAft>
-                <a:spcPts val="585"/>
-              </a:spcAft>
-            </a:pPr>
-            <a:r>
-              <a:rPr sz="1500" b="1" i="0">
-                <a:solidFill>
-                  <a:srgbClr val="1C1B19"/>
-                </a:solidFill>
-                <a:latin typeface="Source Serif 4"/>
-              </a:rPr>
-              <a:t>The accent scenario may be close to home.</a:t>
-            </a:r>
-          </a:p>
-          <a:p>
-            <a:pPr algn="l">
-              <a:spcAft>
-                <a:spcPts val="585"/>
-              </a:spcAft>
-            </a:pPr>
-            <a:r>
-              <a:rPr sz="1300" b="0" i="0">
-                <a:solidFill>
-                  <a:srgbClr val="1C1B19"/>
-                </a:solidFill>
-                <a:latin typeface="Source Serif 4"/>
-              </a:rPr>
-              <a:t>Some students in your circle speak another language at home or have been mocked for an accent. Keep the focus on what a bystander can do. Never ask a student to explain what it feels like or to speak for a group.</a:t>
-            </a:r>
-          </a:p>
-          <a:p>
-            <a:pPr algn="l">
-              <a:spcAft>
-                <a:spcPts val="585"/>
-              </a:spcAft>
-            </a:pPr>
-            <a:r>
-              <a:rPr sz="1300" b="0" i="0">
-                <a:solidFill>
-                  <a:srgbClr val="1C1B19"/>
-                </a:solidFill>
-                <a:latin typeface="Source Serif 4"/>
-              </a:rPr>
-              <a:t/>
-            </a:r>
-          </a:p>
-          <a:p>
-            <a:pPr algn="l">
-              <a:spcAft>
-                <a:spcPts val="585"/>
-              </a:spcAft>
-            </a:pPr>
-            <a:r>
-              <a:rPr sz="1500" b="1" i="0">
-                <a:solidFill>
-                  <a:srgbClr val="1C1B19"/>
-                </a:solidFill>
-                <a:latin typeface="Source Serif 4"/>
-              </a:rPr>
-              <a:t>Gender scripts show up in the locker room and the party.</a:t>
-            </a:r>
-          </a:p>
-          <a:p>
-            <a:pPr algn="l">
-              <a:spcAft>
-                <a:spcPts val="585"/>
-              </a:spcAft>
-            </a:pPr>
-            <a:r>
-              <a:rPr sz="1300" b="0" i="0">
-                <a:solidFill>
-                  <a:srgbClr val="1C1B19"/>
-                </a:solidFill>
-                <a:latin typeface="Source Serif 4"/>
-              </a:rPr>
-              <a:t>Boys can check on a teammate and say "not funny" without it being soft. In the party scenario, keep the talk on the person who looks uncomfortable and on what friends can do together.</a:t>
-            </a:r>
-          </a:p>
-          <a:p>
-            <a:pPr algn="l">
-              <a:spcAft>
-                <a:spcPts val="585"/>
-              </a:spcAft>
-            </a:pPr>
-            <a:r>
-              <a:rPr sz="1300" b="0" i="0">
-                <a:solidFill>
-                  <a:srgbClr val="1C1B19"/>
-                </a:solidFill>
-                <a:latin typeface="Source Serif 4"/>
-              </a:rPr>
-              <a:t/>
-            </a:r>
-          </a:p>
-        </p:txBody>
-      </p:sp>
-      <p:sp>
-        <p:nvSpPr>
-          <p:cNvPr id="7" name="TextBox 6"/>
-          <p:cNvSpPr txBox="1"/>
-          <p:nvPr/>
-        </p:nvSpPr>
-        <p:spPr>
-          <a:xfrm>
-            <a:off x="6217920" y="1828800"/>
-            <a:ext cx="5394960" cy="4572000"/>
-          </a:xfrm>
-          <a:prstGeom prst="rect">
-            <a:avLst/>
-          </a:prstGeom>
-          <a:noFill/>
-        </p:spPr>
-        <p:txBody>
-          <a:bodyPr wrap="square" anchor="t" lIns="0" rIns="0" tIns="0" bIns="0">
-            <a:spAutoFit/>
-          </a:bodyPr>
-          <a:lstStyle/>
-          <a:p>
-            <a:pPr algn="l">
-              <a:spcAft>
-                <a:spcPts val="585"/>
-              </a:spcAft>
-            </a:pPr>
-            <a:r>
-              <a:rPr sz="1500" b="1" i="0">
-                <a:solidFill>
-                  <a:srgbClr val="1C1B19"/>
-                </a:solidFill>
-                <a:latin typeface="Source Serif 4"/>
-              </a:rPr>
-              <a:t>Targeting about identity is a same-day conversation.</a:t>
-            </a:r>
-          </a:p>
-          <a:p>
-            <a:pPr algn="l">
-              <a:spcAft>
-                <a:spcPts val="585"/>
-              </a:spcAft>
-            </a:pPr>
-            <a:r>
-              <a:rPr sz="1300" b="0" i="0">
-                <a:solidFill>
-                  <a:srgbClr val="1C1B19"/>
-                </a:solidFill>
-                <a:latin typeface="Source Serif 4"/>
-              </a:rPr>
-              <a:t>If a student is being harassed about their sexuality, gender identity, race, or religion, or someone is outing them, that goes to a counselor that day. The Trevor Project (call 1-866-488-7386 or text START to 678-678) is there for LGBTQ+ young people any time.</a:t>
-            </a:r>
-          </a:p>
-          <a:p>
-            <a:pPr algn="l">
-              <a:spcAft>
-                <a:spcPts val="585"/>
-              </a:spcAft>
-            </a:pPr>
-            <a:r>
-              <a:rPr sz="1300" b="0" i="0">
-                <a:solidFill>
-                  <a:srgbClr val="1C1B19"/>
-                </a:solidFill>
-                <a:latin typeface="Source Serif 4"/>
-              </a:rPr>
-              <a:t/>
-            </a:r>
-          </a:p>
-          <a:p>
-            <a:pPr algn="l">
-              <a:spcAft>
-                <a:spcPts val="585"/>
-              </a:spcAft>
-            </a:pPr>
-            <a:r>
-              <a:rPr sz="1500" b="1" i="0">
-                <a:solidFill>
-                  <a:srgbClr val="1C1B19"/>
-                </a:solidFill>
-                <a:latin typeface="Source Serif 4"/>
-              </a:rPr>
-              <a:t>Speaking up isn't the only way to be brave.</a:t>
-            </a:r>
-          </a:p>
-          <a:p>
-            <a:pPr algn="l">
-              <a:spcAft>
-                <a:spcPts val="585"/>
-              </a:spcAft>
-            </a:pPr>
-            <a:r>
-              <a:rPr sz="1300" b="0" i="0">
-                <a:solidFill>
-                  <a:srgbClr val="1C1B19"/>
-                </a:solidFill>
-                <a:latin typeface="Source Serif 4"/>
-              </a:rPr>
-              <a:t>Students with social anxiety, a stutter, or who process slowly in the moment may freeze longer or find Direct hard. Delay, Delegate and Distract count just as much. Don't treat speaking out loud as the measure of a good person.</a:t>
-            </a:r>
-          </a:p>
-          <a:p>
-            <a:pPr algn="l">
-              <a:spcAft>
-                <a:spcPts val="585"/>
-              </a:spcAft>
-            </a:pPr>
-            <a:r>
-              <a:rPr sz="1300" b="0" i="0">
-                <a:solidFill>
-                  <a:srgbClr val="1C1B19"/>
-                </a:solidFill>
-                <a:latin typeface="Source Serif 4"/>
-              </a:rPr>
-              <a:t/>
-            </a:r>
-          </a:p>
-          <a:p>
-            <a:pPr algn="l">
-              <a:spcAft>
-                <a:spcPts val="585"/>
-              </a:spcAft>
-            </a:pPr>
-            <a:r>
-              <a:rPr sz="1500" b="1" i="0">
-                <a:solidFill>
-                  <a:srgbClr val="1C1B19"/>
-                </a:solidFill>
-                <a:latin typeface="Source Serif 4"/>
-              </a:rPr>
-              <a:t>Keep bodies out of the locker room discussion.</a:t>
-            </a:r>
-          </a:p>
-          <a:p>
-            <a:pPr algn="l">
-              <a:spcAft>
-                <a:spcPts val="585"/>
-              </a:spcAft>
-            </a:pPr>
-            <a:r>
-              <a:rPr sz="1300" b="0" i="0">
-                <a:solidFill>
-                  <a:srgbClr val="1C1B19"/>
-                </a:solidFill>
-                <a:latin typeface="Source Serif 4"/>
-              </a:rPr>
-              <a:t>The first scenario is about a comment on someone's body. Talk about the move, not the body or the comment. Students of every size are in the circle.</a:t>
-            </a:r>
-          </a:p>
-          <a:p>
-            <a:pPr algn="l">
-              <a:spcAft>
-                <a:spcPts val="585"/>
-              </a:spcAft>
-            </a:pPr>
-            <a:r>
-              <a:rPr sz="1300" b="0" i="0">
-                <a:solidFill>
-                  <a:srgbClr val="1C1B19"/>
-                </a:solidFill>
-                <a:latin typeface="Source Serif 4"/>
-              </a:rPr>
-              <a:t/>
-            </a:r>
-          </a:p>
-        </p:txBody>
-      </p:sp>
-    </p:spTree>
-  </p:cSld>
-  <p:clrMapOvr>
-    <a:masterClrMapping/>
-  </p:clrMapOvr>
-</p:sld>
-</file>
-
-<file path=ppt/slides/slide4.xml><?xml version="1.0" encoding="utf-8"?>
-<p:sld xmlns:a="http://schemas.openxmlformats.org/drawingml/2006/main" xmlns:p="http://schemas.openxmlformats.org/presentationml/2006/main" xmlns:r="http://schemas.openxmlformats.org/officeDocument/2006/relationships" show="0">
-  <p:cSld>
-    <p:bg>
-      <p:bgPr>
-        <a:solidFill>
-          <a:srgbClr val="EEEBE4"/>
-        </a:solidFill>
-        <a:effectLst/>
-      </p:bgPr>
-    </p:bg>
-    <p:spTree>
-      <p:nvGrpSpPr>
-        <p:cNvPr id="1" name=""/>
-        <p:cNvGrpSpPr/>
-        <p:nvPr/>
-      </p:nvGrpSpPr>
-      <p:grpSpPr/>
-      <p:sp>
-        <p:nvSpPr>
-          <p:cNvPr id="2" name="Rectangle 1"/>
-          <p:cNvSpPr/>
-          <p:nvPr/>
-        </p:nvSpPr>
-        <p:spPr>
-          <a:xfrm>
-            <a:off x="0" y="0"/>
-            <a:ext cx="12191695" cy="384048"/>
-          </a:xfrm>
-          <a:prstGeom prst="rect">
-            <a:avLst/>
-          </a:prstGeom>
-          <a:solidFill>
-            <a:srgbClr val="0B2D5B"/>
-          </a:solidFill>
-          <a:ln>
-            <a:noFill/>
-          </a:ln>
-          <a:effectLst/>
-        </p:spPr>
-        <p:style>
-          <a:lnRef idx="1">
-            <a:schemeClr val="accent1"/>
-          </a:lnRef>
-          <a:fillRef idx="3">
-            <a:schemeClr val="accent1"/>
-          </a:fillRef>
-          <a:effectRef idx="2">
-            <a:schemeClr val="accent1"/>
-          </a:effectRef>
-          <a:fontRef idx="minor">
-            <a:schemeClr val="lt1"/>
-          </a:fontRef>
-        </p:style>
-        <p:txBody>
-          <a:bodyPr rtlCol="0" anchor="ctr"/>
-          <a:lstStyle/>
-          <a:p>
-            <a:pPr algn="ctr"/>
-          </a:p>
-        </p:txBody>
-      </p:sp>
-      <p:sp>
-        <p:nvSpPr>
-          <p:cNvPr id="3" name="TextBox 2"/>
-          <p:cNvSpPr txBox="1"/>
-          <p:nvPr/>
-        </p:nvSpPr>
-        <p:spPr>
-          <a:xfrm>
-            <a:off x="548640" y="100584"/>
-            <a:ext cx="10972800" cy="274320"/>
-          </a:xfrm>
-          <a:prstGeom prst="rect">
-            <a:avLst/>
-          </a:prstGeom>
-          <a:noFill/>
-        </p:spPr>
-        <p:txBody>
-          <a:bodyPr wrap="square" anchor="t" lIns="0" rIns="0" tIns="0" bIns="0">
-            <a:spAutoFit/>
-          </a:bodyPr>
-          <a:lstStyle/>
-          <a:p>
-            <a:pPr algn="l">
-              <a:spcAft>
-                <a:spcPts val="495"/>
-              </a:spcAft>
-            </a:pPr>
-            <a:r>
-              <a:rPr sz="1100" b="1" i="0">
-                <a:solidFill>
-                  <a:srgbClr val="FFFFFF"/>
-                </a:solidFill>
-                <a:latin typeface="Inter Tight"/>
-              </a:rPr>
-              <a:t>TEACHER PAGE  ·  skipped when you present  ·  Background</a:t>
-            </a:r>
-          </a:p>
-        </p:txBody>
-      </p:sp>
-      <p:sp>
-        <p:nvSpPr>
-          <p:cNvPr id="4" name="TextBox 3"/>
-          <p:cNvSpPr txBox="1"/>
-          <p:nvPr/>
-        </p:nvSpPr>
-        <p:spPr>
-          <a:xfrm>
-            <a:off x="548640" y="685800"/>
-            <a:ext cx="10972800" cy="640080"/>
-          </a:xfrm>
-          <a:prstGeom prst="rect">
-            <a:avLst/>
-          </a:prstGeom>
-          <a:noFill/>
-        </p:spPr>
-        <p:txBody>
-          <a:bodyPr wrap="square" anchor="t" lIns="0" rIns="0" tIns="0" bIns="0">
-            <a:spAutoFit/>
-          </a:bodyPr>
-          <a:lstStyle/>
-          <a:p>
-            <a:pPr algn="l">
-              <a:spcAft>
-                <a:spcPts val="1350"/>
-              </a:spcAft>
-            </a:pPr>
-            <a:r>
-              <a:rPr sz="3000" b="1" i="0">
-                <a:solidFill>
-                  <a:srgbClr val="1C1B19"/>
-                </a:solidFill>
-                <a:latin typeface="Source Serif 4"/>
-              </a:rPr>
-              <a:t>What the research says</a:t>
-            </a:r>
-          </a:p>
-        </p:txBody>
-      </p:sp>
-      <p:sp>
-        <p:nvSpPr>
-          <p:cNvPr id="5" name="TextBox 4"/>
-          <p:cNvSpPr txBox="1"/>
-          <p:nvPr/>
-        </p:nvSpPr>
-        <p:spPr>
-          <a:xfrm>
-            <a:off x="548640" y="1463040"/>
-            <a:ext cx="5394960" cy="4937760"/>
-          </a:xfrm>
-          <a:prstGeom prst="rect">
-            <a:avLst/>
-          </a:prstGeom>
-          <a:noFill/>
-        </p:spPr>
-        <p:txBody>
-          <a:bodyPr wrap="square" anchor="t" lIns="0" rIns="0" tIns="0" bIns="0">
-            <a:spAutoFit/>
-          </a:bodyPr>
-          <a:lstStyle/>
-          <a:p>
-            <a:pPr algn="l">
-              <a:spcAft>
-                <a:spcPts val="585"/>
-              </a:spcAft>
-            </a:pPr>
-            <a:r>
-              <a:rPr sz="1300" b="0" i="0">
-                <a:solidFill>
-                  <a:srgbClr val="1C1B19"/>
-                </a:solidFill>
-                <a:latin typeface="Source Serif 4"/>
-              </a:rPr>
-              <a:t>Before a bystander helps, they have to get through five steps: notice, decide it's a problem, feel it's theirs to act on, know what to do, and act. Getting stuck at any step looks like freezing.</a:t>
-            </a:r>
-          </a:p>
-          <a:p>
-            <a:pPr algn="l">
-              <a:spcAft>
-                <a:spcPts val="585"/>
-              </a:spcAft>
-            </a:pPr>
-            <a:r>
-              <a:rPr sz="1050" b="0" i="0">
-                <a:solidFill>
-                  <a:srgbClr val="5D5A54"/>
-                </a:solidFill>
-                <a:latin typeface="Inter Tight"/>
-              </a:rPr>
-              <a:t>Latané and Darley, The Unresponsive Bystander, 1970</a:t>
-            </a:r>
-          </a:p>
-          <a:p>
-            <a:pPr algn="l">
-              <a:spcAft>
-                <a:spcPts val="585"/>
-              </a:spcAft>
-            </a:pPr>
-            <a:r>
-              <a:rPr sz="1300" b="0" i="0">
-                <a:solidFill>
-                  <a:srgbClr val="1C1B19"/>
-                </a:solidFill>
-                <a:latin typeface="Source Serif 4"/>
-              </a:rPr>
-              <a:t>Students who heard someone over an intercom seem to have a seizure went for help before the call cut off 85% of the time when they thought they were alone, and 31% of the time when they thought four others could hear.</a:t>
-            </a:r>
-          </a:p>
-          <a:p>
-            <a:pPr algn="l">
-              <a:spcAft>
-                <a:spcPts val="585"/>
-              </a:spcAft>
-            </a:pPr>
-            <a:r>
-              <a:rPr sz="1050" b="0" i="0">
-                <a:solidFill>
-                  <a:srgbClr val="5D5A54"/>
-                </a:solidFill>
-                <a:latin typeface="Inter Tight"/>
-              </a:rPr>
-              <a:t>Darley and Latané, Journal of Personality and Social Psychology, 1968</a:t>
-            </a:r>
-          </a:p>
-          <a:p>
-            <a:pPr algn="l">
-              <a:spcAft>
-                <a:spcPts val="585"/>
-              </a:spcAft>
-            </a:pPr>
-            <a:r>
-              <a:rPr sz="1300" b="0" i="0">
-                <a:solidFill>
-                  <a:srgbClr val="1C1B19"/>
-                </a:solidFill>
-                <a:latin typeface="Source Serif 4"/>
-              </a:rPr>
-              <a:t>A review of studies with more than 7,700 people confirmed the bystander effect, and found it gets weaker when a situation is clearly dangerous and when bystanders know each other.</a:t>
-            </a:r>
-          </a:p>
-          <a:p>
-            <a:pPr algn="l">
-              <a:spcAft>
-                <a:spcPts val="585"/>
-              </a:spcAft>
-            </a:pPr>
-            <a:r>
-              <a:rPr sz="1050" b="0" i="0">
-                <a:solidFill>
-                  <a:srgbClr val="5D5A54"/>
-                </a:solidFill>
-                <a:latin typeface="Inter Tight"/>
-              </a:rPr>
-              <a:t>Fischer et al., Psychological Bulletin, 2011</a:t>
-            </a:r>
-          </a:p>
-        </p:txBody>
-      </p:sp>
-      <p:sp>
-        <p:nvSpPr>
-          <p:cNvPr id="6" name="TextBox 5"/>
-          <p:cNvSpPr txBox="1"/>
-          <p:nvPr/>
-        </p:nvSpPr>
-        <p:spPr>
-          <a:xfrm>
-            <a:off x="6217920" y="1463040"/>
-            <a:ext cx="5394960" cy="4937760"/>
-          </a:xfrm>
-          <a:prstGeom prst="rect">
-            <a:avLst/>
-          </a:prstGeom>
-          <a:noFill/>
-        </p:spPr>
-        <p:txBody>
-          <a:bodyPr wrap="square" anchor="t" lIns="0" rIns="0" tIns="0" bIns="0">
-            <a:spAutoFit/>
-          </a:bodyPr>
-          <a:lstStyle/>
-          <a:p>
-            <a:pPr algn="l">
-              <a:spcAft>
-                <a:spcPts val="585"/>
-              </a:spcAft>
-            </a:pPr>
-            <a:r>
-              <a:rPr sz="1300" b="0" i="0">
-                <a:solidFill>
-                  <a:srgbClr val="1C1B19"/>
-                </a:solidFill>
-                <a:latin typeface="Source Serif 4"/>
-              </a:rPr>
-              <a:t>In security-camera footage of 219 real public fights in the UK, the Netherlands and South Africa, at least one bystander did something to help in 9 of 10. More people around made help more likely.</a:t>
-            </a:r>
-          </a:p>
-          <a:p>
-            <a:pPr algn="l">
-              <a:spcAft>
-                <a:spcPts val="585"/>
-              </a:spcAft>
-            </a:pPr>
-            <a:r>
-              <a:rPr sz="1050" b="0" i="0">
-                <a:solidFill>
-                  <a:srgbClr val="5D5A54"/>
-                </a:solidFill>
-                <a:latin typeface="Inter Tight"/>
-              </a:rPr>
-              <a:t>Philpot et al., American Psychologist, 2020</a:t>
-            </a:r>
-          </a:p>
-          <a:p>
-            <a:pPr algn="l">
-              <a:spcAft>
-                <a:spcPts val="585"/>
-              </a:spcAft>
-            </a:pPr>
-            <a:r>
-              <a:rPr sz="1300" b="0" i="0">
-                <a:solidFill>
-                  <a:srgbClr val="1C1B19"/>
-                </a:solidFill>
-                <a:latin typeface="Source Serif 4"/>
-              </a:rPr>
-              <a:t>On school playgrounds, peers were present for 88% of bullying episodes but stepped in during only 19%. When they did, the bullying stopped most of the time (57%). These were younger children.</a:t>
-            </a:r>
-          </a:p>
-          <a:p>
-            <a:pPr algn="l">
-              <a:spcAft>
-                <a:spcPts val="585"/>
-              </a:spcAft>
-            </a:pPr>
-            <a:r>
-              <a:rPr sz="1050" b="0" i="0">
-                <a:solidFill>
-                  <a:srgbClr val="5D5A54"/>
-                </a:solidFill>
-                <a:latin typeface="Inter Tight"/>
-              </a:rPr>
-              <a:t>Hawkins, Pepler and Craig, Social Development, 2001</a:t>
-            </a:r>
-          </a:p>
-          <a:p>
-            <a:pPr algn="l">
-              <a:spcAft>
-                <a:spcPts val="585"/>
-              </a:spcAft>
-            </a:pPr>
-            <a:r>
-              <a:rPr sz="1300" b="0" i="0">
-                <a:solidFill>
-                  <a:srgbClr val="1C1B19"/>
-                </a:solidFill>
-                <a:latin typeface="Source Serif 4"/>
-              </a:rPr>
-              <a:t>In 56 New Jersey middle schools with more than 24,000 students, small groups of students who took a public stand against conflict cut disciplinary reports of conflict by 25% in a year. The effect was strongest when the group included students others paid attention to.</a:t>
-            </a:r>
-          </a:p>
-          <a:p>
-            <a:pPr algn="l">
-              <a:spcAft>
-                <a:spcPts val="585"/>
-              </a:spcAft>
-            </a:pPr>
-            <a:r>
-              <a:rPr sz="1050" b="0" i="0">
-                <a:solidFill>
-                  <a:srgbClr val="5D5A54"/>
-                </a:solidFill>
-                <a:latin typeface="Inter Tight"/>
-              </a:rPr>
-              <a:t>Paluck, Shepherd and Aronow, PNAS, 2016</a:t>
-            </a:r>
-          </a:p>
-        </p:txBody>
-      </p:sp>
-    </p:spTree>
-  </p:cSld>
-  <p:clrMapOvr>
-    <a:masterClrMapping/>
-  </p:clrMapOvr>
-</p:sld>
-</file>
-
-<file path=ppt/slides/slide5.xml><?xml version="1.0" encoding="utf-8"?>
-<p:sld xmlns:a="http://schemas.openxmlformats.org/drawingml/2006/main" xmlns:p="http://schemas.openxmlformats.org/presentationml/2006/main" xmlns:r="http://schemas.openxmlformats.org/officeDocument/2006/relationships">
-  <p:cSld>
-    <p:bg>
-      <p:bgPr>
-        <a:solidFill>
-          <a:srgbClr val="0B2D5B"/>
-        </a:solidFill>
-        <a:effectLst/>
-      </p:bgPr>
-    </p:bg>
-    <p:spTree>
-      <p:nvGrpSpPr>
-        <p:cNvPr id="1" name=""/>
-        <p:cNvGrpSpPr/>
-        <p:nvPr/>
-      </p:nvGrpSpPr>
-      <p:grpSpPr/>
-      <p:sp>
-        <p:nvSpPr>
-          <p:cNvPr id="2" name="Rectangle 1"/>
-          <p:cNvSpPr/>
-          <p:nvPr/>
-        </p:nvSpPr>
-        <p:spPr>
-          <a:xfrm>
-            <a:off x="548640" y="502920"/>
-            <a:ext cx="457200" cy="54864"/>
-          </a:xfrm>
-          <a:prstGeom prst="rect">
-            <a:avLst/>
-          </a:prstGeom>
-          <a:solidFill>
-            <a:srgbClr val="F47B20"/>
-          </a:solidFill>
-          <a:ln>
-            <a:noFill/>
-          </a:ln>
-          <a:effectLst/>
-        </p:spPr>
-        <p:style>
-          <a:lnRef idx="1">
-            <a:schemeClr val="accent1"/>
-          </a:lnRef>
-          <a:fillRef idx="3">
-            <a:schemeClr val="accent1"/>
-          </a:fillRef>
-          <a:effectRef idx="2">
-            <a:schemeClr val="accent1"/>
-          </a:effectRef>
-          <a:fontRef idx="minor">
-            <a:schemeClr val="lt1"/>
-          </a:fontRef>
-        </p:style>
-        <p:txBody>
-          <a:bodyPr rtlCol="0" anchor="ctr"/>
-          <a:lstStyle/>
-          <a:p>
-            <a:pPr algn="ctr"/>
-          </a:p>
-        </p:txBody>
-      </p:sp>
-      <p:sp>
-        <p:nvSpPr>
-          <p:cNvPr id="3" name="TextBox 2"/>
-          <p:cNvSpPr txBox="1"/>
-          <p:nvPr/>
-        </p:nvSpPr>
-        <p:spPr>
-          <a:xfrm>
-            <a:off x="1143000" y="393192"/>
-            <a:ext cx="8229600" cy="274320"/>
-          </a:xfrm>
-          <a:prstGeom prst="rect">
-            <a:avLst/>
-          </a:prstGeom>
-          <a:noFill/>
-        </p:spPr>
-        <p:txBody>
-          <a:bodyPr wrap="square" anchor="t" lIns="0" rIns="0" tIns="0" bIns="0">
-            <a:spAutoFit/>
-          </a:bodyPr>
-          <a:lstStyle/>
-          <a:p>
-            <a:pPr algn="l">
-              <a:spcAft>
-                <a:spcPts val="540"/>
-              </a:spcAft>
-            </a:pPr>
-            <a:r>
-              <a:rPr sz="1200" b="1" i="0">
-                <a:solidFill>
-                  <a:srgbClr val="5D5A54"/>
-                </a:solidFill>
-                <a:latin typeface="Inter Tight"/>
-              </a:rPr>
-              <a:t>SPEAKING UP</a:t>
-            </a:r>
-          </a:p>
-        </p:txBody>
-      </p:sp>
-      <p:sp>
-        <p:nvSpPr>
-          <p:cNvPr id="4" name="TextBox 3"/>
-          <p:cNvSpPr txBox="1"/>
-          <p:nvPr/>
-        </p:nvSpPr>
-        <p:spPr>
-          <a:xfrm>
-            <a:off x="8229600" y="6400800"/>
-            <a:ext cx="3410712" cy="274320"/>
-          </a:xfrm>
-          <a:prstGeom prst="rect">
-            <a:avLst/>
-          </a:prstGeom>
-          <a:noFill/>
-        </p:spPr>
-        <p:txBody>
-          <a:bodyPr wrap="square" anchor="t" lIns="0" rIns="0" tIns="0" bIns="0">
-            <a:spAutoFit/>
-          </a:bodyPr>
-          <a:lstStyle/>
-          <a:p>
-            <a:pPr algn="r">
-              <a:spcAft>
-                <a:spcPts val="450"/>
-              </a:spcAft>
-            </a:pPr>
-            <a:r>
-              <a:rPr sz="1000" b="0" i="0">
-                <a:solidFill>
-                  <a:srgbClr val="5D5A54"/>
-                </a:solidFill>
-                <a:latin typeface="Inter Tight"/>
-              </a:rPr>
-              <a:t>Beaver Counseling</a:t>
-            </a:r>
-          </a:p>
-        </p:txBody>
-      </p:sp>
-      <p:sp>
-        <p:nvSpPr>
-          <p:cNvPr id="5" name="TextBox 4"/>
-          <p:cNvSpPr txBox="1"/>
-          <p:nvPr/>
-        </p:nvSpPr>
-        <p:spPr>
-          <a:xfrm>
-            <a:off x="822960" y="2011680"/>
-            <a:ext cx="10515600" cy="1463040"/>
-          </a:xfrm>
-          <a:prstGeom prst="rect">
-            <a:avLst/>
-          </a:prstGeom>
-          <a:noFill/>
-        </p:spPr>
-        <p:txBody>
-          <a:bodyPr wrap="square" anchor="b" lIns="0" rIns="0" tIns="0" bIns="0">
-            <a:spAutoFit/>
-          </a:bodyPr>
-          <a:lstStyle/>
-          <a:p>
-            <a:pPr algn="l">
-              <a:spcAft>
-                <a:spcPts val="2700"/>
-              </a:spcAft>
-            </a:pPr>
-            <a:r>
-              <a:rPr sz="6000" b="1" i="0">
-                <a:solidFill>
-                  <a:srgbClr val="FFFFFF"/>
-                </a:solidFill>
-                <a:latin typeface="Source Serif 4"/>
-              </a:rPr>
-              <a:t>Speaking Up</a:t>
-            </a:r>
-          </a:p>
-        </p:txBody>
-      </p:sp>
-      <p:sp>
-        <p:nvSpPr>
-          <p:cNvPr id="6" name="TextBox 5"/>
-          <p:cNvSpPr txBox="1"/>
-          <p:nvPr/>
-        </p:nvSpPr>
-        <p:spPr>
-          <a:xfrm>
-            <a:off x="822960" y="3611880"/>
-            <a:ext cx="10515600" cy="914400"/>
-          </a:xfrm>
-          <a:prstGeom prst="rect">
-            <a:avLst/>
-          </a:prstGeom>
-          <a:noFill/>
-        </p:spPr>
-        <p:txBody>
-          <a:bodyPr wrap="square" anchor="t" lIns="0" rIns="0" tIns="0" bIns="0">
-            <a:spAutoFit/>
-          </a:bodyPr>
-          <a:lstStyle/>
-          <a:p>
-            <a:pPr algn="l">
-              <a:spcAft>
-                <a:spcPts val="1080"/>
-              </a:spcAft>
-            </a:pPr>
-            <a:r>
-              <a:rPr sz="2400" b="0" i="1">
-                <a:solidFill>
-                  <a:srgbClr val="E8E4DA"/>
-                </a:solidFill>
-                <a:latin typeface="Source Serif 4"/>
-              </a:rPr>
-              <a:t>You saw it. You froze. Then you replayed it all night.</a:t>
-            </a:r>
-          </a:p>
-        </p:txBody>
-      </p:sp>
-      <p:sp>
-        <p:nvSpPr>
-          <p:cNvPr id="7" name="TextBox 6"/>
-          <p:cNvSpPr txBox="1"/>
-          <p:nvPr/>
-        </p:nvSpPr>
-        <p:spPr>
-          <a:xfrm>
-            <a:off x="822960" y="6035040"/>
-            <a:ext cx="7315200" cy="365760"/>
-          </a:xfrm>
-          <a:prstGeom prst="rect">
-            <a:avLst/>
-          </a:prstGeom>
-          <a:noFill/>
-        </p:spPr>
-        <p:txBody>
-          <a:bodyPr wrap="square" anchor="t" lIns="0" rIns="0" tIns="0" bIns="0">
-            <a:spAutoFit/>
-          </a:bodyPr>
-          <a:lstStyle/>
-          <a:p>
-            <a:pPr algn="l">
-              <a:spcAft>
-                <a:spcPts val="585"/>
-              </a:spcAft>
-            </a:pPr>
-            <a:r>
-              <a:rPr sz="1300" b="0" i="0">
-                <a:solidFill>
-                  <a:srgbClr val="E8E4DA"/>
-                </a:solidFill>
-                <a:latin typeface="Inter Tight"/>
-              </a:rPr>
-              <a:t>Beaver Upper School · Counseling</a:t>
+              <a:t>Peers were there for 88% of playground bullying. They stepped in 19% of the time.</a:t>
             </a:r>
           </a:p>
         </p:txBody>
@@ -7582,7 +8094,7 @@
                 </a:solidFill>
                 <a:latin typeface="Inter Tight"/>
               </a:rPr>
-              <a:t>ANONYMOUS CARDS</a:t>
+              <a:t>KNOW A MOVE</a:t>
             </a:r>
           </a:p>
         </p:txBody>
@@ -7628,45 +8140,40 @@
       </p:sp>
       <p:sp>
         <p:nvSpPr>
-          <p:cNvPr id="5" name="Rectangle 4"/>
-          <p:cNvSpPr/>
+          <p:cNvPr id="5" name="TextBox 4"/>
+          <p:cNvSpPr txBox="1"/>
           <p:nvPr/>
         </p:nvSpPr>
         <p:spPr>
           <a:xfrm>
-            <a:off x="822960" y="1371600"/>
-            <a:ext cx="73152" cy="3566160"/>
-          </a:xfrm>
-          <a:prstGeom prst="rect">
-            <a:avLst/>
-          </a:prstGeom>
-          <a:solidFill>
-            <a:srgbClr val="F47B20"/>
-          </a:solidFill>
-          <a:ln>
-            <a:noFill/>
-          </a:ln>
-          <a:effectLst/>
-        </p:spPr>
-        <p:style>
-          <a:lnRef idx="1">
-            <a:schemeClr val="accent1"/>
-          </a:lnRef>
-          <a:fillRef idx="3">
-            <a:schemeClr val="accent1"/>
-          </a:fillRef>
-          <a:effectRef idx="2">
-            <a:schemeClr val="accent1"/>
-          </a:effectRef>
-          <a:fontRef idx="minor">
-            <a:schemeClr val="lt1"/>
-          </a:fontRef>
-        </p:style>
-        <p:txBody>
-          <a:bodyPr rtlCol="0" anchor="ctr"/>
-          <a:lstStyle/>
-          <a:p>
-            <a:pPr algn="ctr"/>
+            <a:off x="822960" y="1005840"/>
+            <a:ext cx="10515600" cy="1097280"/>
+          </a:xfrm>
+          <a:prstGeom prst="rect">
+            <a:avLst/>
+          </a:prstGeom>
+          <a:noFill/>
+        </p:spPr>
+        <p:txBody>
+          <a:bodyPr wrap="square" anchor="t" lIns="0" rIns="0" tIns="0" bIns="0">
+            <a:spAutoFit/>
+          </a:bodyPr>
+          <a:lstStyle/>
+          <a:p>
+            <a:pPr algn="l">
+              <a:spcAft>
+                <a:spcPts val="1620"/>
+              </a:spcAft>
+            </a:pPr>
+            <a:r>
+              <a:rPr sz="3600" b="1" i="0">
+                <a:solidFill>
+                  <a:srgbClr val="1C1B19"/>
+                </a:solidFill>
+                <a:latin typeface="Source Serif 4"/>
+              </a:rPr>
+              <a:t>Four ways to step in</a:t>
+            </a:r>
           </a:p>
         </p:txBody>
       </p:sp>
@@ -7678,8 +8185,8 @@
         </p:nvSpPr>
         <p:spPr>
           <a:xfrm>
-            <a:off x="1188720" y="1371600"/>
-            <a:ext cx="10058400" cy="3566160"/>
+            <a:off x="822960" y="2194560"/>
+            <a:ext cx="548640" cy="1005840"/>
           </a:xfrm>
           <a:prstGeom prst="rect">
             <a:avLst/>
@@ -7687,24 +8194,24 @@
           <a:noFill/>
         </p:spPr>
         <p:txBody>
-          <a:bodyPr wrap="square" anchor="ctr" lIns="0" rIns="0" tIns="0" bIns="0">
+          <a:bodyPr wrap="square" anchor="t" lIns="0" rIns="0" tIns="0" bIns="0">
             <a:spAutoFit/>
           </a:bodyPr>
           <a:lstStyle/>
           <a:p>
             <a:pPr algn="l">
               <a:spcAft>
-                <a:spcPts val="1800"/>
-              </a:spcAft>
-            </a:pPr>
-            <a:r>
-              <a:rPr sz="4000" b="0" i="1">
-                <a:solidFill>
-                  <a:srgbClr val="1C1B19"/>
+                <a:spcPts val="1170"/>
+              </a:spcAft>
+            </a:pPr>
+            <a:r>
+              <a:rPr sz="2600" b="1" i="0">
+                <a:solidFill>
+                  <a:srgbClr val="F47B20"/>
                 </a:solidFill>
                 <a:latin typeface="Source Serif 4"/>
               </a:rPr>
-              <a:t>Have you ever seen someone get picked on and said nothing?</a:t>
+              <a:t>1</a:t>
             </a:r>
           </a:p>
         </p:txBody>
@@ -7717,8 +8224,8 @@
         </p:nvSpPr>
         <p:spPr>
           <a:xfrm>
-            <a:off x="1188720" y="5120640"/>
-            <a:ext cx="10058400" cy="914400"/>
+            <a:off x="1463040" y="2231136"/>
+            <a:ext cx="9875520" cy="1005840"/>
           </a:xfrm>
           <a:prstGeom prst="rect">
             <a:avLst/>
@@ -7733,17 +8240,315 @@
           <a:p>
             <a:pPr algn="l">
               <a:spcAft>
-                <a:spcPts val="810"/>
-              </a:spcAft>
-            </a:pPr>
-            <a:r>
-              <a:rPr sz="1800" b="0" i="0">
+                <a:spcPts val="945"/>
+              </a:spcAft>
+            </a:pPr>
+            <a:r>
+              <a:rPr sz="2100" b="1" i="0">
+                <a:solidFill>
+                  <a:srgbClr val="1C1B19"/>
+                </a:solidFill>
+                <a:latin typeface="Source Serif 4"/>
+              </a:rPr>
+              <a:t>Distract.</a:t>
+            </a:r>
+          </a:p>
+          <a:p>
+            <a:pPr algn="l">
+              <a:spcAft>
+                <a:spcPts val="945"/>
+              </a:spcAft>
+            </a:pPr>
+            <a:r>
+              <a:rPr sz="1600" b="0" i="0">
                 <a:solidFill>
                   <a:srgbClr val="5D5A54"/>
                 </a:solidFill>
-                <a:latin typeface="Inter Tight"/>
-              </a:rPr>
-              <a:t>Write yes or no on a card. Fold it. No names.</a:t>
+                <a:latin typeface="Source Serif 4"/>
+              </a:rPr>
+              <a:t>"Yo, come with me for a sec."</a:t>
+            </a:r>
+          </a:p>
+        </p:txBody>
+      </p:sp>
+      <p:sp>
+        <p:nvSpPr>
+          <p:cNvPr id="8" name="TextBox 7"/>
+          <p:cNvSpPr txBox="1"/>
+          <p:nvPr/>
+        </p:nvSpPr>
+        <p:spPr>
+          <a:xfrm>
+            <a:off x="822960" y="3200400"/>
+            <a:ext cx="548640" cy="1005840"/>
+          </a:xfrm>
+          <a:prstGeom prst="rect">
+            <a:avLst/>
+          </a:prstGeom>
+          <a:noFill/>
+        </p:spPr>
+        <p:txBody>
+          <a:bodyPr wrap="square" anchor="t" lIns="0" rIns="0" tIns="0" bIns="0">
+            <a:spAutoFit/>
+          </a:bodyPr>
+          <a:lstStyle/>
+          <a:p>
+            <a:pPr algn="l">
+              <a:spcAft>
+                <a:spcPts val="1170"/>
+              </a:spcAft>
+            </a:pPr>
+            <a:r>
+              <a:rPr sz="2600" b="1" i="0">
+                <a:solidFill>
+                  <a:srgbClr val="F47B20"/>
+                </a:solidFill>
+                <a:latin typeface="Source Serif 4"/>
+              </a:rPr>
+              <a:t>2</a:t>
+            </a:r>
+          </a:p>
+        </p:txBody>
+      </p:sp>
+      <p:sp>
+        <p:nvSpPr>
+          <p:cNvPr id="9" name="TextBox 8"/>
+          <p:cNvSpPr txBox="1"/>
+          <p:nvPr/>
+        </p:nvSpPr>
+        <p:spPr>
+          <a:xfrm>
+            <a:off x="1463040" y="3236976"/>
+            <a:ext cx="9875520" cy="1005840"/>
+          </a:xfrm>
+          <a:prstGeom prst="rect">
+            <a:avLst/>
+          </a:prstGeom>
+          <a:noFill/>
+        </p:spPr>
+        <p:txBody>
+          <a:bodyPr wrap="square" anchor="t" lIns="0" rIns="0" tIns="0" bIns="0">
+            <a:spAutoFit/>
+          </a:bodyPr>
+          <a:lstStyle/>
+          <a:p>
+            <a:pPr algn="l">
+              <a:spcAft>
+                <a:spcPts val="945"/>
+              </a:spcAft>
+            </a:pPr>
+            <a:r>
+              <a:rPr sz="2100" b="1" i="0">
+                <a:solidFill>
+                  <a:srgbClr val="1C1B19"/>
+                </a:solidFill>
+                <a:latin typeface="Source Serif 4"/>
+              </a:rPr>
+              <a:t>Delegate.</a:t>
+            </a:r>
+          </a:p>
+          <a:p>
+            <a:pPr algn="l">
+              <a:spcAft>
+                <a:spcPts val="945"/>
+              </a:spcAft>
+            </a:pPr>
+            <a:r>
+              <a:rPr sz="1600" b="0" i="0">
+                <a:solidFill>
+                  <a:srgbClr val="5D5A54"/>
+                </a:solidFill>
+                <a:latin typeface="Source Serif 4"/>
+              </a:rPr>
+              <a:t>Bring in a coach, teacher, host, or a friend people listen to.</a:t>
+            </a:r>
+          </a:p>
+        </p:txBody>
+      </p:sp>
+      <p:sp>
+        <p:nvSpPr>
+          <p:cNvPr id="10" name="TextBox 9"/>
+          <p:cNvSpPr txBox="1"/>
+          <p:nvPr/>
+        </p:nvSpPr>
+        <p:spPr>
+          <a:xfrm>
+            <a:off x="822960" y="4206240"/>
+            <a:ext cx="548640" cy="1005840"/>
+          </a:xfrm>
+          <a:prstGeom prst="rect">
+            <a:avLst/>
+          </a:prstGeom>
+          <a:noFill/>
+        </p:spPr>
+        <p:txBody>
+          <a:bodyPr wrap="square" anchor="t" lIns="0" rIns="0" tIns="0" bIns="0">
+            <a:spAutoFit/>
+          </a:bodyPr>
+          <a:lstStyle/>
+          <a:p>
+            <a:pPr algn="l">
+              <a:spcAft>
+                <a:spcPts val="1170"/>
+              </a:spcAft>
+            </a:pPr>
+            <a:r>
+              <a:rPr sz="2600" b="1" i="0">
+                <a:solidFill>
+                  <a:srgbClr val="F47B20"/>
+                </a:solidFill>
+                <a:latin typeface="Source Serif 4"/>
+              </a:rPr>
+              <a:t>3</a:t>
+            </a:r>
+          </a:p>
+        </p:txBody>
+      </p:sp>
+      <p:sp>
+        <p:nvSpPr>
+          <p:cNvPr id="11" name="TextBox 10"/>
+          <p:cNvSpPr txBox="1"/>
+          <p:nvPr/>
+        </p:nvSpPr>
+        <p:spPr>
+          <a:xfrm>
+            <a:off x="1463040" y="4242816"/>
+            <a:ext cx="9875520" cy="1005840"/>
+          </a:xfrm>
+          <a:prstGeom prst="rect">
+            <a:avLst/>
+          </a:prstGeom>
+          <a:noFill/>
+        </p:spPr>
+        <p:txBody>
+          <a:bodyPr wrap="square" anchor="t" lIns="0" rIns="0" tIns="0" bIns="0">
+            <a:spAutoFit/>
+          </a:bodyPr>
+          <a:lstStyle/>
+          <a:p>
+            <a:pPr algn="l">
+              <a:spcAft>
+                <a:spcPts val="945"/>
+              </a:spcAft>
+            </a:pPr>
+            <a:r>
+              <a:rPr sz="2100" b="1" i="0">
+                <a:solidFill>
+                  <a:srgbClr val="1C1B19"/>
+                </a:solidFill>
+                <a:latin typeface="Source Serif 4"/>
+              </a:rPr>
+              <a:t>Direct.</a:t>
+            </a:r>
+          </a:p>
+          <a:p>
+            <a:pPr algn="l">
+              <a:spcAft>
+                <a:spcPts val="945"/>
+              </a:spcAft>
+            </a:pPr>
+            <a:r>
+              <a:rPr sz="1600" b="0" i="0">
+                <a:solidFill>
+                  <a:srgbClr val="5D5A54"/>
+                </a:solidFill>
+                <a:latin typeface="Source Serif 4"/>
+              </a:rPr>
+              <a:t>Short and flat, only if it feels safe: "Not funny."</a:t>
+            </a:r>
+          </a:p>
+        </p:txBody>
+      </p:sp>
+      <p:sp>
+        <p:nvSpPr>
+          <p:cNvPr id="12" name="TextBox 11"/>
+          <p:cNvSpPr txBox="1"/>
+          <p:nvPr/>
+        </p:nvSpPr>
+        <p:spPr>
+          <a:xfrm>
+            <a:off x="822960" y="5212080"/>
+            <a:ext cx="548640" cy="1005840"/>
+          </a:xfrm>
+          <a:prstGeom prst="rect">
+            <a:avLst/>
+          </a:prstGeom>
+          <a:noFill/>
+        </p:spPr>
+        <p:txBody>
+          <a:bodyPr wrap="square" anchor="t" lIns="0" rIns="0" tIns="0" bIns="0">
+            <a:spAutoFit/>
+          </a:bodyPr>
+          <a:lstStyle/>
+          <a:p>
+            <a:pPr algn="l">
+              <a:spcAft>
+                <a:spcPts val="1170"/>
+              </a:spcAft>
+            </a:pPr>
+            <a:r>
+              <a:rPr sz="2600" b="1" i="0">
+                <a:solidFill>
+                  <a:srgbClr val="F47B20"/>
+                </a:solidFill>
+                <a:latin typeface="Source Serif 4"/>
+              </a:rPr>
+              <a:t>4</a:t>
+            </a:r>
+          </a:p>
+        </p:txBody>
+      </p:sp>
+      <p:sp>
+        <p:nvSpPr>
+          <p:cNvPr id="13" name="TextBox 12"/>
+          <p:cNvSpPr txBox="1"/>
+          <p:nvPr/>
+        </p:nvSpPr>
+        <p:spPr>
+          <a:xfrm>
+            <a:off x="1463040" y="5248656"/>
+            <a:ext cx="9875520" cy="1005840"/>
+          </a:xfrm>
+          <a:prstGeom prst="rect">
+            <a:avLst/>
+          </a:prstGeom>
+          <a:noFill/>
+        </p:spPr>
+        <p:txBody>
+          <a:bodyPr wrap="square" anchor="t" lIns="0" rIns="0" tIns="0" bIns="0">
+            <a:spAutoFit/>
+          </a:bodyPr>
+          <a:lstStyle/>
+          <a:p>
+            <a:pPr algn="l">
+              <a:spcAft>
+                <a:spcPts val="945"/>
+              </a:spcAft>
+            </a:pPr>
+            <a:r>
+              <a:rPr sz="2100" b="1" i="0">
+                <a:solidFill>
+                  <a:srgbClr val="1C1B19"/>
+                </a:solidFill>
+                <a:latin typeface="Source Serif 4"/>
+              </a:rPr>
+              <a:t>Delay.</a:t>
+            </a:r>
+          </a:p>
+          <a:p>
+            <a:pPr algn="l">
+              <a:spcAft>
+                <a:spcPts val="945"/>
+              </a:spcAft>
+            </a:pPr>
+            <a:r>
+              <a:rPr sz="1600" b="0" i="0">
+                <a:solidFill>
+                  <a:srgbClr val="5D5A54"/>
+                </a:solidFill>
+                <a:latin typeface="Source Serif 4"/>
+              </a:rPr>
+              <a:t>Afterward: "I saw what happened. You okay?"</a:t>
             </a:r>
           </a:p>
         </p:txBody>
@@ -7852,7 +8657,7 @@
                 </a:solidFill>
                 <a:latin typeface="Inter Tight"/>
               </a:rPr>
-              <a:t>FIVE GATES</a:t>
+              <a:t>THREE MOMENTS</a:t>
             </a:r>
           </a:p>
         </p:txBody>
@@ -7930,7 +8735,7 @@
                 </a:solidFill>
                 <a:latin typeface="Source Serif 4"/>
               </a:rPr>
-              <a:t>Between seeing it and doing something</a:t>
+              <a:t>Which move would you actually make?</a:t>
             </a:r>
           </a:p>
         </p:txBody>
@@ -7943,8 +8748,8 @@
         </p:nvSpPr>
         <p:spPr>
           <a:xfrm>
-            <a:off x="822960" y="2743200"/>
-            <a:ext cx="1874519" cy="1005840"/>
+            <a:off x="822960" y="2103120"/>
+            <a:ext cx="3322320" cy="3840480"/>
           </a:xfrm>
           <a:prstGeom prst="rect">
             <a:avLst/>
@@ -7954,7 +8759,7 @@
           </a:solidFill>
           <a:ln w="15875">
             <a:solidFill>
-              <a:srgbClr val="0B2D5B"/>
+              <a:srgbClr val="D8D2C6"/>
             </a:solidFill>
           </a:ln>
           <a:effectLst/>
@@ -7989,8 +8794,8 @@
         </p:nvSpPr>
         <p:spPr>
           <a:xfrm>
-            <a:off x="822960" y="2743200"/>
-            <a:ext cx="1874519" cy="1005840"/>
+            <a:off x="1051560" y="2286000"/>
+            <a:ext cx="2865120" cy="365760"/>
           </a:xfrm>
           <a:prstGeom prst="rect">
             <a:avLst/>
@@ -7998,64 +8803,67 @@
           <a:noFill/>
         </p:spPr>
         <p:txBody>
-          <a:bodyPr wrap="square" anchor="ctr" lIns="0" rIns="0" tIns="0" bIns="0">
+          <a:bodyPr wrap="square" anchor="t" lIns="0" rIns="0" tIns="0" bIns="0">
             <a:spAutoFit/>
           </a:bodyPr>
           <a:lstStyle/>
           <a:p>
-            <a:pPr algn="ctr">
-              <a:spcAft>
-                <a:spcPts val="900"/>
-              </a:spcAft>
-            </a:pPr>
-            <a:r>
-              <a:rPr sz="2000" b="1" i="0">
+            <a:pPr algn="l">
+              <a:spcAft>
+                <a:spcPts val="585"/>
+              </a:spcAft>
+            </a:pPr>
+            <a:r>
+              <a:rPr sz="1300" b="1" i="0">
+                <a:solidFill>
+                  <a:srgbClr val="0B2D5B"/>
+                </a:solidFill>
+                <a:latin typeface="Inter Tight"/>
+              </a:rPr>
+              <a:t>LOCKER ROOM</a:t>
+            </a:r>
+          </a:p>
+        </p:txBody>
+      </p:sp>
+      <p:sp>
+        <p:nvSpPr>
+          <p:cNvPr id="8" name="TextBox 7"/>
+          <p:cNvSpPr txBox="1"/>
+          <p:nvPr/>
+        </p:nvSpPr>
+        <p:spPr>
+          <a:xfrm>
+            <a:off x="1051560" y="2743200"/>
+            <a:ext cx="2865120" cy="3017520"/>
+          </a:xfrm>
+          <a:prstGeom prst="rect">
+            <a:avLst/>
+          </a:prstGeom>
+          <a:noFill/>
+        </p:spPr>
+        <p:txBody>
+          <a:bodyPr wrap="square" anchor="t" lIns="0" rIns="0" tIns="0" bIns="0">
+            <a:spAutoFit/>
+          </a:bodyPr>
+          <a:lstStyle/>
+          <a:p>
+            <a:pPr algn="l">
+              <a:spcAft>
+                <a:spcPts val="810"/>
+              </a:spcAft>
+            </a:pPr>
+            <a:r>
+              <a:rPr sz="1800" b="0" i="0">
                 <a:solidFill>
                   <a:srgbClr val="1C1B19"/>
                 </a:solidFill>
                 <a:latin typeface="Source Serif 4"/>
               </a:rPr>
-              <a:t>Notice</a:t>
-            </a:r>
-          </a:p>
-        </p:txBody>
-      </p:sp>
-      <p:cxnSp>
-        <p:nvCxnSpPr>
-          <p:cNvPr id="8" name="Connector 7"/>
-          <p:cNvCxnSpPr/>
-          <p:nvPr/>
-        </p:nvCxnSpPr>
-        <p:spPr>
-          <a:xfrm>
-            <a:off x="2752344" y="3246120"/>
-            <a:ext cx="176021" cy="0"/>
-          </a:xfrm>
-          <a:prstGeom prst="line">
-            <a:avLst/>
-          </a:prstGeom>
-          <a:ln w="31750">
-            <a:solidFill>
-              <a:srgbClr val="F47B20"/>
-            </a:solidFill>
-            <a:tailEnd type="triangle"/>
-          </a:ln>
-        </p:spPr>
-        <p:style>
-          <a:lnRef idx="2">
-            <a:schemeClr val="accent1"/>
-          </a:lnRef>
-          <a:fillRef idx="0">
-            <a:schemeClr val="accent1"/>
-          </a:fillRef>
-          <a:effectRef idx="1">
-            <a:schemeClr val="accent1"/>
-          </a:effectRef>
-          <a:fontRef idx="minor">
-            <a:schemeClr val="tx1"/>
-          </a:fontRef>
-        </p:style>
-      </p:cxnSp>
+              <a:t>A teammate makes a comment about another player's body. A few guys laugh. The player goes quiet.</a:t>
+            </a:r>
+          </a:p>
+        </p:txBody>
+      </p:sp>
       <p:sp>
         <p:nvSpPr>
           <p:cNvPr id="9" name="Rectangle 8"/>
@@ -8064,8 +8872,8 @@
         </p:nvSpPr>
         <p:spPr>
           <a:xfrm>
-            <a:off x="2983229" y="2743200"/>
-            <a:ext cx="1874519" cy="1005840"/>
+            <a:off x="4419600" y="2103120"/>
+            <a:ext cx="3322320" cy="3840480"/>
           </a:xfrm>
           <a:prstGeom prst="rect">
             <a:avLst/>
@@ -8075,7 +8883,7 @@
           </a:solidFill>
           <a:ln w="15875">
             <a:solidFill>
-              <a:srgbClr val="0B2D5B"/>
+              <a:srgbClr val="D8D2C6"/>
             </a:solidFill>
           </a:ln>
           <a:effectLst/>
@@ -8110,8 +8918,8 @@
         </p:nvSpPr>
         <p:spPr>
           <a:xfrm>
-            <a:off x="2983229" y="2743200"/>
-            <a:ext cx="1874519" cy="1005840"/>
+            <a:off x="4648200" y="2286000"/>
+            <a:ext cx="2865120" cy="365760"/>
           </a:xfrm>
           <a:prstGeom prst="rect">
             <a:avLst/>
@@ -8119,64 +8927,67 @@
           <a:noFill/>
         </p:spPr>
         <p:txBody>
-          <a:bodyPr wrap="square" anchor="ctr" lIns="0" rIns="0" tIns="0" bIns="0">
+          <a:bodyPr wrap="square" anchor="t" lIns="0" rIns="0" tIns="0" bIns="0">
             <a:spAutoFit/>
           </a:bodyPr>
           <a:lstStyle/>
           <a:p>
-            <a:pPr algn="ctr">
-              <a:spcAft>
-                <a:spcPts val="900"/>
-              </a:spcAft>
-            </a:pPr>
-            <a:r>
-              <a:rPr sz="2000" b="1" i="0">
+            <a:pPr algn="l">
+              <a:spcAft>
+                <a:spcPts val="585"/>
+              </a:spcAft>
+            </a:pPr>
+            <a:r>
+              <a:rPr sz="1300" b="1" i="0">
+                <a:solidFill>
+                  <a:srgbClr val="0B2D5B"/>
+                </a:solidFill>
+                <a:latin typeface="Inter Tight"/>
+              </a:rPr>
+              <a:t>AT A PARTY</a:t>
+            </a:r>
+          </a:p>
+        </p:txBody>
+      </p:sp>
+      <p:sp>
+        <p:nvSpPr>
+          <p:cNvPr id="11" name="TextBox 10"/>
+          <p:cNvSpPr txBox="1"/>
+          <p:nvPr/>
+        </p:nvSpPr>
+        <p:spPr>
+          <a:xfrm>
+            <a:off x="4648200" y="2743200"/>
+            <a:ext cx="2865120" cy="3017520"/>
+          </a:xfrm>
+          <a:prstGeom prst="rect">
+            <a:avLst/>
+          </a:prstGeom>
+          <a:noFill/>
+        </p:spPr>
+        <p:txBody>
+          <a:bodyPr wrap="square" anchor="t" lIns="0" rIns="0" tIns="0" bIns="0">
+            <a:spAutoFit/>
+          </a:bodyPr>
+          <a:lstStyle/>
+          <a:p>
+            <a:pPr algn="l">
+              <a:spcAft>
+                <a:spcPts val="810"/>
+              </a:spcAft>
+            </a:pPr>
+            <a:r>
+              <a:rPr sz="1800" b="0" i="0">
                 <a:solidFill>
                   <a:srgbClr val="1C1B19"/>
                 </a:solidFill>
                 <a:latin typeface="Source Serif 4"/>
               </a:rPr>
-              <a:t>Call it a problem</a:t>
-            </a:r>
-          </a:p>
-        </p:txBody>
-      </p:sp>
-      <p:cxnSp>
-        <p:nvCxnSpPr>
-          <p:cNvPr id="11" name="Connector 10"/>
-          <p:cNvCxnSpPr/>
-          <p:nvPr/>
-        </p:nvCxnSpPr>
-        <p:spPr>
-          <a:xfrm>
-            <a:off x="4912614" y="3246120"/>
-            <a:ext cx="176022" cy="0"/>
-          </a:xfrm>
-          <a:prstGeom prst="line">
-            <a:avLst/>
-          </a:prstGeom>
-          <a:ln w="31750">
-            <a:solidFill>
-              <a:srgbClr val="F47B20"/>
-            </a:solidFill>
-            <a:tailEnd type="triangle"/>
-          </a:ln>
-        </p:spPr>
-        <p:style>
-          <a:lnRef idx="2">
-            <a:schemeClr val="accent1"/>
-          </a:lnRef>
-          <a:fillRef idx="0">
-            <a:schemeClr val="accent1"/>
-          </a:fillRef>
-          <a:effectRef idx="1">
-            <a:schemeClr val="accent1"/>
-          </a:effectRef>
-          <a:fontRef idx="minor">
-            <a:schemeClr val="tx1"/>
-          </a:fontRef>
-        </p:style>
-      </p:cxnSp>
+              <a:t>Someone keeps following Ana from your chem class. She looks uncomfortable and keeps scanning the room.</a:t>
+            </a:r>
+          </a:p>
+        </p:txBody>
+      </p:sp>
       <p:sp>
         <p:nvSpPr>
           <p:cNvPr id="12" name="Rectangle 11"/>
@@ -8185,8 +8996,8 @@
         </p:nvSpPr>
         <p:spPr>
           <a:xfrm>
-            <a:off x="5143500" y="2743200"/>
-            <a:ext cx="1874519" cy="1005840"/>
+            <a:off x="8016239" y="2103120"/>
+            <a:ext cx="3322320" cy="3840480"/>
           </a:xfrm>
           <a:prstGeom prst="rect">
             <a:avLst/>
@@ -8196,7 +9007,7 @@
           </a:solidFill>
           <a:ln w="15875">
             <a:solidFill>
-              <a:srgbClr val="0B2D5B"/>
+              <a:srgbClr val="D8D2C6"/>
             </a:solidFill>
           </a:ln>
           <a:effectLst/>
@@ -8231,289 +9042,8 @@
         </p:nvSpPr>
         <p:spPr>
           <a:xfrm>
-            <a:off x="5143500" y="2743200"/>
-            <a:ext cx="1874519" cy="1005840"/>
-          </a:xfrm>
-          <a:prstGeom prst="rect">
-            <a:avLst/>
-          </a:prstGeom>
-          <a:noFill/>
-        </p:spPr>
-        <p:txBody>
-          <a:bodyPr wrap="square" anchor="ctr" lIns="0" rIns="0" tIns="0" bIns="0">
-            <a:spAutoFit/>
-          </a:bodyPr>
-          <a:lstStyle/>
-          <a:p>
-            <a:pPr algn="ctr">
-              <a:spcAft>
-                <a:spcPts val="900"/>
-              </a:spcAft>
-            </a:pPr>
-            <a:r>
-              <a:rPr sz="2000" b="1" i="0">
-                <a:solidFill>
-                  <a:srgbClr val="1C1B19"/>
-                </a:solidFill>
-                <a:latin typeface="Source Serif 4"/>
-              </a:rPr>
-              <a:t>Feel it's yours</a:t>
-            </a:r>
-          </a:p>
-        </p:txBody>
-      </p:sp>
-      <p:cxnSp>
-        <p:nvCxnSpPr>
-          <p:cNvPr id="14" name="Connector 13"/>
-          <p:cNvCxnSpPr/>
-          <p:nvPr/>
-        </p:nvCxnSpPr>
-        <p:spPr>
-          <a:xfrm>
-            <a:off x="7072883" y="3246120"/>
-            <a:ext cx="176023" cy="0"/>
-          </a:xfrm>
-          <a:prstGeom prst="line">
-            <a:avLst/>
-          </a:prstGeom>
-          <a:ln w="31750">
-            <a:solidFill>
-              <a:srgbClr val="F47B20"/>
-            </a:solidFill>
-            <a:tailEnd type="triangle"/>
-          </a:ln>
-        </p:spPr>
-        <p:style>
-          <a:lnRef idx="2">
-            <a:schemeClr val="accent1"/>
-          </a:lnRef>
-          <a:fillRef idx="0">
-            <a:schemeClr val="accent1"/>
-          </a:fillRef>
-          <a:effectRef idx="1">
-            <a:schemeClr val="accent1"/>
-          </a:effectRef>
-          <a:fontRef idx="minor">
-            <a:schemeClr val="tx1"/>
-          </a:fontRef>
-        </p:style>
-      </p:cxnSp>
-      <p:sp>
-        <p:nvSpPr>
-          <p:cNvPr id="15" name="Rectangle 14"/>
-          <p:cNvSpPr/>
-          <p:nvPr/>
-        </p:nvSpPr>
-        <p:spPr>
-          <a:xfrm>
-            <a:off x="7303770" y="2743200"/>
-            <a:ext cx="1874519" cy="1005840"/>
-          </a:xfrm>
-          <a:prstGeom prst="rect">
-            <a:avLst/>
-          </a:prstGeom>
-          <a:solidFill>
-            <a:srgbClr val="FFFFFF"/>
-          </a:solidFill>
-          <a:ln w="15875">
-            <a:solidFill>
-              <a:srgbClr val="0B2D5B"/>
-            </a:solidFill>
-          </a:ln>
-          <a:effectLst/>
-        </p:spPr>
-        <p:style>
-          <a:lnRef idx="1">
-            <a:schemeClr val="accent1"/>
-          </a:lnRef>
-          <a:fillRef idx="3">
-            <a:schemeClr val="accent1"/>
-          </a:fillRef>
-          <a:effectRef idx="2">
-            <a:schemeClr val="accent1"/>
-          </a:effectRef>
-          <a:fontRef idx="minor">
-            <a:schemeClr val="lt1"/>
-          </a:fontRef>
-        </p:style>
-        <p:txBody>
-          <a:bodyPr rtlCol="0" anchor="ctr"/>
-          <a:lstStyle/>
-          <a:p>
-            <a:pPr algn="ctr"/>
-          </a:p>
-        </p:txBody>
-      </p:sp>
-      <p:sp>
-        <p:nvSpPr>
-          <p:cNvPr id="16" name="TextBox 15"/>
-          <p:cNvSpPr txBox="1"/>
-          <p:nvPr/>
-        </p:nvSpPr>
-        <p:spPr>
-          <a:xfrm>
-            <a:off x="7303770" y="2743200"/>
-            <a:ext cx="1874519" cy="1005840"/>
-          </a:xfrm>
-          <a:prstGeom prst="rect">
-            <a:avLst/>
-          </a:prstGeom>
-          <a:noFill/>
-        </p:spPr>
-        <p:txBody>
-          <a:bodyPr wrap="square" anchor="ctr" lIns="0" rIns="0" tIns="0" bIns="0">
-            <a:spAutoFit/>
-          </a:bodyPr>
-          <a:lstStyle/>
-          <a:p>
-            <a:pPr algn="ctr">
-              <a:spcAft>
-                <a:spcPts val="900"/>
-              </a:spcAft>
-            </a:pPr>
-            <a:r>
-              <a:rPr sz="2000" b="1" i="0">
-                <a:solidFill>
-                  <a:srgbClr val="1C1B19"/>
-                </a:solidFill>
-                <a:latin typeface="Source Serif 4"/>
-              </a:rPr>
-              <a:t>Know a move</a:t>
-            </a:r>
-          </a:p>
-        </p:txBody>
-      </p:sp>
-      <p:cxnSp>
-        <p:nvCxnSpPr>
-          <p:cNvPr id="17" name="Connector 16"/>
-          <p:cNvCxnSpPr/>
-          <p:nvPr/>
-        </p:nvCxnSpPr>
-        <p:spPr>
-          <a:xfrm>
-            <a:off x="9233154" y="3246120"/>
-            <a:ext cx="176022" cy="0"/>
-          </a:xfrm>
-          <a:prstGeom prst="line">
-            <a:avLst/>
-          </a:prstGeom>
-          <a:ln w="31750">
-            <a:solidFill>
-              <a:srgbClr val="F47B20"/>
-            </a:solidFill>
-            <a:tailEnd type="triangle"/>
-          </a:ln>
-        </p:spPr>
-        <p:style>
-          <a:lnRef idx="2">
-            <a:schemeClr val="accent1"/>
-          </a:lnRef>
-          <a:fillRef idx="0">
-            <a:schemeClr val="accent1"/>
-          </a:fillRef>
-          <a:effectRef idx="1">
-            <a:schemeClr val="accent1"/>
-          </a:effectRef>
-          <a:fontRef idx="minor">
-            <a:schemeClr val="tx1"/>
-          </a:fontRef>
-        </p:style>
-      </p:cxnSp>
-      <p:sp>
-        <p:nvSpPr>
-          <p:cNvPr id="18" name="Rectangle 17"/>
-          <p:cNvSpPr/>
-          <p:nvPr/>
-        </p:nvSpPr>
-        <p:spPr>
-          <a:xfrm>
-            <a:off x="9464040" y="2743200"/>
-            <a:ext cx="1874519" cy="1005840"/>
-          </a:xfrm>
-          <a:prstGeom prst="rect">
-            <a:avLst/>
-          </a:prstGeom>
-          <a:solidFill>
-            <a:srgbClr val="FFFFFF"/>
-          </a:solidFill>
-          <a:ln w="15875">
-            <a:solidFill>
-              <a:srgbClr val="0B2D5B"/>
-            </a:solidFill>
-          </a:ln>
-          <a:effectLst/>
-        </p:spPr>
-        <p:style>
-          <a:lnRef idx="1">
-            <a:schemeClr val="accent1"/>
-          </a:lnRef>
-          <a:fillRef idx="3">
-            <a:schemeClr val="accent1"/>
-          </a:fillRef>
-          <a:effectRef idx="2">
-            <a:schemeClr val="accent1"/>
-          </a:effectRef>
-          <a:fontRef idx="minor">
-            <a:schemeClr val="lt1"/>
-          </a:fontRef>
-        </p:style>
-        <p:txBody>
-          <a:bodyPr rtlCol="0" anchor="ctr"/>
-          <a:lstStyle/>
-          <a:p>
-            <a:pPr algn="ctr"/>
-          </a:p>
-        </p:txBody>
-      </p:sp>
-      <p:sp>
-        <p:nvSpPr>
-          <p:cNvPr id="19" name="TextBox 18"/>
-          <p:cNvSpPr txBox="1"/>
-          <p:nvPr/>
-        </p:nvSpPr>
-        <p:spPr>
-          <a:xfrm>
-            <a:off x="9464040" y="2743200"/>
-            <a:ext cx="1874519" cy="1005840"/>
-          </a:xfrm>
-          <a:prstGeom prst="rect">
-            <a:avLst/>
-          </a:prstGeom>
-          <a:noFill/>
-        </p:spPr>
-        <p:txBody>
-          <a:bodyPr wrap="square" anchor="ctr" lIns="0" rIns="0" tIns="0" bIns="0">
-            <a:spAutoFit/>
-          </a:bodyPr>
-          <a:lstStyle/>
-          <a:p>
-            <a:pPr algn="ctr">
-              <a:spcAft>
-                <a:spcPts val="900"/>
-              </a:spcAft>
-            </a:pPr>
-            <a:r>
-              <a:rPr sz="2000" b="1" i="0">
-                <a:solidFill>
-                  <a:srgbClr val="1C1B19"/>
-                </a:solidFill>
-                <a:latin typeface="Source Serif 4"/>
-              </a:rPr>
-              <a:t>Act</a:t>
-            </a:r>
-          </a:p>
-        </p:txBody>
-      </p:sp>
-      <p:sp>
-        <p:nvSpPr>
-          <p:cNvPr id="20" name="TextBox 19"/>
-          <p:cNvSpPr txBox="1"/>
-          <p:nvPr/>
-        </p:nvSpPr>
-        <p:spPr>
-          <a:xfrm>
-            <a:off x="822960" y="4160520"/>
-            <a:ext cx="10515600" cy="457200"/>
+            <a:off x="8244839" y="2286000"/>
+            <a:ext cx="2865120" cy="365760"/>
           </a:xfrm>
           <a:prstGeom prst="rect">
             <a:avLst/>
@@ -8526,33 +9056,33 @@
           </a:bodyPr>
           <a:lstStyle/>
           <a:p>
-            <a:pPr algn="ctr">
-              <a:spcAft>
-                <a:spcPts val="810"/>
-              </a:spcAft>
-            </a:pPr>
-            <a:r>
-              <a:rPr sz="1800" b="1" i="0">
-                <a:solidFill>
-                  <a:srgbClr val="F47B20"/>
+            <a:pPr algn="l">
+              <a:spcAft>
+                <a:spcPts val="585"/>
+              </a:spcAft>
+            </a:pPr>
+            <a:r>
+              <a:rPr sz="1300" b="1" i="0">
+                <a:solidFill>
+                  <a:srgbClr val="0B2D5B"/>
                 </a:solidFill>
                 <a:latin typeface="Inter Tight"/>
               </a:rPr>
-              <a:t>↺  and around again</a:t>
-            </a:r>
-          </a:p>
-        </p:txBody>
-      </p:sp>
-      <p:sp>
-        <p:nvSpPr>
-          <p:cNvPr id="21" name="TextBox 20"/>
+              <a:t>THE CLASS CHAT</a:t>
+            </a:r>
+          </a:p>
+        </p:txBody>
+      </p:sp>
+      <p:sp>
+        <p:nvSpPr>
+          <p:cNvPr id="14" name="TextBox 13"/>
           <p:cNvSpPr txBox="1"/>
           <p:nvPr/>
         </p:nvSpPr>
         <p:spPr>
           <a:xfrm>
-            <a:off x="822960" y="4846320"/>
-            <a:ext cx="10515600" cy="1188720"/>
+            <a:off x="8244839" y="2743200"/>
+            <a:ext cx="2865120" cy="3017520"/>
           </a:xfrm>
           <a:prstGeom prst="rect">
             <a:avLst/>
@@ -8565,19 +9095,19 @@
           </a:bodyPr>
           <a:lstStyle/>
           <a:p>
-            <a:pPr algn="ctr">
-              <a:spcAft>
-                <a:spcPts val="900"/>
-              </a:spcAft>
-            </a:pPr>
-            <a:r>
-              <a:rPr sz="2000" b="0" i="1">
-                <a:solidFill>
-                  <a:srgbClr val="5D5A54"/>
+            <a:pPr algn="l">
+              <a:spcAft>
+                <a:spcPts val="810"/>
+              </a:spcAft>
+            </a:pPr>
+            <a:r>
+              <a:rPr sz="1800" b="0" i="0">
+                <a:solidFill>
+                  <a:srgbClr val="1C1B19"/>
                 </a:solidFill>
                 <a:latin typeface="Source Serif 4"/>
               </a:rPr>
-              <a:t>Most people stall at gate 3 or gate 4.</a:t>
+              <a:t>Someone posts a voice clip mocking Wei's accent. In a 30-person chat, reactions start rolling in.</a:t>
             </a:r>
           </a:p>
         </p:txBody>
@@ -8686,7 +9216,7 @@
                 </a:solidFill>
                 <a:latin typeface="Inter Tight"/>
               </a:rPr>
-              <a:t>THE COMEBACK</a:t>
+              <a:t>PRIVATE</a:t>
             </a:r>
           </a:p>
         </p:txBody>
@@ -8732,14 +9262,58 @@
       </p:sp>
       <p:sp>
         <p:nvSpPr>
-          <p:cNvPr id="5" name="TextBox 4"/>
+          <p:cNvPr id="5" name="Rectangle 4"/>
+          <p:cNvSpPr/>
+          <p:nvPr/>
+        </p:nvSpPr>
+        <p:spPr>
+          <a:xfrm>
+            <a:off x="822960" y="1371600"/>
+            <a:ext cx="73152" cy="3566160"/>
+          </a:xfrm>
+          <a:prstGeom prst="rect">
+            <a:avLst/>
+          </a:prstGeom>
+          <a:solidFill>
+            <a:srgbClr val="F47B20"/>
+          </a:solidFill>
+          <a:ln>
+            <a:noFill/>
+          </a:ln>
+          <a:effectLst/>
+        </p:spPr>
+        <p:style>
+          <a:lnRef idx="1">
+            <a:schemeClr val="accent1"/>
+          </a:lnRef>
+          <a:fillRef idx="3">
+            <a:schemeClr val="accent1"/>
+          </a:fillRef>
+          <a:effectRef idx="2">
+            <a:schemeClr val="accent1"/>
+          </a:effectRef>
+          <a:fontRef idx="minor">
+            <a:schemeClr val="lt1"/>
+          </a:fontRef>
+        </p:style>
+        <p:txBody>
+          <a:bodyPr rtlCol="0" anchor="ctr"/>
+          <a:lstStyle/>
+          <a:p>
+            <a:pPr algn="ctr"/>
+          </a:p>
+        </p:txBody>
+      </p:sp>
+      <p:sp>
+        <p:nvSpPr>
+          <p:cNvPr id="6" name="TextBox 5"/>
           <p:cNvSpPr txBox="1"/>
           <p:nvPr/>
         </p:nvSpPr>
         <p:spPr>
           <a:xfrm>
-            <a:off x="822960" y="1463040"/>
-            <a:ext cx="10515600" cy="3291840"/>
+            <a:off x="1188720" y="1371600"/>
+            <a:ext cx="10058400" cy="3566160"/>
           </a:xfrm>
           <a:prstGeom prst="rect">
             <a:avLst/>
@@ -8754,31 +9328,31 @@
           <a:p>
             <a:pPr algn="l">
               <a:spcAft>
-                <a:spcPts val="2070"/>
-              </a:spcAft>
-            </a:pPr>
-            <a:r>
-              <a:rPr sz="4600" b="1" i="0">
+                <a:spcPts val="1800"/>
+              </a:spcAft>
+            </a:pPr>
+            <a:r>
+              <a:rPr sz="4000" b="0" i="1">
                 <a:solidFill>
                   <a:srgbClr val="1C1B19"/>
                 </a:solidFill>
                 <a:latin typeface="Source Serif 4"/>
               </a:rPr>
-              <a:t>When peers stepped in, bullying usually stopped.</a:t>
-            </a:r>
-          </a:p>
-        </p:txBody>
-      </p:sp>
-      <p:sp>
-        <p:nvSpPr>
-          <p:cNvPr id="6" name="TextBox 5"/>
+              <a:t>What's one line you'd actually say?</a:t>
+            </a:r>
+          </a:p>
+        </p:txBody>
+      </p:sp>
+      <p:sp>
+        <p:nvSpPr>
+          <p:cNvPr id="7" name="TextBox 6"/>
           <p:cNvSpPr txBox="1"/>
           <p:nvPr/>
         </p:nvSpPr>
         <p:spPr>
           <a:xfrm>
-            <a:off x="822960" y="4846320"/>
-            <a:ext cx="10515600" cy="1097280"/>
+            <a:off x="1188720" y="5120640"/>
+            <a:ext cx="10058400" cy="914400"/>
           </a:xfrm>
           <a:prstGeom prst="rect">
             <a:avLst/>
@@ -8793,17 +9367,17 @@
           <a:p>
             <a:pPr algn="l">
               <a:spcAft>
-                <a:spcPts val="990"/>
-              </a:spcAft>
-            </a:pPr>
-            <a:r>
-              <a:rPr sz="2200" b="0" i="1">
+                <a:spcPts val="810"/>
+              </a:spcAft>
+            </a:pPr>
+            <a:r>
+              <a:rPr sz="1800" b="0" i="0">
                 <a:solidFill>
                   <a:srgbClr val="5D5A54"/>
                 </a:solidFill>
-                <a:latin typeface="Source Serif 4"/>
-              </a:rPr>
-              <a:t>Peers were there for 88% of playground bullying. They stepped in 19% of the time.</a:t>
+                <a:latin typeface="Inter Tight"/>
+              </a:rPr>
+              <a:t>Write it on your card. It goes home with you.</a:t>
             </a:r>
           </a:p>
         </p:txBody>
@@ -8912,7 +9486,7 @@
                 </a:solidFill>
                 <a:latin typeface="Inter Tight"/>
               </a:rPr>
-              <a:t>KNOW A MOVE</a:t>
+              <a:t>BEFORE YOU GO</a:t>
             </a:r>
           </a:p>
         </p:txBody>
@@ -8964,8 +9538,8 @@
         </p:nvSpPr>
         <p:spPr>
           <a:xfrm>
-            <a:off x="822960" y="1005840"/>
-            <a:ext cx="10515600" cy="1097280"/>
+            <a:off x="822960" y="1188720"/>
+            <a:ext cx="10515600" cy="914400"/>
           </a:xfrm>
           <a:prstGeom prst="rect">
             <a:avLst/>
@@ -8990,7 +9564,7 @@
                 </a:solidFill>
                 <a:latin typeface="Source Serif 4"/>
               </a:rPr>
-              <a:t>Four ways to step in</a:t>
+              <a:t>You don't need a speech. You need one move.</a:t>
             </a:r>
           </a:p>
         </p:txBody>
@@ -9003,8 +9577,8 @@
         </p:nvSpPr>
         <p:spPr>
           <a:xfrm>
-            <a:off x="822960" y="2194560"/>
-            <a:ext cx="548640" cy="1005840"/>
+            <a:off x="822960" y="2286000"/>
+            <a:ext cx="10515600" cy="1463040"/>
           </a:xfrm>
           <a:prstGeom prst="rect">
             <a:avLst/>
@@ -9019,31 +9593,77 @@
           <a:p>
             <a:pPr algn="l">
               <a:spcAft>
-                <a:spcPts val="1170"/>
-              </a:spcAft>
-            </a:pPr>
-            <a:r>
-              <a:rPr sz="2600" b="1" i="0">
-                <a:solidFill>
-                  <a:srgbClr val="F47B20"/>
+                <a:spcPts val="1080"/>
+              </a:spcAft>
+            </a:pPr>
+            <a:r>
+              <a:rPr sz="2400" b="0" i="0">
+                <a:solidFill>
+                  <a:srgbClr val="1C1B19"/>
                 </a:solidFill>
                 <a:latin typeface="Source Serif 4"/>
               </a:rPr>
-              <a:t>1</a:t>
-            </a:r>
-          </a:p>
-        </p:txBody>
-      </p:sp>
-      <p:sp>
-        <p:nvSpPr>
-          <p:cNvPr id="7" name="TextBox 6"/>
+              <a:t>If someone is hurt, threatened, or private images are being shared, get an adult right away.</a:t>
+            </a:r>
+          </a:p>
+        </p:txBody>
+      </p:sp>
+      <p:sp>
+        <p:nvSpPr>
+          <p:cNvPr id="7" name="Rectangle 6"/>
+          <p:cNvSpPr/>
+          <p:nvPr/>
+        </p:nvSpPr>
+        <p:spPr>
+          <a:xfrm>
+            <a:off x="822960" y="4023360"/>
+            <a:ext cx="10515600" cy="1371600"/>
+          </a:xfrm>
+          <a:prstGeom prst="rect">
+            <a:avLst/>
+          </a:prstGeom>
+          <a:solidFill>
+            <a:srgbClr val="FFFFFF"/>
+          </a:solidFill>
+          <a:ln w="15875">
+            <a:solidFill>
+              <a:srgbClr val="1C1B19"/>
+            </a:solidFill>
+          </a:ln>
+          <a:effectLst/>
+        </p:spPr>
+        <p:style>
+          <a:lnRef idx="1">
+            <a:schemeClr val="accent1"/>
+          </a:lnRef>
+          <a:fillRef idx="3">
+            <a:schemeClr val="accent1"/>
+          </a:fillRef>
+          <a:effectRef idx="2">
+            <a:schemeClr val="accent1"/>
+          </a:effectRef>
+          <a:fontRef idx="minor">
+            <a:schemeClr val="lt1"/>
+          </a:fontRef>
+        </p:style>
+        <p:txBody>
+          <a:bodyPr rtlCol="0" anchor="ctr"/>
+          <a:lstStyle/>
+          <a:p>
+            <a:pPr algn="ctr"/>
+          </a:p>
+        </p:txBody>
+      </p:sp>
+      <p:sp>
+        <p:nvSpPr>
+          <p:cNvPr id="8" name="TextBox 7"/>
           <p:cNvSpPr txBox="1"/>
           <p:nvPr/>
         </p:nvSpPr>
         <p:spPr>
           <a:xfrm>
-            <a:off x="1463040" y="2231136"/>
-            <a:ext cx="9875520" cy="1005840"/>
+            <a:off x="1097280" y="4206240"/>
+            <a:ext cx="10058400" cy="365760"/>
           </a:xfrm>
           <a:prstGeom prst="rect">
             <a:avLst/>
@@ -9058,47 +9678,31 @@
           <a:p>
             <a:pPr algn="l">
               <a:spcAft>
-                <a:spcPts val="945"/>
-              </a:spcAft>
-            </a:pPr>
-            <a:r>
-              <a:rPr sz="2100" b="1" i="0">
-                <a:solidFill>
-                  <a:srgbClr val="1C1B19"/>
-                </a:solidFill>
-                <a:latin typeface="Source Serif 4"/>
-              </a:rPr>
-              <a:t>Distract.</a:t>
-            </a:r>
-          </a:p>
-          <a:p>
-            <a:pPr algn="l">
-              <a:spcAft>
-                <a:spcPts val="945"/>
-              </a:spcAft>
-            </a:pPr>
-            <a:r>
-              <a:rPr sz="1600" b="0" i="0">
-                <a:solidFill>
-                  <a:srgbClr val="5D5A54"/>
-                </a:solidFill>
-                <a:latin typeface="Source Serif 4"/>
-              </a:rPr>
-              <a:t>"Yo, come with me for a sec."</a:t>
-            </a:r>
-          </a:p>
-        </p:txBody>
-      </p:sp>
-      <p:sp>
-        <p:nvSpPr>
-          <p:cNvPr id="8" name="TextBox 7"/>
+                <a:spcPts val="540"/>
+              </a:spcAft>
+            </a:pPr>
+            <a:r>
+              <a:rPr sz="1200" b="1" i="0">
+                <a:solidFill>
+                  <a:srgbClr val="0B2D5B"/>
+                </a:solidFill>
+                <a:latin typeface="Inter Tight"/>
+              </a:rPr>
+              <a:t>STUDENT PAGE</a:t>
+            </a:r>
+          </a:p>
+        </p:txBody>
+      </p:sp>
+      <p:sp>
+        <p:nvSpPr>
+          <p:cNvPr id="9" name="TextBox 8"/>
           <p:cNvSpPr txBox="1"/>
           <p:nvPr/>
         </p:nvSpPr>
         <p:spPr>
           <a:xfrm>
-            <a:off x="822960" y="3200400"/>
-            <a:ext cx="548640" cy="1005840"/>
+            <a:off x="1097280" y="4617720"/>
+            <a:ext cx="10058400" cy="640080"/>
           </a:xfrm>
           <a:prstGeom prst="rect">
             <a:avLst/>
@@ -9113,260 +9717,17 @@
           <a:p>
             <a:pPr algn="l">
               <a:spcAft>
-                <a:spcPts val="1170"/>
-              </a:spcAft>
-            </a:pPr>
-            <a:r>
-              <a:rPr sz="2600" b="1" i="0">
-                <a:solidFill>
-                  <a:srgbClr val="F47B20"/>
-                </a:solidFill>
-                <a:latin typeface="Source Serif 4"/>
-              </a:rPr>
-              <a:t>2</a:t>
-            </a:r>
-          </a:p>
-        </p:txBody>
-      </p:sp>
-      <p:sp>
-        <p:nvSpPr>
-          <p:cNvPr id="9" name="TextBox 8"/>
-          <p:cNvSpPr txBox="1"/>
-          <p:nvPr/>
-        </p:nvSpPr>
-        <p:spPr>
-          <a:xfrm>
-            <a:off x="1463040" y="3236976"/>
-            <a:ext cx="9875520" cy="1005840"/>
-          </a:xfrm>
-          <a:prstGeom prst="rect">
-            <a:avLst/>
-          </a:prstGeom>
-          <a:noFill/>
-        </p:spPr>
-        <p:txBody>
-          <a:bodyPr wrap="square" anchor="t" lIns="0" rIns="0" tIns="0" bIns="0">
-            <a:spAutoFit/>
-          </a:bodyPr>
-          <a:lstStyle/>
-          <a:p>
-            <a:pPr algn="l">
-              <a:spcAft>
-                <a:spcPts val="945"/>
-              </a:spcAft>
-            </a:pPr>
-            <a:r>
-              <a:rPr sz="2100" b="1" i="0">
+                <a:spcPts val="900"/>
+              </a:spcAft>
+            </a:pPr>
+            <a:r>
+              <a:rPr sz="2000" b="0" i="0">
                 <a:solidFill>
                   <a:srgbClr val="1C1B19"/>
                 </a:solidFill>
-                <a:latin typeface="Source Serif 4"/>
-              </a:rPr>
-              <a:t>Delegate.</a:t>
-            </a:r>
-          </a:p>
-          <a:p>
-            <a:pPr algn="l">
-              <a:spcAft>
-                <a:spcPts val="945"/>
-              </a:spcAft>
-            </a:pPr>
-            <a:r>
-              <a:rPr sz="1600" b="0" i="0">
-                <a:solidFill>
-                  <a:srgbClr val="5D5A54"/>
-                </a:solidFill>
-                <a:latin typeface="Source Serif 4"/>
-              </a:rPr>
-              <a:t>Bring in a coach, teacher, host, or a friend people listen to.</a:t>
-            </a:r>
-          </a:p>
-        </p:txBody>
-      </p:sp>
-      <p:sp>
-        <p:nvSpPr>
-          <p:cNvPr id="10" name="TextBox 9"/>
-          <p:cNvSpPr txBox="1"/>
-          <p:nvPr/>
-        </p:nvSpPr>
-        <p:spPr>
-          <a:xfrm>
-            <a:off x="822960" y="4206240"/>
-            <a:ext cx="548640" cy="1005840"/>
-          </a:xfrm>
-          <a:prstGeom prst="rect">
-            <a:avLst/>
-          </a:prstGeom>
-          <a:noFill/>
-        </p:spPr>
-        <p:txBody>
-          <a:bodyPr wrap="square" anchor="t" lIns="0" rIns="0" tIns="0" bIns="0">
-            <a:spAutoFit/>
-          </a:bodyPr>
-          <a:lstStyle/>
-          <a:p>
-            <a:pPr algn="l">
-              <a:spcAft>
-                <a:spcPts val="1170"/>
-              </a:spcAft>
-            </a:pPr>
-            <a:r>
-              <a:rPr sz="2600" b="1" i="0">
-                <a:solidFill>
-                  <a:srgbClr val="F47B20"/>
-                </a:solidFill>
-                <a:latin typeface="Source Serif 4"/>
-              </a:rPr>
-              <a:t>3</a:t>
-            </a:r>
-          </a:p>
-        </p:txBody>
-      </p:sp>
-      <p:sp>
-        <p:nvSpPr>
-          <p:cNvPr id="11" name="TextBox 10"/>
-          <p:cNvSpPr txBox="1"/>
-          <p:nvPr/>
-        </p:nvSpPr>
-        <p:spPr>
-          <a:xfrm>
-            <a:off x="1463040" y="4242816"/>
-            <a:ext cx="9875520" cy="1005840"/>
-          </a:xfrm>
-          <a:prstGeom prst="rect">
-            <a:avLst/>
-          </a:prstGeom>
-          <a:noFill/>
-        </p:spPr>
-        <p:txBody>
-          <a:bodyPr wrap="square" anchor="t" lIns="0" rIns="0" tIns="0" bIns="0">
-            <a:spAutoFit/>
-          </a:bodyPr>
-          <a:lstStyle/>
-          <a:p>
-            <a:pPr algn="l">
-              <a:spcAft>
-                <a:spcPts val="945"/>
-              </a:spcAft>
-            </a:pPr>
-            <a:r>
-              <a:rPr sz="2100" b="1" i="0">
-                <a:solidFill>
-                  <a:srgbClr val="1C1B19"/>
-                </a:solidFill>
-                <a:latin typeface="Source Serif 4"/>
-              </a:rPr>
-              <a:t>Direct.</a:t>
-            </a:r>
-          </a:p>
-          <a:p>
-            <a:pPr algn="l">
-              <a:spcAft>
-                <a:spcPts val="945"/>
-              </a:spcAft>
-            </a:pPr>
-            <a:r>
-              <a:rPr sz="1600" b="0" i="0">
-                <a:solidFill>
-                  <a:srgbClr val="5D5A54"/>
-                </a:solidFill>
-                <a:latin typeface="Source Serif 4"/>
-              </a:rPr>
-              <a:t>Short and flat, only if it feels safe: "Not funny."</a:t>
-            </a:r>
-          </a:p>
-        </p:txBody>
-      </p:sp>
-      <p:sp>
-        <p:nvSpPr>
-          <p:cNvPr id="12" name="TextBox 11"/>
-          <p:cNvSpPr txBox="1"/>
-          <p:nvPr/>
-        </p:nvSpPr>
-        <p:spPr>
-          <a:xfrm>
-            <a:off x="822960" y="5212080"/>
-            <a:ext cx="548640" cy="1005840"/>
-          </a:xfrm>
-          <a:prstGeom prst="rect">
-            <a:avLst/>
-          </a:prstGeom>
-          <a:noFill/>
-        </p:spPr>
-        <p:txBody>
-          <a:bodyPr wrap="square" anchor="t" lIns="0" rIns="0" tIns="0" bIns="0">
-            <a:spAutoFit/>
-          </a:bodyPr>
-          <a:lstStyle/>
-          <a:p>
-            <a:pPr algn="l">
-              <a:spcAft>
-                <a:spcPts val="1170"/>
-              </a:spcAft>
-            </a:pPr>
-            <a:r>
-              <a:rPr sz="2600" b="1" i="0">
-                <a:solidFill>
-                  <a:srgbClr val="F47B20"/>
-                </a:solidFill>
-                <a:latin typeface="Source Serif 4"/>
-              </a:rPr>
-              <a:t>4</a:t>
-            </a:r>
-          </a:p>
-        </p:txBody>
-      </p:sp>
-      <p:sp>
-        <p:nvSpPr>
-          <p:cNvPr id="13" name="TextBox 12"/>
-          <p:cNvSpPr txBox="1"/>
-          <p:nvPr/>
-        </p:nvSpPr>
-        <p:spPr>
-          <a:xfrm>
-            <a:off x="1463040" y="5248656"/>
-            <a:ext cx="9875520" cy="1005840"/>
-          </a:xfrm>
-          <a:prstGeom prst="rect">
-            <a:avLst/>
-          </a:prstGeom>
-          <a:noFill/>
-        </p:spPr>
-        <p:txBody>
-          <a:bodyPr wrap="square" anchor="t" lIns="0" rIns="0" tIns="0" bIns="0">
-            <a:spAutoFit/>
-          </a:bodyPr>
-          <a:lstStyle/>
-          <a:p>
-            <a:pPr algn="l">
-              <a:spcAft>
-                <a:spcPts val="945"/>
-              </a:spcAft>
-            </a:pPr>
-            <a:r>
-              <a:rPr sz="2100" b="1" i="0">
-                <a:solidFill>
-                  <a:srgbClr val="1C1B19"/>
-                </a:solidFill>
-                <a:latin typeface="Source Serif 4"/>
-              </a:rPr>
-              <a:t>Delay.</a:t>
-            </a:r>
-          </a:p>
-          <a:p>
-            <a:pPr algn="l">
-              <a:spcAft>
-                <a:spcPts val="945"/>
-              </a:spcAft>
-            </a:pPr>
-            <a:r>
-              <a:rPr sz="1600" b="0" i="0">
-                <a:solidFill>
-                  <a:srgbClr val="5D5A54"/>
-                </a:solidFill>
-                <a:latin typeface="Source Serif 4"/>
-              </a:rPr>
-              <a:t>Afterward: "I saw what happened. You okay?"</a:t>
+                <a:latin typeface="Inter Tight"/>
+              </a:rPr>
+              <a:t>https://rmwtoolkit.github.io/bcds-toolkit/speaking-up-high-school.html</a:t>
             </a:r>
           </a:p>
         </p:txBody>

--- a/decks/speaking-up-lesson-v2.pptx
+++ b/decks/speaking-up-lesson-v2.pptx
@@ -6656,6 +6656,45 @@
                 <a:latin typeface="Inter Tight"/>
               </a:rPr>
               <a:t>Beaver Upper School · Counseling</a:t>
+            </a:r>
+          </a:p>
+        </p:txBody>
+      </p:sp>
+      <p:sp>
+        <p:nvSpPr>
+          <p:cNvPr id="8" name="TextBox 7"/>
+          <p:cNvSpPr txBox="1"/>
+          <p:nvPr/>
+        </p:nvSpPr>
+        <p:spPr>
+          <a:xfrm>
+            <a:off x="6766560" y="5897880"/>
+            <a:ext cx="4846320" cy="640080"/>
+          </a:xfrm>
+          <a:prstGeom prst="rect">
+            <a:avLst/>
+          </a:prstGeom>
+          <a:noFill/>
+        </p:spPr>
+        <p:txBody>
+          <a:bodyPr wrap="square" anchor="t" lIns="0" rIns="0" tIns="0" bIns="0">
+            <a:spAutoFit/>
+          </a:bodyPr>
+          <a:lstStyle/>
+          <a:p>
+            <a:pPr algn="r">
+              <a:spcAft>
+                <a:spcPts val="495"/>
+              </a:spcAft>
+            </a:pPr>
+            <a:r>
+              <a:rPr sz="1100" b="0" i="0">
+                <a:solidFill>
+                  <a:srgbClr val="E8E4DA"/>
+                </a:solidFill>
+                <a:latin typeface="Inter Tight"/>
+              </a:rPr>
+              <a:t>Written by Dr. Rick Wilson, with AI-assisted drafting. Every lesson is reviewed and edited by Dr. Wilson.</a:t>
             </a:r>
           </a:p>
         </p:txBody>
